--- a/chapter03/ASE_3_PSP_Career.pptx
+++ b/chapter03/ASE_3_PSP_Career.pptx
@@ -1,58 +1,58 @@
 
 <file path=ppt/presentation.xml><?xml version="1.0" encoding="utf-8"?>
-<p:presentation xmlns:a="http://schemas.openxmlformats.org/drawingml/2006/main" xmlns:r="http://schemas.openxmlformats.org/officeDocument/2006/relationships" xmlns:p="http://schemas.openxmlformats.org/presentationml/2006/main" saveSubsetFonts="1">
+<p:presentation xmlns:a="http://schemas.openxmlformats.org/drawingml/2006/main" xmlns:r="http://schemas.openxmlformats.org/officeDocument/2006/relationships" xmlns:p="http://schemas.openxmlformats.org/presentationml/2006/main">
   <p:sldMasterIdLst>
-    <p:sldMasterId id="2147483876" r:id="rId4"/>
+    <p:sldMasterId id="2147483648" r:id="rId1"/>
   </p:sldMasterIdLst>
   <p:notesMasterIdLst>
-    <p:notesMasterId r:id="rId50"/>
+    <p:notesMasterId r:id="rId5"/>
   </p:notesMasterIdLst>
   <p:sldIdLst>
-    <p:sldId id="256" r:id="rId5"/>
-    <p:sldId id="277" r:id="rId6"/>
-    <p:sldId id="278" r:id="rId7"/>
-    <p:sldId id="265" r:id="rId8"/>
-    <p:sldId id="288" r:id="rId9"/>
-    <p:sldId id="294" r:id="rId10"/>
-    <p:sldId id="286" r:id="rId11"/>
-    <p:sldId id="287" r:id="rId12"/>
-    <p:sldId id="273" r:id="rId13"/>
-    <p:sldId id="274" r:id="rId14"/>
-    <p:sldId id="270" r:id="rId15"/>
-    <p:sldId id="297" r:id="rId16"/>
-    <p:sldId id="298" r:id="rId17"/>
-    <p:sldId id="299" r:id="rId18"/>
-    <p:sldId id="279" r:id="rId19"/>
-    <p:sldId id="280" r:id="rId20"/>
-    <p:sldId id="284" r:id="rId21"/>
-    <p:sldId id="281" r:id="rId22"/>
-    <p:sldId id="271" r:id="rId23"/>
-    <p:sldId id="275" r:id="rId24"/>
-    <p:sldId id="282" r:id="rId25"/>
-    <p:sldId id="301" r:id="rId26"/>
-    <p:sldId id="302" r:id="rId27"/>
-    <p:sldId id="303" r:id="rId28"/>
-    <p:sldId id="307" r:id="rId29"/>
-    <p:sldId id="304" r:id="rId30"/>
-    <p:sldId id="305" r:id="rId31"/>
-    <p:sldId id="306" r:id="rId32"/>
-    <p:sldId id="308" r:id="rId33"/>
-    <p:sldId id="309" r:id="rId34"/>
-    <p:sldId id="310" r:id="rId35"/>
-    <p:sldId id="311" r:id="rId36"/>
-    <p:sldId id="314" r:id="rId37"/>
-    <p:sldId id="312" r:id="rId38"/>
-    <p:sldId id="317" r:id="rId39"/>
-    <p:sldId id="313" r:id="rId40"/>
-    <p:sldId id="315" r:id="rId41"/>
-    <p:sldId id="316" r:id="rId42"/>
-    <p:sldId id="290" r:id="rId43"/>
-    <p:sldId id="295" r:id="rId44"/>
-    <p:sldId id="296" r:id="rId45"/>
-    <p:sldId id="300" r:id="rId46"/>
-    <p:sldId id="283" r:id="rId47"/>
-    <p:sldId id="285" r:id="rId48"/>
-    <p:sldId id="374" r:id="rId49"/>
+    <p:sldId id="256" r:id="rId3"/>
+    <p:sldId id="277" r:id="rId4"/>
+    <p:sldId id="278" r:id="rId6"/>
+    <p:sldId id="265" r:id="rId7"/>
+    <p:sldId id="288" r:id="rId8"/>
+    <p:sldId id="294" r:id="rId9"/>
+    <p:sldId id="286" r:id="rId10"/>
+    <p:sldId id="287" r:id="rId11"/>
+    <p:sldId id="273" r:id="rId12"/>
+    <p:sldId id="274" r:id="rId13"/>
+    <p:sldId id="270" r:id="rId14"/>
+    <p:sldId id="297" r:id="rId15"/>
+    <p:sldId id="298" r:id="rId16"/>
+    <p:sldId id="299" r:id="rId17"/>
+    <p:sldId id="279" r:id="rId18"/>
+    <p:sldId id="280" r:id="rId19"/>
+    <p:sldId id="284" r:id="rId20"/>
+    <p:sldId id="281" r:id="rId21"/>
+    <p:sldId id="271" r:id="rId22"/>
+    <p:sldId id="275" r:id="rId23"/>
+    <p:sldId id="282" r:id="rId24"/>
+    <p:sldId id="301" r:id="rId25"/>
+    <p:sldId id="302" r:id="rId26"/>
+    <p:sldId id="303" r:id="rId27"/>
+    <p:sldId id="307" r:id="rId28"/>
+    <p:sldId id="304" r:id="rId29"/>
+    <p:sldId id="305" r:id="rId30"/>
+    <p:sldId id="306" r:id="rId31"/>
+    <p:sldId id="308" r:id="rId32"/>
+    <p:sldId id="309" r:id="rId33"/>
+    <p:sldId id="310" r:id="rId34"/>
+    <p:sldId id="311" r:id="rId35"/>
+    <p:sldId id="314" r:id="rId36"/>
+    <p:sldId id="312" r:id="rId37"/>
+    <p:sldId id="317" r:id="rId38"/>
+    <p:sldId id="313" r:id="rId39"/>
+    <p:sldId id="315" r:id="rId40"/>
+    <p:sldId id="316" r:id="rId41"/>
+    <p:sldId id="290" r:id="rId42"/>
+    <p:sldId id="295" r:id="rId43"/>
+    <p:sldId id="296" r:id="rId44"/>
+    <p:sldId id="300" r:id="rId45"/>
+    <p:sldId id="283" r:id="rId46"/>
+    <p:sldId id="285" r:id="rId47"/>
+    <p:sldId id="374" r:id="rId48"/>
   </p:sldIdLst>
   <p:sldSz cx="12192000" cy="6858000"/>
   <p:notesSz cx="6858000" cy="9144000"/>
@@ -71,7 +71,7 @@
         <a:solidFill>
           <a:schemeClr val="tx1"/>
         </a:solidFill>
-        <a:latin typeface="Arial" charset="0"/>
+        <a:latin typeface="Arial" panose="020B0604020202020204" pitchFamily="34" charset="0"/>
         <a:ea typeface="+mn-ea"/>
         <a:cs typeface="+mn-cs"/>
       </a:defRPr>
@@ -87,7 +87,7 @@
         <a:solidFill>
           <a:schemeClr val="tx1"/>
         </a:solidFill>
-        <a:latin typeface="Arial" charset="0"/>
+        <a:latin typeface="Arial" panose="020B0604020202020204" pitchFamily="34" charset="0"/>
         <a:ea typeface="+mn-ea"/>
         <a:cs typeface="+mn-cs"/>
       </a:defRPr>
@@ -103,7 +103,7 @@
         <a:solidFill>
           <a:schemeClr val="tx1"/>
         </a:solidFill>
-        <a:latin typeface="Arial" charset="0"/>
+        <a:latin typeface="Arial" panose="020B0604020202020204" pitchFamily="34" charset="0"/>
         <a:ea typeface="+mn-ea"/>
         <a:cs typeface="+mn-cs"/>
       </a:defRPr>
@@ -119,7 +119,7 @@
         <a:solidFill>
           <a:schemeClr val="tx1"/>
         </a:solidFill>
-        <a:latin typeface="Arial" charset="0"/>
+        <a:latin typeface="Arial" panose="020B0604020202020204" pitchFamily="34" charset="0"/>
         <a:ea typeface="+mn-ea"/>
         <a:cs typeface="+mn-cs"/>
       </a:defRPr>
@@ -135,7 +135,7 @@
         <a:solidFill>
           <a:schemeClr val="tx1"/>
         </a:solidFill>
-        <a:latin typeface="Arial" charset="0"/>
+        <a:latin typeface="Arial" panose="020B0604020202020204" pitchFamily="34" charset="0"/>
         <a:ea typeface="+mn-ea"/>
         <a:cs typeface="+mn-cs"/>
       </a:defRPr>
@@ -145,7 +145,7 @@
         <a:solidFill>
           <a:schemeClr val="tx1"/>
         </a:solidFill>
-        <a:latin typeface="Arial" charset="0"/>
+        <a:latin typeface="Arial" panose="020B0604020202020204" pitchFamily="34" charset="0"/>
         <a:ea typeface="+mn-ea"/>
         <a:cs typeface="+mn-cs"/>
       </a:defRPr>
@@ -155,7 +155,7 @@
         <a:solidFill>
           <a:schemeClr val="tx1"/>
         </a:solidFill>
-        <a:latin typeface="Arial" charset="0"/>
+        <a:latin typeface="Arial" panose="020B0604020202020204" pitchFamily="34" charset="0"/>
         <a:ea typeface="+mn-ea"/>
         <a:cs typeface="+mn-cs"/>
       </a:defRPr>
@@ -165,7 +165,7 @@
         <a:solidFill>
           <a:schemeClr val="tx1"/>
         </a:solidFill>
-        <a:latin typeface="Arial" charset="0"/>
+        <a:latin typeface="Arial" panose="020B0604020202020204" pitchFamily="34" charset="0"/>
         <a:ea typeface="+mn-ea"/>
         <a:cs typeface="+mn-cs"/>
       </a:defRPr>
@@ -175,7 +175,7 @@
         <a:solidFill>
           <a:schemeClr val="tx1"/>
         </a:solidFill>
-        <a:latin typeface="Arial" charset="0"/>
+        <a:latin typeface="Arial" panose="020B0604020202020204" pitchFamily="34" charset="0"/>
         <a:ea typeface="+mn-ea"/>
         <a:cs typeface="+mn-cs"/>
       </a:defRPr>
@@ -198,404 +198,6 @@
     </p:ext>
   </p:extLst>
 </p:presentation>
-</file>
-
-<file path=ppt/changesInfos/changesInfo1.xml><?xml version="1.0" encoding="utf-8"?>
-<pc:chgInfo xmlns:a="http://schemas.openxmlformats.org/drawingml/2006/main" xmlns:r="http://schemas.openxmlformats.org/officeDocument/2006/relationships" xmlns:ac="http://schemas.microsoft.com/office/drawing/2013/main/command" xmlns:pc="http://schemas.microsoft.com/office/powerpoint/2013/main/command">
-  <pc:docChgLst>
-    <pc:chgData name="Xin Zou" userId="260b9726081dae15" providerId="LiveId" clId="{9D297BCE-98D2-4025-9670-F2ABFDE5436C}"/>
-    <pc:docChg chg="modSld">
-      <pc:chgData name="Xin Zou" userId="260b9726081dae15" providerId="LiveId" clId="{9D297BCE-98D2-4025-9670-F2ABFDE5436C}" dt="2025-10-15T11:35:36.260" v="7" actId="20577"/>
-      <pc:docMkLst>
-        <pc:docMk/>
-      </pc:docMkLst>
-      <pc:sldChg chg="modSp mod">
-        <pc:chgData name="Xin Zou" userId="260b9726081dae15" providerId="LiveId" clId="{9D297BCE-98D2-4025-9670-F2ABFDE5436C}" dt="2025-10-15T11:34:58.298" v="0" actId="20577"/>
-        <pc:sldMkLst>
-          <pc:docMk/>
-          <pc:sldMk cId="0" sldId="282"/>
-        </pc:sldMkLst>
-        <pc:spChg chg="mod">
-          <ac:chgData name="Xin Zou" userId="260b9726081dae15" providerId="LiveId" clId="{9D297BCE-98D2-4025-9670-F2ABFDE5436C}" dt="2025-10-15T11:34:58.298" v="0" actId="20577"/>
-          <ac:spMkLst>
-            <pc:docMk/>
-            <pc:sldMk cId="0" sldId="282"/>
-            <ac:spMk id="2" creationId="{00000000-0000-0000-0000-000000000000}"/>
-          </ac:spMkLst>
-        </pc:spChg>
-      </pc:sldChg>
-      <pc:sldChg chg="modSp mod">
-        <pc:chgData name="Xin Zou" userId="260b9726081dae15" providerId="LiveId" clId="{9D297BCE-98D2-4025-9670-F2ABFDE5436C}" dt="2025-10-15T11:35:36.260" v="7" actId="20577"/>
-        <pc:sldMkLst>
-          <pc:docMk/>
-          <pc:sldMk cId="852070667" sldId="312"/>
-        </pc:sldMkLst>
-        <pc:spChg chg="mod">
-          <ac:chgData name="Xin Zou" userId="260b9726081dae15" providerId="LiveId" clId="{9D297BCE-98D2-4025-9670-F2ABFDE5436C}" dt="2025-10-15T11:35:36.260" v="7" actId="20577"/>
-          <ac:spMkLst>
-            <pc:docMk/>
-            <pc:sldMk cId="852070667" sldId="312"/>
-            <ac:spMk id="2" creationId="{3CAD3260-D3B2-467A-9605-1567B03BC767}"/>
-          </ac:spMkLst>
-        </pc:spChg>
-      </pc:sldChg>
-    </pc:docChg>
-  </pc:docChgLst>
-  <pc:docChgLst>
-    <pc:chgData name="Xin Zou" userId="260b9726081dae15" providerId="LiveId" clId="{FE08A991-EB5C-498E-983D-97A2BE0F5BFB}"/>
-    <pc:docChg chg="undo custSel addSld delSld modSld modMainMaster">
-      <pc:chgData name="Xin Zou" userId="260b9726081dae15" providerId="LiveId" clId="{FE08A991-EB5C-498E-983D-97A2BE0F5BFB}" dt="2018-10-08T05:56:17.663" v="9126" actId="27636"/>
-      <pc:docMkLst>
-        <pc:docMk/>
-      </pc:docMkLst>
-      <pc:sldChg chg="modSp">
-        <pc:chgData name="Xin Zou" userId="260b9726081dae15" providerId="LiveId" clId="{FE08A991-EB5C-498E-983D-97A2BE0F5BFB}" dt="2018-10-08T05:56:17.663" v="9126" actId="27636"/>
-        <pc:sldMkLst>
-          <pc:docMk/>
-          <pc:sldMk cId="0" sldId="256"/>
-        </pc:sldMkLst>
-      </pc:sldChg>
-      <pc:sldChg chg="modSp">
-        <pc:chgData name="Xin Zou" userId="260b9726081dae15" providerId="LiveId" clId="{FE08A991-EB5C-498E-983D-97A2BE0F5BFB}" dt="2018-10-03T05:04:11.756" v="1999" actId="113"/>
-        <pc:sldMkLst>
-          <pc:docMk/>
-          <pc:sldMk cId="0" sldId="265"/>
-        </pc:sldMkLst>
-      </pc:sldChg>
-      <pc:sldChg chg="modSp modAnim">
-        <pc:chgData name="Xin Zou" userId="260b9726081dae15" providerId="LiveId" clId="{FE08A991-EB5C-498E-983D-97A2BE0F5BFB}" dt="2018-10-03T05:20:17.647" v="4910"/>
-        <pc:sldMkLst>
-          <pc:docMk/>
-          <pc:sldMk cId="0" sldId="270"/>
-        </pc:sldMkLst>
-      </pc:sldChg>
-      <pc:sldChg chg="modSp">
-        <pc:chgData name="Xin Zou" userId="260b9726081dae15" providerId="LiveId" clId="{FE08A991-EB5C-498E-983D-97A2BE0F5BFB}" dt="2018-10-04T00:10:21.628" v="7051"/>
-        <pc:sldMkLst>
-          <pc:docMk/>
-          <pc:sldMk cId="0" sldId="271"/>
-        </pc:sldMkLst>
-      </pc:sldChg>
-      <pc:sldChg chg="modSp modAnim">
-        <pc:chgData name="Xin Zou" userId="260b9726081dae15" providerId="LiveId" clId="{FE08A991-EB5C-498E-983D-97A2BE0F5BFB}" dt="2018-10-04T00:10:21.628" v="7051"/>
-        <pc:sldMkLst>
-          <pc:docMk/>
-          <pc:sldMk cId="0" sldId="273"/>
-        </pc:sldMkLst>
-      </pc:sldChg>
-      <pc:sldChg chg="modSp">
-        <pc:chgData name="Xin Zou" userId="260b9726081dae15" providerId="LiveId" clId="{FE08A991-EB5C-498E-983D-97A2BE0F5BFB}" dt="2018-10-03T05:12:08.246" v="3018" actId="14"/>
-        <pc:sldMkLst>
-          <pc:docMk/>
-          <pc:sldMk cId="0" sldId="274"/>
-        </pc:sldMkLst>
-      </pc:sldChg>
-      <pc:sldChg chg="modSp modAnim">
-        <pc:chgData name="Xin Zou" userId="260b9726081dae15" providerId="LiveId" clId="{FE08A991-EB5C-498E-983D-97A2BE0F5BFB}" dt="2018-10-04T00:10:21.628" v="7051"/>
-        <pc:sldMkLst>
-          <pc:docMk/>
-          <pc:sldMk cId="0" sldId="275"/>
-        </pc:sldMkLst>
-      </pc:sldChg>
-      <pc:sldChg chg="modSp modAnim">
-        <pc:chgData name="Xin Zou" userId="260b9726081dae15" providerId="LiveId" clId="{FE08A991-EB5C-498E-983D-97A2BE0F5BFB}" dt="2018-10-04T00:10:21.628" v="7051"/>
-        <pc:sldMkLst>
-          <pc:docMk/>
-          <pc:sldMk cId="0" sldId="277"/>
-        </pc:sldMkLst>
-      </pc:sldChg>
-      <pc:sldChg chg="modSp modAnim">
-        <pc:chgData name="Xin Zou" userId="260b9726081dae15" providerId="LiveId" clId="{FE08A991-EB5C-498E-983D-97A2BE0F5BFB}" dt="2018-10-08T05:43:24.126" v="9113" actId="27636"/>
-        <pc:sldMkLst>
-          <pc:docMk/>
-          <pc:sldMk cId="0" sldId="278"/>
-        </pc:sldMkLst>
-      </pc:sldChg>
-      <pc:sldChg chg="modSp">
-        <pc:chgData name="Xin Zou" userId="260b9726081dae15" providerId="LiveId" clId="{FE08A991-EB5C-498E-983D-97A2BE0F5BFB}" dt="2018-10-03T05:20:44.858" v="4966" actId="6549"/>
-        <pc:sldMkLst>
-          <pc:docMk/>
-          <pc:sldMk cId="0" sldId="279"/>
-        </pc:sldMkLst>
-      </pc:sldChg>
-      <pc:sldChg chg="modSp">
-        <pc:chgData name="Xin Zou" userId="260b9726081dae15" providerId="LiveId" clId="{FE08A991-EB5C-498E-983D-97A2BE0F5BFB}" dt="2018-10-08T05:43:24.244" v="9114" actId="27636"/>
-        <pc:sldMkLst>
-          <pc:docMk/>
-          <pc:sldMk cId="0" sldId="281"/>
-        </pc:sldMkLst>
-      </pc:sldChg>
-      <pc:sldChg chg="modSp">
-        <pc:chgData name="Xin Zou" userId="260b9726081dae15" providerId="LiveId" clId="{FE08A991-EB5C-498E-983D-97A2BE0F5BFB}" dt="2018-10-03T23:21:33.392" v="5617"/>
-        <pc:sldMkLst>
-          <pc:docMk/>
-          <pc:sldMk cId="0" sldId="282"/>
-        </pc:sldMkLst>
-      </pc:sldChg>
-      <pc:sldChg chg="modSp del">
-        <pc:chgData name="Xin Zou" userId="260b9726081dae15" providerId="LiveId" clId="{FE08A991-EB5C-498E-983D-97A2BE0F5BFB}" dt="2018-10-08T05:43:24.496" v="9122" actId="27636"/>
-        <pc:sldMkLst>
-          <pc:docMk/>
-          <pc:sldMk cId="3555601642" sldId="283"/>
-        </pc:sldMkLst>
-      </pc:sldChg>
-      <pc:sldChg chg="modSp">
-        <pc:chgData name="Xin Zou" userId="260b9726081dae15" providerId="LiveId" clId="{FE08A991-EB5C-498E-983D-97A2BE0F5BFB}" dt="2018-10-04T00:10:21.628" v="7051"/>
-        <pc:sldMkLst>
-          <pc:docMk/>
-          <pc:sldMk cId="3264438971" sldId="286"/>
-        </pc:sldMkLst>
-      </pc:sldChg>
-      <pc:sldChg chg="modSp">
-        <pc:chgData name="Xin Zou" userId="260b9726081dae15" providerId="LiveId" clId="{FE08A991-EB5C-498E-983D-97A2BE0F5BFB}" dt="2018-10-04T00:10:21.628" v="7051"/>
-        <pc:sldMkLst>
-          <pc:docMk/>
-          <pc:sldMk cId="601280872" sldId="287"/>
-        </pc:sldMkLst>
-      </pc:sldChg>
-      <pc:sldChg chg="modSp">
-        <pc:chgData name="Xin Zou" userId="260b9726081dae15" providerId="LiveId" clId="{FE08A991-EB5C-498E-983D-97A2BE0F5BFB}" dt="2018-10-03T05:04:06.331" v="1998" actId="113"/>
-        <pc:sldMkLst>
-          <pc:docMk/>
-          <pc:sldMk cId="2010243271" sldId="288"/>
-        </pc:sldMkLst>
-      </pc:sldChg>
-      <pc:sldChg chg="modSp add">
-        <pc:chgData name="Xin Zou" userId="260b9726081dae15" providerId="LiveId" clId="{FE08A991-EB5C-498E-983D-97A2BE0F5BFB}" dt="2018-10-08T05:43:24.471" v="9121" actId="27636"/>
-        <pc:sldMkLst>
-          <pc:docMk/>
-          <pc:sldMk cId="3413591577" sldId="290"/>
-        </pc:sldMkLst>
-      </pc:sldChg>
-      <pc:sldChg chg="del">
-        <pc:chgData name="Xin Zou" userId="260b9726081dae15" providerId="LiveId" clId="{FE08A991-EB5C-498E-983D-97A2BE0F5BFB}" dt="2018-10-08T05:43:05.055" v="9110" actId="2696"/>
-        <pc:sldMkLst>
-          <pc:docMk/>
-          <pc:sldMk cId="3276572003" sldId="291"/>
-        </pc:sldMkLst>
-      </pc:sldChg>
-      <pc:sldChg chg="modSp">
-        <pc:chgData name="Xin Zou" userId="260b9726081dae15" providerId="LiveId" clId="{FE08A991-EB5C-498E-983D-97A2BE0F5BFB}" dt="2018-10-03T05:03:59.821" v="1997" actId="113"/>
-        <pc:sldMkLst>
-          <pc:docMk/>
-          <pc:sldMk cId="45561062" sldId="294"/>
-        </pc:sldMkLst>
-      </pc:sldChg>
-      <pc:sldChg chg="modSp add">
-        <pc:chgData name="Xin Zou" userId="260b9726081dae15" providerId="LiveId" clId="{FE08A991-EB5C-498E-983D-97A2BE0F5BFB}" dt="2018-10-04T05:07:56.041" v="9040" actId="1036"/>
-        <pc:sldMkLst>
-          <pc:docMk/>
-          <pc:sldMk cId="2788818676" sldId="295"/>
-        </pc:sldMkLst>
-      </pc:sldChg>
-      <pc:sldChg chg="add">
-        <pc:chgData name="Xin Zou" userId="260b9726081dae15" providerId="LiveId" clId="{FE08A991-EB5C-498E-983D-97A2BE0F5BFB}" dt="2018-10-04T05:06:48.406" v="9035"/>
-        <pc:sldMkLst>
-          <pc:docMk/>
-          <pc:sldMk cId="2540468610" sldId="296"/>
-        </pc:sldMkLst>
-      </pc:sldChg>
-      <pc:sldChg chg="modSp">
-        <pc:chgData name="Xin Zou" userId="260b9726081dae15" providerId="LiveId" clId="{FE08A991-EB5C-498E-983D-97A2BE0F5BFB}" dt="2018-10-04T00:10:21.628" v="7051"/>
-        <pc:sldMkLst>
-          <pc:docMk/>
-          <pc:sldMk cId="2230343479" sldId="297"/>
-        </pc:sldMkLst>
-      </pc:sldChg>
-      <pc:sldChg chg="modSp">
-        <pc:chgData name="Xin Zou" userId="260b9726081dae15" providerId="LiveId" clId="{FE08A991-EB5C-498E-983D-97A2BE0F5BFB}" dt="2018-10-04T00:10:21.628" v="7051"/>
-        <pc:sldMkLst>
-          <pc:docMk/>
-          <pc:sldMk cId="1640774756" sldId="298"/>
-        </pc:sldMkLst>
-      </pc:sldChg>
-      <pc:sldChg chg="modSp">
-        <pc:chgData name="Xin Zou" userId="260b9726081dae15" providerId="LiveId" clId="{FE08A991-EB5C-498E-983D-97A2BE0F5BFB}" dt="2018-10-03T06:33:33.729" v="5388" actId="113"/>
-        <pc:sldMkLst>
-          <pc:docMk/>
-          <pc:sldMk cId="303877150" sldId="299"/>
-        </pc:sldMkLst>
-      </pc:sldChg>
-      <pc:sldChg chg="add">
-        <pc:chgData name="Xin Zou" userId="260b9726081dae15" providerId="LiveId" clId="{FE08A991-EB5C-498E-983D-97A2BE0F5BFB}" dt="2018-10-04T05:06:48.406" v="9035"/>
-        <pc:sldMkLst>
-          <pc:docMk/>
-          <pc:sldMk cId="4135875331" sldId="300"/>
-        </pc:sldMkLst>
-      </pc:sldChg>
-      <pc:sldChg chg="addSp delSp modSp add">
-        <pc:chgData name="Xin Zou" userId="260b9726081dae15" providerId="LiveId" clId="{FE08A991-EB5C-498E-983D-97A2BE0F5BFB}" dt="2018-10-04T00:10:21.628" v="7051"/>
-        <pc:sldMkLst>
-          <pc:docMk/>
-          <pc:sldMk cId="961310438" sldId="301"/>
-        </pc:sldMkLst>
-      </pc:sldChg>
-      <pc:sldChg chg="modSp add">
-        <pc:chgData name="Xin Zou" userId="260b9726081dae15" providerId="LiveId" clId="{FE08A991-EB5C-498E-983D-97A2BE0F5BFB}" dt="2018-10-04T00:10:22.450" v="7055" actId="27636"/>
-        <pc:sldMkLst>
-          <pc:docMk/>
-          <pc:sldMk cId="3142170630" sldId="302"/>
-        </pc:sldMkLst>
-      </pc:sldChg>
-      <pc:sldChg chg="modSp add">
-        <pc:chgData name="Xin Zou" userId="260b9726081dae15" providerId="LiveId" clId="{FE08A991-EB5C-498E-983D-97A2BE0F5BFB}" dt="2018-10-04T00:10:22.519" v="7057" actId="27636"/>
-        <pc:sldMkLst>
-          <pc:docMk/>
-          <pc:sldMk cId="37366169" sldId="303"/>
-        </pc:sldMkLst>
-      </pc:sldChg>
-      <pc:sldChg chg="modSp add">
-        <pc:chgData name="Xin Zou" userId="260b9726081dae15" providerId="LiveId" clId="{FE08A991-EB5C-498E-983D-97A2BE0F5BFB}" dt="2018-10-04T00:10:22.633" v="7058" actId="27636"/>
-        <pc:sldMkLst>
-          <pc:docMk/>
-          <pc:sldMk cId="1469810937" sldId="304"/>
-        </pc:sldMkLst>
-      </pc:sldChg>
-      <pc:sldChg chg="addSp modSp add">
-        <pc:chgData name="Xin Zou" userId="260b9726081dae15" providerId="LiveId" clId="{FE08A991-EB5C-498E-983D-97A2BE0F5BFB}" dt="2018-10-08T05:43:24.312" v="9115" actId="27636"/>
-        <pc:sldMkLst>
-          <pc:docMk/>
-          <pc:sldMk cId="3059523748" sldId="305"/>
-        </pc:sldMkLst>
-      </pc:sldChg>
-      <pc:sldChg chg="addSp modSp add">
-        <pc:chgData name="Xin Zou" userId="260b9726081dae15" providerId="LiveId" clId="{FE08A991-EB5C-498E-983D-97A2BE0F5BFB}" dt="2018-10-08T05:43:24.352" v="9116" actId="27636"/>
-        <pc:sldMkLst>
-          <pc:docMk/>
-          <pc:sldMk cId="1735068261" sldId="306"/>
-        </pc:sldMkLst>
-      </pc:sldChg>
-      <pc:sldChg chg="modSp add">
-        <pc:chgData name="Xin Zou" userId="260b9726081dae15" providerId="LiveId" clId="{FE08A991-EB5C-498E-983D-97A2BE0F5BFB}" dt="2018-10-03T23:37:59.534" v="6436" actId="20577"/>
-        <pc:sldMkLst>
-          <pc:docMk/>
-          <pc:sldMk cId="224053405" sldId="307"/>
-        </pc:sldMkLst>
-      </pc:sldChg>
-      <pc:sldChg chg="modSp add modAnim">
-        <pc:chgData name="Xin Zou" userId="260b9726081dae15" providerId="LiveId" clId="{FE08A991-EB5C-498E-983D-97A2BE0F5BFB}" dt="2018-10-08T05:43:24.381" v="9117" actId="27636"/>
-        <pc:sldMkLst>
-          <pc:docMk/>
-          <pc:sldMk cId="1647869658" sldId="308"/>
-        </pc:sldMkLst>
-      </pc:sldChg>
-      <pc:sldChg chg="addSp modSp add">
-        <pc:chgData name="Xin Zou" userId="260b9726081dae15" providerId="LiveId" clId="{FE08A991-EB5C-498E-983D-97A2BE0F5BFB}" dt="2018-10-08T05:43:57.607" v="9125" actId="1076"/>
-        <pc:sldMkLst>
-          <pc:docMk/>
-          <pc:sldMk cId="3479106841" sldId="309"/>
-        </pc:sldMkLst>
-      </pc:sldChg>
-      <pc:sldChg chg="addSp modSp add">
-        <pc:chgData name="Xin Zou" userId="260b9726081dae15" providerId="LiveId" clId="{FE08A991-EB5C-498E-983D-97A2BE0F5BFB}" dt="2018-10-04T00:19:43.506" v="7248" actId="6549"/>
-        <pc:sldMkLst>
-          <pc:docMk/>
-          <pc:sldMk cId="2111016971" sldId="310"/>
-        </pc:sldMkLst>
-      </pc:sldChg>
-      <pc:sldChg chg="modSp add">
-        <pc:chgData name="Xin Zou" userId="260b9726081dae15" providerId="LiveId" clId="{FE08A991-EB5C-498E-983D-97A2BE0F5BFB}" dt="2018-10-08T05:43:24.430" v="9119" actId="27636"/>
-        <pc:sldMkLst>
-          <pc:docMk/>
-          <pc:sldMk cId="2300063515" sldId="311"/>
-        </pc:sldMkLst>
-      </pc:sldChg>
-      <pc:sldChg chg="addSp delSp modSp add modAnim">
-        <pc:chgData name="Xin Zou" userId="260b9726081dae15" providerId="LiveId" clId="{FE08A991-EB5C-498E-983D-97A2BE0F5BFB}" dt="2018-10-04T04:45:45.322" v="8301"/>
-        <pc:sldMkLst>
-          <pc:docMk/>
-          <pc:sldMk cId="852070667" sldId="312"/>
-        </pc:sldMkLst>
-      </pc:sldChg>
-      <pc:sldChg chg="addSp modSp add">
-        <pc:chgData name="Xin Zou" userId="260b9726081dae15" providerId="LiveId" clId="{FE08A991-EB5C-498E-983D-97A2BE0F5BFB}" dt="2018-10-08T05:43:24.447" v="9120" actId="27636"/>
-        <pc:sldMkLst>
-          <pc:docMk/>
-          <pc:sldMk cId="4114594668" sldId="313"/>
-        </pc:sldMkLst>
-      </pc:sldChg>
-      <pc:sldChg chg="addSp delSp modSp add">
-        <pc:chgData name="Xin Zou" userId="260b9726081dae15" providerId="LiveId" clId="{FE08A991-EB5C-498E-983D-97A2BE0F5BFB}" dt="2018-10-04T04:56:03.728" v="8437"/>
-        <pc:sldMkLst>
-          <pc:docMk/>
-          <pc:sldMk cId="2324583193" sldId="314"/>
-        </pc:sldMkLst>
-      </pc:sldChg>
-      <pc:sldChg chg="addSp modSp add">
-        <pc:chgData name="Xin Zou" userId="260b9726081dae15" providerId="LiveId" clId="{FE08A991-EB5C-498E-983D-97A2BE0F5BFB}" dt="2018-10-04T05:04:28.129" v="8915" actId="1076"/>
-        <pc:sldMkLst>
-          <pc:docMk/>
-          <pc:sldMk cId="4083450557" sldId="315"/>
-        </pc:sldMkLst>
-      </pc:sldChg>
-      <pc:sldChg chg="modSp add">
-        <pc:chgData name="Xin Zou" userId="260b9726081dae15" providerId="LiveId" clId="{FE08A991-EB5C-498E-983D-97A2BE0F5BFB}" dt="2018-10-04T05:05:49.282" v="9029" actId="15"/>
-        <pc:sldMkLst>
-          <pc:docMk/>
-          <pc:sldMk cId="2827362311" sldId="316"/>
-        </pc:sldMkLst>
-      </pc:sldChg>
-      <pc:sldChg chg="addSp delSp modSp add">
-        <pc:chgData name="Xin Zou" userId="260b9726081dae15" providerId="LiveId" clId="{FE08A991-EB5C-498E-983D-97A2BE0F5BFB}" dt="2018-10-04T05:09:40.372" v="9109" actId="1035"/>
-        <pc:sldMkLst>
-          <pc:docMk/>
-          <pc:sldMk cId="1015395711" sldId="317"/>
-        </pc:sldMkLst>
-      </pc:sldChg>
-      <pc:sldChg chg="add">
-        <pc:chgData name="Xin Zou" userId="260b9726081dae15" providerId="LiveId" clId="{FE08A991-EB5C-498E-983D-97A2BE0F5BFB}" dt="2018-10-08T05:43:19.592" v="9111"/>
-        <pc:sldMkLst>
-          <pc:docMk/>
-          <pc:sldMk cId="161325156" sldId="374"/>
-        </pc:sldMkLst>
-      </pc:sldChg>
-    </pc:docChg>
-  </pc:docChgLst>
-  <pc:docChgLst>
-    <pc:chgData name="Xin Zou" userId="260b9726081dae15" providerId="LiveId" clId="{B2671A2C-B444-47B6-830B-E020D46D4C77}"/>
-    <pc:docChg chg="custSel modSld">
-      <pc:chgData name="Xin Zou" userId="260b9726081dae15" providerId="LiveId" clId="{B2671A2C-B444-47B6-830B-E020D46D4C77}" dt="2019-09-04T03:53:25.103" v="18" actId="13926"/>
-      <pc:docMkLst>
-        <pc:docMk/>
-      </pc:docMkLst>
-      <pc:sldChg chg="modSp">
-        <pc:chgData name="Xin Zou" userId="260b9726081dae15" providerId="LiveId" clId="{B2671A2C-B444-47B6-830B-E020D46D4C77}" dt="2019-09-04T03:50:57.702" v="1" actId="27636"/>
-        <pc:sldMkLst>
-          <pc:docMk/>
-          <pc:sldMk cId="0" sldId="284"/>
-        </pc:sldMkLst>
-      </pc:sldChg>
-      <pc:sldChg chg="modSp">
-        <pc:chgData name="Xin Zou" userId="260b9726081dae15" providerId="LiveId" clId="{B2671A2C-B444-47B6-830B-E020D46D4C77}" dt="2019-09-04T03:51:24.661" v="3" actId="27636"/>
-        <pc:sldMkLst>
-          <pc:docMk/>
-          <pc:sldMk cId="1469810937" sldId="304"/>
-        </pc:sldMkLst>
-      </pc:sldChg>
-      <pc:sldChg chg="modSp">
-        <pc:chgData name="Xin Zou" userId="260b9726081dae15" providerId="LiveId" clId="{B2671A2C-B444-47B6-830B-E020D46D4C77}" dt="2019-09-04T03:51:56.988" v="5" actId="14100"/>
-        <pc:sldMkLst>
-          <pc:docMk/>
-          <pc:sldMk cId="3059523748" sldId="305"/>
-        </pc:sldMkLst>
-      </pc:sldChg>
-      <pc:sldChg chg="modSp">
-        <pc:chgData name="Xin Zou" userId="260b9726081dae15" providerId="LiveId" clId="{B2671A2C-B444-47B6-830B-E020D46D4C77}" dt="2019-09-04T03:52:05.887" v="6" actId="1076"/>
-        <pc:sldMkLst>
-          <pc:docMk/>
-          <pc:sldMk cId="1735068261" sldId="306"/>
-        </pc:sldMkLst>
-      </pc:sldChg>
-      <pc:sldChg chg="modSp">
-        <pc:chgData name="Xin Zou" userId="260b9726081dae15" providerId="LiveId" clId="{B2671A2C-B444-47B6-830B-E020D46D4C77}" dt="2019-09-04T03:53:25.103" v="18" actId="13926"/>
-        <pc:sldMkLst>
-          <pc:docMk/>
-          <pc:sldMk cId="1647869658" sldId="308"/>
-        </pc:sldMkLst>
-      </pc:sldChg>
-    </pc:docChg>
-  </pc:docChgLst>
-</pc:chgInfo>
 </file>
 
 <file path=ppt/notesMasters/notesMaster1.xml><?xml version="1.0" encoding="utf-8"?>
@@ -680,8 +282,6 @@
           <a:p>
             <a:fld id="{E4B1B442-110D-40F1-A0D3-D0D26DD945CA}" type="datetimeFigureOut">
               <a:rPr lang="en-US" smtClean="0"/>
-              <a:pPr/>
-              <a:t>10/15/2025</a:t>
             </a:fld>
             <a:endParaRPr lang="en-US"/>
           </a:p>
@@ -750,6 +350,7 @@
               <a:rPr lang="en-US"/>
               <a:t>Click to edit Master text styles</a:t>
             </a:r>
+            <a:endParaRPr lang="en-US"/>
           </a:p>
           <a:p>
             <a:pPr lvl="1"/>
@@ -757,6 +358,7 @@
               <a:rPr lang="en-US"/>
               <a:t>Second level</a:t>
             </a:r>
+            <a:endParaRPr lang="en-US"/>
           </a:p>
           <a:p>
             <a:pPr lvl="2"/>
@@ -764,6 +366,7 @@
               <a:rPr lang="en-US"/>
               <a:t>Third level</a:t>
             </a:r>
+            <a:endParaRPr lang="en-US"/>
           </a:p>
           <a:p>
             <a:pPr lvl="3"/>
@@ -771,6 +374,7 @@
               <a:rPr lang="en-US"/>
               <a:t>Fourth level</a:t>
             </a:r>
+            <a:endParaRPr lang="en-US"/>
           </a:p>
           <a:p>
             <a:pPr lvl="4"/>
@@ -778,6 +382,7 @@
               <a:rPr lang="en-US"/>
               <a:t>Fifth level</a:t>
             </a:r>
+            <a:endParaRPr lang="en-US"/>
           </a:p>
         </p:txBody>
       </p:sp>
@@ -841,19 +446,12 @@
           <a:p>
             <a:fld id="{5DFBE8F3-E457-4E14-8249-6B01859045C3}" type="slidenum">
               <a:rPr lang="en-US" smtClean="0"/>
-              <a:pPr/>
-              <a:t>‹#›</a:t>
             </a:fld>
             <a:endParaRPr lang="en-US"/>
           </a:p>
         </p:txBody>
       </p:sp>
     </p:spTree>
-    <p:extLst>
-      <p:ext uri="{BB962C8B-B14F-4D97-AF65-F5344CB8AC3E}">
-        <p14:creationId xmlns:p14="http://schemas.microsoft.com/office/powerpoint/2010/main" val="645970237"/>
-      </p:ext>
-    </p:extLst>
   </p:cSld>
   <p:clrMap bg1="lt1" tx1="dk1" bg2="lt2" tx2="dk2" accent1="accent1" accent2="accent2" accent3="accent3" accent4="accent4" accent5="accent5" accent6="accent6" hlink="hlink" folHlink="folHlink"/>
   <p:notesStyle>
@@ -1037,19 +635,12 @@
           <a:p>
             <a:fld id="{5DFBE8F3-E457-4E14-8249-6B01859045C3}" type="slidenum">
               <a:rPr lang="en-US" smtClean="0"/>
-              <a:pPr/>
-              <a:t>2</a:t>
             </a:fld>
             <a:endParaRPr lang="en-US"/>
           </a:p>
         </p:txBody>
       </p:sp>
     </p:spTree>
-    <p:extLst>
-      <p:ext uri="{BB962C8B-B14F-4D97-AF65-F5344CB8AC3E}">
-        <p14:creationId xmlns:p14="http://schemas.microsoft.com/office/powerpoint/2010/main" val="338289789"/>
-      </p:ext>
-    </p:extLst>
   </p:cSld>
   <p:clrMapOvr>
     <a:masterClrMapping/>
@@ -1101,7 +692,7 @@
           <a:bodyPr/>
           <a:lstStyle/>
           <a:p>
-            <a:pPr marL="633222" indent="-514350">
+            <a:pPr marL="633095" indent="-514350">
               <a:lnSpc>
                 <a:spcPct val="120000"/>
               </a:lnSpc>
@@ -1130,7 +721,7 @@
             <a:endParaRPr lang="en-US" altLang="zh-CN" dirty="0"/>
           </a:p>
           <a:p>
-            <a:pPr marL="633222" indent="-514350">
+            <a:pPr marL="633095" indent="-514350">
               <a:lnSpc>
                 <a:spcPct val="120000"/>
               </a:lnSpc>
@@ -1163,7 +754,7 @@
             <a:endParaRPr lang="en-US" altLang="zh-CN" dirty="0"/>
           </a:p>
           <a:p>
-            <a:pPr marL="633222" indent="-514350">
+            <a:pPr marL="633095" indent="-514350">
               <a:lnSpc>
                 <a:spcPct val="120000"/>
               </a:lnSpc>
@@ -1204,7 +795,7 @@
             <a:endParaRPr lang="en-US" altLang="zh-CN" dirty="0"/>
           </a:p>
           <a:p>
-            <a:pPr marL="633222" indent="-514350">
+            <a:pPr marL="633095" indent="-514350">
               <a:lnSpc>
                 <a:spcPct val="120000"/>
               </a:lnSpc>
@@ -1229,7 +820,7 @@
             <a:endParaRPr lang="en-US" altLang="zh-CN" dirty="0"/>
           </a:p>
           <a:p>
-            <a:pPr marL="633222" indent="-514350">
+            <a:pPr marL="633095" indent="-514350">
               <a:lnSpc>
                 <a:spcPct val="120000"/>
               </a:lnSpc>
@@ -1251,6 +842,7 @@
               <a:rPr lang="zh-CN" altLang="en-US" dirty="0"/>
               <a:t>） 一些人觉得这是理想的呼唤，通过软件可以改变世界，他们主动寻找机会，实现自己 的理想。</a:t>
             </a:r>
+            <a:endParaRPr lang="zh-CN" altLang="en-US" dirty="0"/>
           </a:p>
           <a:p>
             <a:endParaRPr lang="en-US" dirty="0"/>
@@ -1274,19 +866,12 @@
           <a:p>
             <a:fld id="{5DFBE8F3-E457-4E14-8249-6B01859045C3}" type="slidenum">
               <a:rPr lang="en-US" smtClean="0"/>
-              <a:pPr/>
-              <a:t>32</a:t>
             </a:fld>
             <a:endParaRPr lang="en-US"/>
           </a:p>
         </p:txBody>
       </p:sp>
     </p:spTree>
-    <p:extLst>
-      <p:ext uri="{BB962C8B-B14F-4D97-AF65-F5344CB8AC3E}">
-        <p14:creationId xmlns:p14="http://schemas.microsoft.com/office/powerpoint/2010/main" val="4067119943"/>
-      </p:ext>
-    </p:extLst>
   </p:cSld>
   <p:clrMapOvr>
     <a:masterClrMapping/>
@@ -1361,6 +946,7 @@
               <a:rPr lang="en-US" altLang="zh-CN" baseline="0" dirty="0"/>
               <a:t> is why we want everyone to focus on individual skills,  the right set of skills,  which are the foundation of our team work. </a:t>
             </a:r>
+            <a:endParaRPr lang="en-US" altLang="zh-CN" baseline="0" dirty="0"/>
           </a:p>
           <a:p>
             <a:endParaRPr lang="en-US" dirty="0"/>
@@ -1384,19 +970,12 @@
           <a:p>
             <a:fld id="{5DFBE8F3-E457-4E14-8249-6B01859045C3}" type="slidenum">
               <a:rPr lang="en-US" smtClean="0"/>
-              <a:pPr/>
-              <a:t>3</a:t>
             </a:fld>
             <a:endParaRPr lang="en-US"/>
           </a:p>
         </p:txBody>
       </p:sp>
     </p:spTree>
-    <p:extLst>
-      <p:ext uri="{BB962C8B-B14F-4D97-AF65-F5344CB8AC3E}">
-        <p14:creationId xmlns:p14="http://schemas.microsoft.com/office/powerpoint/2010/main" val="165569790"/>
-      </p:ext>
-    </p:extLst>
   </p:cSld>
   <p:clrMapOvr>
     <a:masterClrMapping/>
@@ -1460,6 +1039,7 @@
               <a:rPr lang="en-US" dirty="0"/>
               <a:t>Work is carried out by each individual</a:t>
             </a:r>
+            <a:endParaRPr lang="en-US" dirty="0"/>
           </a:p>
           <a:p>
             <a:pPr eaLnBrk="1" hangingPunct="1"/>
@@ -1467,6 +1047,7 @@
               <a:rPr lang="en-US" dirty="0"/>
               <a:t>Skills as an “Individual Contributor” is important</a:t>
             </a:r>
+            <a:endParaRPr lang="en-US" dirty="0"/>
           </a:p>
           <a:p>
             <a:endParaRPr lang="en-US" dirty="0"/>
@@ -1490,19 +1071,12 @@
           <a:p>
             <a:fld id="{5DFBE8F3-E457-4E14-8249-6B01859045C3}" type="slidenum">
               <a:rPr lang="en-US" smtClean="0"/>
-              <a:pPr/>
-              <a:t>4</a:t>
             </a:fld>
             <a:endParaRPr lang="en-US"/>
           </a:p>
         </p:txBody>
       </p:sp>
     </p:spTree>
-    <p:extLst>
-      <p:ext uri="{BB962C8B-B14F-4D97-AF65-F5344CB8AC3E}">
-        <p14:creationId xmlns:p14="http://schemas.microsoft.com/office/powerpoint/2010/main" val="2634694677"/>
-      </p:ext>
-    </p:extLst>
   </p:cSld>
   <p:clrMapOvr>
     <a:masterClrMapping/>
@@ -1565,132 +1139,154 @@
               <a:rPr lang="en-US" dirty="0"/>
               <a:t>The key data collected in the PSP tool are time, defect, and size data – the time spent in each phase; when and where defects were injected, found, and fixed; and the size of the product parts. Software developers use many other measures that are derived from these three basic measures to understand and improve their performance. Derived measures include:</a:t>
             </a:r>
+            <a:endParaRPr lang="en-US" dirty="0"/>
           </a:p>
           <a:p>
             <a:r>
               <a:rPr lang="en-US" dirty="0"/>
               <a:t>estimation accuracy (size/time)</a:t>
             </a:r>
+            <a:endParaRPr lang="en-US" dirty="0"/>
           </a:p>
           <a:p>
             <a:r>
               <a:rPr lang="en-US" dirty="0"/>
               <a:t>prediction intervals (size/time)</a:t>
             </a:r>
+            <a:endParaRPr lang="en-US" dirty="0"/>
           </a:p>
           <a:p>
             <a:r>
               <a:rPr lang="en-US" dirty="0"/>
               <a:t>time in phase distribution</a:t>
             </a:r>
+            <a:endParaRPr lang="en-US" dirty="0"/>
           </a:p>
           <a:p>
             <a:r>
               <a:rPr lang="en-US" dirty="0"/>
               <a:t>defect injection distribution</a:t>
             </a:r>
+            <a:endParaRPr lang="en-US" dirty="0"/>
           </a:p>
           <a:p>
             <a:r>
               <a:rPr lang="en-US" dirty="0"/>
               <a:t>defect removal distribution</a:t>
             </a:r>
+            <a:endParaRPr lang="en-US" dirty="0"/>
           </a:p>
           <a:p>
             <a:r>
               <a:rPr lang="en-US" dirty="0"/>
               <a:t>productivity</a:t>
             </a:r>
+            <a:endParaRPr lang="en-US" dirty="0"/>
           </a:p>
           <a:p>
             <a:r>
               <a:rPr lang="en-US" dirty="0"/>
               <a:t>reuse percentage</a:t>
             </a:r>
+            <a:endParaRPr lang="en-US" dirty="0"/>
           </a:p>
           <a:p>
             <a:r>
               <a:rPr lang="en-US" dirty="0"/>
               <a:t>cost performance index</a:t>
             </a:r>
+            <a:endParaRPr lang="en-US" dirty="0"/>
           </a:p>
           <a:p>
             <a:r>
               <a:rPr lang="en-US" dirty="0"/>
               <a:t>planned value</a:t>
             </a:r>
+            <a:endParaRPr lang="en-US" dirty="0"/>
           </a:p>
           <a:p>
             <a:r>
               <a:rPr lang="en-US" dirty="0"/>
               <a:t>earned value</a:t>
             </a:r>
+            <a:endParaRPr lang="en-US" dirty="0"/>
           </a:p>
           <a:p>
             <a:r>
               <a:rPr lang="en-US" dirty="0"/>
               <a:t>predicted earned value</a:t>
             </a:r>
+            <a:endParaRPr lang="en-US" dirty="0"/>
           </a:p>
           <a:p>
             <a:r>
               <a:rPr lang="en-US" dirty="0"/>
               <a:t>defect density</a:t>
             </a:r>
+            <a:endParaRPr lang="en-US" dirty="0"/>
           </a:p>
           <a:p>
             <a:r>
               <a:rPr lang="en-US" dirty="0"/>
               <a:t>defect density by phase</a:t>
             </a:r>
+            <a:endParaRPr lang="en-US" dirty="0"/>
           </a:p>
           <a:p>
             <a:r>
               <a:rPr lang="en-US" dirty="0"/>
               <a:t>defect removal rate by phase</a:t>
             </a:r>
+            <a:endParaRPr lang="en-US" dirty="0"/>
           </a:p>
           <a:p>
             <a:r>
               <a:rPr lang="en-US" dirty="0"/>
               <a:t>defect removal leverage</a:t>
             </a:r>
+            <a:endParaRPr lang="en-US" dirty="0"/>
           </a:p>
           <a:p>
             <a:r>
               <a:rPr lang="en-US" dirty="0"/>
               <a:t>review rates</a:t>
             </a:r>
+            <a:endParaRPr lang="en-US" dirty="0"/>
           </a:p>
           <a:p>
             <a:r>
               <a:rPr lang="en-US" dirty="0"/>
               <a:t>process yield</a:t>
             </a:r>
+            <a:endParaRPr lang="en-US" dirty="0"/>
           </a:p>
           <a:p>
             <a:r>
               <a:rPr lang="en-US" dirty="0"/>
               <a:t>phase yield</a:t>
             </a:r>
+            <a:endParaRPr lang="en-US" dirty="0"/>
           </a:p>
           <a:p>
             <a:r>
               <a:rPr lang="en-US" dirty="0"/>
               <a:t>failure cost of quality (COQ)</a:t>
             </a:r>
+            <a:endParaRPr lang="en-US" dirty="0"/>
           </a:p>
           <a:p>
             <a:r>
               <a:rPr lang="en-US" dirty="0"/>
               <a:t>appraisal COQ</a:t>
             </a:r>
+            <a:endParaRPr lang="en-US" dirty="0"/>
           </a:p>
           <a:p>
             <a:r>
               <a:rPr lang="en-US" dirty="0"/>
               <a:t>appraisal/failure COQ ratio</a:t>
             </a:r>
+            <a:endParaRPr lang="en-US" dirty="0"/>
           </a:p>
           <a:p>
             <a:endParaRPr lang="en-US" dirty="0"/>
@@ -1714,19 +1310,12 @@
           <a:p>
             <a:fld id="{5DFBE8F3-E457-4E14-8249-6B01859045C3}" type="slidenum">
               <a:rPr lang="en-US" smtClean="0"/>
-              <a:pPr/>
-              <a:t>10</a:t>
             </a:fld>
             <a:endParaRPr lang="en-US"/>
           </a:p>
         </p:txBody>
       </p:sp>
     </p:spTree>
-    <p:extLst>
-      <p:ext uri="{BB962C8B-B14F-4D97-AF65-F5344CB8AC3E}">
-        <p14:creationId xmlns:p14="http://schemas.microsoft.com/office/powerpoint/2010/main" val="1597704913"/>
-      </p:ext>
-    </p:extLst>
   </p:cSld>
   <p:clrMapOvr>
     <a:masterClrMapping/>
@@ -1793,6 +1382,7 @@
               <a:rPr lang="en-US" altLang="zh-CN" baseline="0" dirty="0"/>
               <a:t> than 7 years in writing. </a:t>
             </a:r>
+            <a:endParaRPr lang="en-US" altLang="zh-CN" baseline="0" dirty="0"/>
           </a:p>
           <a:p>
             <a:pPr marL="0" marR="0" lvl="1" indent="0" algn="l" defTabSz="914400" rtl="0" eaLnBrk="1" fontAlgn="auto" latinLnBrk="0" hangingPunct="1">
@@ -1809,7 +1399,6 @@
               <a:buSzTx/>
               <a:buFontTx/>
               <a:buNone/>
-              <a:tabLst/>
               <a:defRPr/>
             </a:pPr>
             <a:r>
@@ -1853,19 +1442,12 @@
           <a:p>
             <a:fld id="{5DFBE8F3-E457-4E14-8249-6B01859045C3}" type="slidenum">
               <a:rPr lang="en-US" smtClean="0"/>
-              <a:pPr/>
-              <a:t>11</a:t>
             </a:fld>
             <a:endParaRPr lang="en-US"/>
           </a:p>
         </p:txBody>
       </p:sp>
     </p:spTree>
-    <p:extLst>
-      <p:ext uri="{BB962C8B-B14F-4D97-AF65-F5344CB8AC3E}">
-        <p14:creationId xmlns:p14="http://schemas.microsoft.com/office/powerpoint/2010/main" val="2954737094"/>
-      </p:ext>
-    </p:extLst>
   </p:cSld>
   <p:clrMapOvr>
     <a:masterClrMapping/>
@@ -1932,6 +1514,7 @@
               <a:rPr lang="en-US" altLang="zh-CN" baseline="0" dirty="0"/>
               <a:t> than 7 years in writing. </a:t>
             </a:r>
+            <a:endParaRPr lang="en-US" altLang="zh-CN" baseline="0" dirty="0"/>
           </a:p>
           <a:p>
             <a:pPr marL="0" marR="0" lvl="1" indent="0" algn="l" defTabSz="914400" rtl="0" eaLnBrk="1" fontAlgn="auto" latinLnBrk="0" hangingPunct="1">
@@ -1948,7 +1531,6 @@
               <a:buSzTx/>
               <a:buFontTx/>
               <a:buNone/>
-              <a:tabLst/>
               <a:defRPr/>
             </a:pPr>
             <a:r>
@@ -1992,19 +1574,12 @@
           <a:p>
             <a:fld id="{5DFBE8F3-E457-4E14-8249-6B01859045C3}" type="slidenum">
               <a:rPr lang="en-US" smtClean="0"/>
-              <a:pPr/>
-              <a:t>15</a:t>
             </a:fld>
             <a:endParaRPr lang="en-US"/>
           </a:p>
         </p:txBody>
       </p:sp>
     </p:spTree>
-    <p:extLst>
-      <p:ext uri="{BB962C8B-B14F-4D97-AF65-F5344CB8AC3E}">
-        <p14:creationId xmlns:p14="http://schemas.microsoft.com/office/powerpoint/2010/main" val="3053327590"/>
-      </p:ext>
-    </p:extLst>
   </p:cSld>
   <p:clrMapOvr>
     <a:masterClrMapping/>
@@ -2071,6 +1646,7 @@
               <a:rPr lang="en-US" altLang="zh-CN" baseline="0" dirty="0"/>
               <a:t> than 7 years in writing. </a:t>
             </a:r>
+            <a:endParaRPr lang="en-US" altLang="zh-CN" baseline="0" dirty="0"/>
           </a:p>
           <a:p>
             <a:pPr marL="0" marR="0" lvl="1" indent="0" algn="l" defTabSz="914400" rtl="0" eaLnBrk="1" fontAlgn="auto" latinLnBrk="0" hangingPunct="1">
@@ -2087,7 +1663,6 @@
               <a:buSzTx/>
               <a:buFontTx/>
               <a:buNone/>
-              <a:tabLst/>
               <a:defRPr/>
             </a:pPr>
             <a:r>
@@ -2131,19 +1706,12 @@
           <a:p>
             <a:fld id="{5DFBE8F3-E457-4E14-8249-6B01859045C3}" type="slidenum">
               <a:rPr lang="en-US" smtClean="0"/>
-              <a:pPr/>
-              <a:t>16</a:t>
             </a:fld>
             <a:endParaRPr lang="en-US"/>
           </a:p>
         </p:txBody>
       </p:sp>
     </p:spTree>
-    <p:extLst>
-      <p:ext uri="{BB962C8B-B14F-4D97-AF65-F5344CB8AC3E}">
-        <p14:creationId xmlns:p14="http://schemas.microsoft.com/office/powerpoint/2010/main" val="1007651275"/>
-      </p:ext>
-    </p:extLst>
   </p:cSld>
   <p:clrMapOvr>
     <a:masterClrMapping/>
@@ -2246,19 +1814,12 @@
           <a:p>
             <a:fld id="{5DFBE8F3-E457-4E14-8249-6B01859045C3}" type="slidenum">
               <a:rPr lang="en-US" smtClean="0"/>
-              <a:pPr/>
-              <a:t>17</a:t>
             </a:fld>
             <a:endParaRPr lang="en-US"/>
           </a:p>
         </p:txBody>
       </p:sp>
     </p:spTree>
-    <p:extLst>
-      <p:ext uri="{BB962C8B-B14F-4D97-AF65-F5344CB8AC3E}">
-        <p14:creationId xmlns:p14="http://schemas.microsoft.com/office/powerpoint/2010/main" val="71157731"/>
-      </p:ext>
-    </p:extLst>
   </p:cSld>
   <p:clrMapOvr>
     <a:masterClrMapping/>
@@ -2329,6 +1890,7 @@
               <a:rPr lang="en-US" altLang="zh-CN" baseline="0" dirty="0"/>
               <a:t>&lt;Jack Welch&gt;</a:t>
             </a:r>
+            <a:endParaRPr lang="en-US" altLang="zh-CN" baseline="0" dirty="0"/>
           </a:p>
           <a:p>
             <a:endParaRPr lang="en-US" dirty="0"/>
@@ -2352,19 +1914,12 @@
           <a:p>
             <a:fld id="{5DFBE8F3-E457-4E14-8249-6B01859045C3}" type="slidenum">
               <a:rPr lang="en-US" smtClean="0"/>
-              <a:pPr/>
-              <a:t>20</a:t>
             </a:fld>
             <a:endParaRPr lang="en-US"/>
           </a:p>
         </p:txBody>
       </p:sp>
     </p:spTree>
-    <p:extLst>
-      <p:ext uri="{BB962C8B-B14F-4D97-AF65-F5344CB8AC3E}">
-        <p14:creationId xmlns:p14="http://schemas.microsoft.com/office/powerpoint/2010/main" val="951088154"/>
-      </p:ext>
-    </p:extLst>
   </p:cSld>
   <p:clrMapOvr>
     <a:masterClrMapping/>
@@ -2568,7 +2123,6 @@
           <a:p>
             <a:fld id="{48A87A34-81AB-432B-8DAE-1953F412C126}" type="datetimeFigureOut">
               <a:rPr lang="en-US" smtClean="0"/>
-              <a:t>10/15/2025</a:t>
             </a:fld>
             <a:endParaRPr lang="en-US" dirty="0"/>
           </a:p>
@@ -2610,18 +2164,12 @@
           <a:p>
             <a:fld id="{6D22F896-40B5-4ADD-8801-0D06FADFA095}" type="slidenum">
               <a:rPr lang="en-US" smtClean="0"/>
-              <a:t>‹#›</a:t>
             </a:fld>
             <a:endParaRPr lang="en-US" dirty="0"/>
           </a:p>
         </p:txBody>
       </p:sp>
     </p:spTree>
-    <p:extLst>
-      <p:ext uri="{BB962C8B-B14F-4D97-AF65-F5344CB8AC3E}">
-        <p14:creationId xmlns:p14="http://schemas.microsoft.com/office/powerpoint/2010/main" val="124216515"/>
-      </p:ext>
-    </p:extLst>
   </p:cSld>
   <p:clrMapOvr>
     <a:masterClrMapping/>
@@ -2829,6 +2377,7 @@
               <a:rPr lang="en-US"/>
               <a:t>Edit Master text styles</a:t>
             </a:r>
+            <a:endParaRPr lang="en-US"/>
           </a:p>
         </p:txBody>
       </p:sp>
@@ -2849,8 +2398,6 @@
           <a:p>
             <a:fld id="{48A87A34-81AB-432B-8DAE-1953F412C126}" type="datetimeFigureOut">
               <a:rPr lang="en-US" smtClean="0"/>
-              <a:pPr/>
-              <a:t>10/15/2025</a:t>
             </a:fld>
             <a:endParaRPr lang="en-US" dirty="0"/>
           </a:p>
@@ -2892,19 +2439,12 @@
           <a:p>
             <a:fld id="{6D22F896-40B5-4ADD-8801-0D06FADFA095}" type="slidenum">
               <a:rPr lang="en-US" smtClean="0"/>
-              <a:pPr/>
-              <a:t>‹#›</a:t>
             </a:fld>
             <a:endParaRPr lang="en-US" dirty="0"/>
           </a:p>
         </p:txBody>
       </p:sp>
     </p:spTree>
-    <p:extLst>
-      <p:ext uri="{BB962C8B-B14F-4D97-AF65-F5344CB8AC3E}">
-        <p14:creationId xmlns:p14="http://schemas.microsoft.com/office/powerpoint/2010/main" val="3705652655"/>
-      </p:ext>
-    </p:extLst>
   </p:cSld>
   <p:clrMapOvr>
     <a:masterClrMapping/>
@@ -3023,6 +2563,7 @@
               <a:rPr lang="en-US"/>
               <a:t>Edit Master text styles</a:t>
             </a:r>
+            <a:endParaRPr lang="en-US"/>
           </a:p>
         </p:txBody>
       </p:sp>
@@ -3043,8 +2584,6 @@
           <a:p>
             <a:fld id="{48A87A34-81AB-432B-8DAE-1953F412C126}" type="datetimeFigureOut">
               <a:rPr lang="en-US" smtClean="0"/>
-              <a:pPr/>
-              <a:t>10/15/2025</a:t>
             </a:fld>
             <a:endParaRPr lang="en-US" dirty="0"/>
           </a:p>
@@ -3086,19 +2625,12 @@
           <a:p>
             <a:fld id="{6D22F896-40B5-4ADD-8801-0D06FADFA095}" type="slidenum">
               <a:rPr lang="en-US" smtClean="0"/>
-              <a:pPr/>
-              <a:t>‹#›</a:t>
             </a:fld>
             <a:endParaRPr lang="en-US" dirty="0"/>
           </a:p>
         </p:txBody>
       </p:sp>
     </p:spTree>
-    <p:extLst>
-      <p:ext uri="{BB962C8B-B14F-4D97-AF65-F5344CB8AC3E}">
-        <p14:creationId xmlns:p14="http://schemas.microsoft.com/office/powerpoint/2010/main" val="2465418227"/>
-      </p:ext>
-    </p:extLst>
   </p:cSld>
   <p:clrMapOvr>
     <a:masterClrMapping/>
@@ -3219,6 +2751,7 @@
               <a:rPr lang="en-US"/>
               <a:t>Edit Master text styles</a:t>
             </a:r>
+            <a:endParaRPr lang="en-US"/>
           </a:p>
         </p:txBody>
       </p:sp>
@@ -3286,6 +2819,7 @@
               <a:rPr lang="en-US"/>
               <a:t>Edit Master text styles</a:t>
             </a:r>
+            <a:endParaRPr lang="en-US"/>
           </a:p>
         </p:txBody>
       </p:sp>
@@ -3306,8 +2840,6 @@
           <a:p>
             <a:fld id="{48A87A34-81AB-432B-8DAE-1953F412C126}" type="datetimeFigureOut">
               <a:rPr lang="en-US" smtClean="0"/>
-              <a:pPr/>
-              <a:t>10/15/2025</a:t>
             </a:fld>
             <a:endParaRPr lang="en-US" dirty="0"/>
           </a:p>
@@ -3349,8 +2881,6 @@
           <a:p>
             <a:fld id="{6D22F896-40B5-4ADD-8801-0D06FADFA095}" type="slidenum">
               <a:rPr lang="en-US" smtClean="0"/>
-              <a:pPr/>
-              <a:t>‹#›</a:t>
             </a:fld>
             <a:endParaRPr lang="en-US" dirty="0"/>
           </a:p>
@@ -3469,6 +2999,12 @@
               </a:rPr>
               <a:t>“</a:t>
             </a:r>
+            <a:endParaRPr lang="en-US" sz="8000" dirty="0">
+              <a:solidFill>
+                <a:schemeClr val="tx1"/>
+              </a:solidFill>
+              <a:effectLst/>
+            </a:endParaRPr>
           </a:p>
         </p:txBody>
       </p:sp>
@@ -3585,15 +3121,16 @@
               </a:rPr>
               <a:t>”</a:t>
             </a:r>
+            <a:endParaRPr lang="en-US" sz="8000" dirty="0">
+              <a:solidFill>
+                <a:schemeClr val="tx1"/>
+              </a:solidFill>
+              <a:effectLst/>
+            </a:endParaRPr>
           </a:p>
         </p:txBody>
       </p:sp>
     </p:spTree>
-    <p:extLst>
-      <p:ext uri="{BB962C8B-B14F-4D97-AF65-F5344CB8AC3E}">
-        <p14:creationId xmlns:p14="http://schemas.microsoft.com/office/powerpoint/2010/main" val="3526440042"/>
-      </p:ext>
-    </p:extLst>
   </p:cSld>
   <p:clrMapOvr>
     <a:masterClrMapping/>
@@ -3714,6 +3251,7 @@
               <a:rPr lang="en-US"/>
               <a:t>Edit Master text styles</a:t>
             </a:r>
+            <a:endParaRPr lang="en-US"/>
           </a:p>
         </p:txBody>
       </p:sp>
@@ -3734,8 +3272,6 @@
           <a:p>
             <a:fld id="{48A87A34-81AB-432B-8DAE-1953F412C126}" type="datetimeFigureOut">
               <a:rPr lang="en-US" smtClean="0"/>
-              <a:pPr/>
-              <a:t>10/15/2025</a:t>
             </a:fld>
             <a:endParaRPr lang="en-US" dirty="0"/>
           </a:p>
@@ -3777,19 +3313,12 @@
           <a:p>
             <a:fld id="{6D22F896-40B5-4ADD-8801-0D06FADFA095}" type="slidenum">
               <a:rPr lang="en-US" smtClean="0"/>
-              <a:pPr/>
-              <a:t>‹#›</a:t>
             </a:fld>
             <a:endParaRPr lang="en-US" dirty="0"/>
           </a:p>
         </p:txBody>
       </p:sp>
     </p:spTree>
-    <p:extLst>
-      <p:ext uri="{BB962C8B-B14F-4D97-AF65-F5344CB8AC3E}">
-        <p14:creationId xmlns:p14="http://schemas.microsoft.com/office/powerpoint/2010/main" val="1210892556"/>
-      </p:ext>
-    </p:extLst>
   </p:cSld>
   <p:clrMapOvr>
     <a:masterClrMapping/>
@@ -3933,6 +3462,7 @@
               <a:rPr lang="en-US"/>
               <a:t>Edit Master text styles</a:t>
             </a:r>
+            <a:endParaRPr lang="en-US"/>
           </a:p>
         </p:txBody>
       </p:sp>
@@ -4000,6 +3530,7 @@
               <a:rPr lang="en-US"/>
               <a:t>Edit Master text styles</a:t>
             </a:r>
+            <a:endParaRPr lang="en-US"/>
           </a:p>
         </p:txBody>
       </p:sp>
@@ -4064,6 +3595,7 @@
               <a:rPr lang="en-US"/>
               <a:t>Edit Master text styles</a:t>
             </a:r>
+            <a:endParaRPr lang="en-US"/>
           </a:p>
         </p:txBody>
       </p:sp>
@@ -4131,6 +3663,7 @@
               <a:rPr lang="en-US"/>
               <a:t>Edit Master text styles</a:t>
             </a:r>
+            <a:endParaRPr lang="en-US"/>
           </a:p>
         </p:txBody>
       </p:sp>
@@ -4195,6 +3728,7 @@
               <a:rPr lang="en-US"/>
               <a:t>Edit Master text styles</a:t>
             </a:r>
+            <a:endParaRPr lang="en-US"/>
           </a:p>
         </p:txBody>
       </p:sp>
@@ -4262,6 +3796,7 @@
               <a:rPr lang="en-US"/>
               <a:t>Edit Master text styles</a:t>
             </a:r>
+            <a:endParaRPr lang="en-US"/>
           </a:p>
         </p:txBody>
       </p:sp>
@@ -4282,8 +3817,6 @@
           <a:p>
             <a:fld id="{48A87A34-81AB-432B-8DAE-1953F412C126}" type="datetimeFigureOut">
               <a:rPr lang="en-US" smtClean="0"/>
-              <a:pPr/>
-              <a:t>10/15/2025</a:t>
             </a:fld>
             <a:endParaRPr lang="en-US" dirty="0"/>
           </a:p>
@@ -4325,19 +3858,12 @@
           <a:p>
             <a:fld id="{6D22F896-40B5-4ADD-8801-0D06FADFA095}" type="slidenum">
               <a:rPr lang="en-US" smtClean="0"/>
-              <a:pPr/>
-              <a:t>‹#›</a:t>
             </a:fld>
             <a:endParaRPr lang="en-US" dirty="0"/>
           </a:p>
         </p:txBody>
       </p:sp>
     </p:spTree>
-    <p:extLst>
-      <p:ext uri="{BB962C8B-B14F-4D97-AF65-F5344CB8AC3E}">
-        <p14:creationId xmlns:p14="http://schemas.microsoft.com/office/powerpoint/2010/main" val="3295111743"/>
-      </p:ext>
-    </p:extLst>
   </p:cSld>
   <p:clrMapOvr>
     <a:masterClrMapping/>
@@ -4477,6 +4003,7 @@
               <a:rPr lang="en-US"/>
               <a:t>Edit Master text styles</a:t>
             </a:r>
+            <a:endParaRPr lang="en-US"/>
           </a:p>
         </p:txBody>
       </p:sp>
@@ -4623,6 +4150,7 @@
               <a:rPr lang="en-US"/>
               <a:t>Edit Master text styles</a:t>
             </a:r>
+            <a:endParaRPr lang="en-US"/>
           </a:p>
         </p:txBody>
       </p:sp>
@@ -4713,6 +4241,7 @@
               <a:rPr lang="en-US"/>
               <a:t>Edit Master text styles</a:t>
             </a:r>
+            <a:endParaRPr lang="en-US"/>
           </a:p>
         </p:txBody>
       </p:sp>
@@ -4859,6 +4388,7 @@
               <a:rPr lang="en-US"/>
               <a:t>Edit Master text styles</a:t>
             </a:r>
+            <a:endParaRPr lang="en-US"/>
           </a:p>
         </p:txBody>
       </p:sp>
@@ -4949,6 +4479,7 @@
               <a:rPr lang="en-US"/>
               <a:t>Edit Master text styles</a:t>
             </a:r>
+            <a:endParaRPr lang="en-US"/>
           </a:p>
         </p:txBody>
       </p:sp>
@@ -5095,6 +4626,7 @@
               <a:rPr lang="en-US"/>
               <a:t>Edit Master text styles</a:t>
             </a:r>
+            <a:endParaRPr lang="en-US"/>
           </a:p>
         </p:txBody>
       </p:sp>
@@ -5115,8 +4647,6 @@
           <a:p>
             <a:fld id="{48A87A34-81AB-432B-8DAE-1953F412C126}" type="datetimeFigureOut">
               <a:rPr lang="en-US" smtClean="0"/>
-              <a:pPr/>
-              <a:t>10/15/2025</a:t>
             </a:fld>
             <a:endParaRPr lang="en-US" dirty="0"/>
           </a:p>
@@ -5158,19 +4688,12 @@
           <a:p>
             <a:fld id="{6D22F896-40B5-4ADD-8801-0D06FADFA095}" type="slidenum">
               <a:rPr lang="en-US" smtClean="0"/>
-              <a:pPr/>
-              <a:t>‹#›</a:t>
             </a:fld>
             <a:endParaRPr lang="en-US" dirty="0"/>
           </a:p>
         </p:txBody>
       </p:sp>
     </p:spTree>
-    <p:extLst>
-      <p:ext uri="{BB962C8B-B14F-4D97-AF65-F5344CB8AC3E}">
-        <p14:creationId xmlns:p14="http://schemas.microsoft.com/office/powerpoint/2010/main" val="465913326"/>
-      </p:ext>
-    </p:extLst>
   </p:cSld>
   <p:clrMapOvr>
     <a:masterClrMapping/>
@@ -5238,6 +4761,7 @@
               <a:rPr lang="en-US"/>
               <a:t>Edit Master text styles</a:t>
             </a:r>
+            <a:endParaRPr lang="en-US"/>
           </a:p>
           <a:p>
             <a:pPr lvl="1"/>
@@ -5245,6 +4769,7 @@
               <a:rPr lang="en-US"/>
               <a:t>Second level</a:t>
             </a:r>
+            <a:endParaRPr lang="en-US"/>
           </a:p>
           <a:p>
             <a:pPr lvl="2"/>
@@ -5252,6 +4777,7 @@
               <a:rPr lang="en-US"/>
               <a:t>Third level</a:t>
             </a:r>
+            <a:endParaRPr lang="en-US"/>
           </a:p>
           <a:p>
             <a:pPr lvl="3"/>
@@ -5259,6 +4785,7 @@
               <a:rPr lang="en-US"/>
               <a:t>Fourth level</a:t>
             </a:r>
+            <a:endParaRPr lang="en-US"/>
           </a:p>
           <a:p>
             <a:pPr lvl="4"/>
@@ -5287,7 +4814,6 @@
           <a:p>
             <a:fld id="{48A87A34-81AB-432B-8DAE-1953F412C126}" type="datetimeFigureOut">
               <a:rPr lang="en-US" smtClean="0"/>
-              <a:t>10/15/2025</a:t>
             </a:fld>
             <a:endParaRPr lang="en-US" dirty="0"/>
           </a:p>
@@ -5329,18 +4855,12 @@
           <a:p>
             <a:fld id="{6D22F896-40B5-4ADD-8801-0D06FADFA095}" type="slidenum">
               <a:rPr lang="en-US" smtClean="0"/>
-              <a:t>‹#›</a:t>
             </a:fld>
             <a:endParaRPr lang="en-US" dirty="0"/>
           </a:p>
         </p:txBody>
       </p:sp>
     </p:spTree>
-    <p:extLst>
-      <p:ext uri="{BB962C8B-B14F-4D97-AF65-F5344CB8AC3E}">
-        <p14:creationId xmlns:p14="http://schemas.microsoft.com/office/powerpoint/2010/main" val="550602505"/>
-      </p:ext>
-    </p:extLst>
   </p:cSld>
   <p:clrMapOvr>
     <a:masterClrMapping/>
@@ -5418,6 +4938,7 @@
               <a:rPr lang="en-US"/>
               <a:t>Edit Master text styles</a:t>
             </a:r>
+            <a:endParaRPr lang="en-US"/>
           </a:p>
           <a:p>
             <a:pPr lvl="1"/>
@@ -5425,6 +4946,7 @@
               <a:rPr lang="en-US"/>
               <a:t>Second level</a:t>
             </a:r>
+            <a:endParaRPr lang="en-US"/>
           </a:p>
           <a:p>
             <a:pPr lvl="2"/>
@@ -5432,6 +4954,7 @@
               <a:rPr lang="en-US"/>
               <a:t>Third level</a:t>
             </a:r>
+            <a:endParaRPr lang="en-US"/>
           </a:p>
           <a:p>
             <a:pPr lvl="3"/>
@@ -5439,6 +4962,7 @@
               <a:rPr lang="en-US"/>
               <a:t>Fourth level</a:t>
             </a:r>
+            <a:endParaRPr lang="en-US"/>
           </a:p>
           <a:p>
             <a:pPr lvl="4"/>
@@ -5467,7 +4991,6 @@
           <a:p>
             <a:fld id="{48A87A34-81AB-432B-8DAE-1953F412C126}" type="datetimeFigureOut">
               <a:rPr lang="en-US" smtClean="0"/>
-              <a:t>10/15/2025</a:t>
             </a:fld>
             <a:endParaRPr lang="en-US" dirty="0"/>
           </a:p>
@@ -5509,18 +5032,12 @@
           <a:p>
             <a:fld id="{6D22F896-40B5-4ADD-8801-0D06FADFA095}" type="slidenum">
               <a:rPr lang="en-US" smtClean="0"/>
-              <a:t>‹#›</a:t>
             </a:fld>
             <a:endParaRPr lang="en-US" dirty="0"/>
           </a:p>
         </p:txBody>
       </p:sp>
     </p:spTree>
-    <p:extLst>
-      <p:ext uri="{BB962C8B-B14F-4D97-AF65-F5344CB8AC3E}">
-        <p14:creationId xmlns:p14="http://schemas.microsoft.com/office/powerpoint/2010/main" val="3187467713"/>
-      </p:ext>
-    </p:extLst>
   </p:cSld>
   <p:clrMapOvr>
     <a:masterClrMapping/>
@@ -5588,6 +5105,7 @@
               <a:rPr lang="en-US"/>
               <a:t>Edit Master text styles</a:t>
             </a:r>
+            <a:endParaRPr lang="en-US"/>
           </a:p>
           <a:p>
             <a:pPr lvl="1"/>
@@ -5595,6 +5113,7 @@
               <a:rPr lang="en-US"/>
               <a:t>Second level</a:t>
             </a:r>
+            <a:endParaRPr lang="en-US"/>
           </a:p>
           <a:p>
             <a:pPr lvl="2"/>
@@ -5602,6 +5121,7 @@
               <a:rPr lang="en-US"/>
               <a:t>Third level</a:t>
             </a:r>
+            <a:endParaRPr lang="en-US"/>
           </a:p>
           <a:p>
             <a:pPr lvl="3"/>
@@ -5609,6 +5129,7 @@
               <a:rPr lang="en-US"/>
               <a:t>Fourth level</a:t>
             </a:r>
+            <a:endParaRPr lang="en-US"/>
           </a:p>
           <a:p>
             <a:pPr lvl="4"/>
@@ -5637,7 +5158,6 @@
           <a:p>
             <a:fld id="{48A87A34-81AB-432B-8DAE-1953F412C126}" type="datetimeFigureOut">
               <a:rPr lang="en-US" smtClean="0"/>
-              <a:t>10/15/2025</a:t>
             </a:fld>
             <a:endParaRPr lang="en-US" dirty="0"/>
           </a:p>
@@ -5679,18 +5199,12 @@
           <a:p>
             <a:fld id="{6D22F896-40B5-4ADD-8801-0D06FADFA095}" type="slidenum">
               <a:rPr lang="en-US" smtClean="0"/>
-              <a:t>‹#›</a:t>
             </a:fld>
             <a:endParaRPr lang="en-US" dirty="0"/>
           </a:p>
         </p:txBody>
       </p:sp>
     </p:spTree>
-    <p:extLst>
-      <p:ext uri="{BB962C8B-B14F-4D97-AF65-F5344CB8AC3E}">
-        <p14:creationId xmlns:p14="http://schemas.microsoft.com/office/powerpoint/2010/main" val="3707953439"/>
-      </p:ext>
-    </p:extLst>
   </p:cSld>
   <p:clrMapOvr>
     <a:masterClrMapping/>
@@ -5894,7 +5408,6 @@
           <a:p>
             <a:fld id="{48A87A34-81AB-432B-8DAE-1953F412C126}" type="datetimeFigureOut">
               <a:rPr lang="en-US" smtClean="0"/>
-              <a:t>10/15/2025</a:t>
             </a:fld>
             <a:endParaRPr lang="en-US" dirty="0"/>
           </a:p>
@@ -5936,18 +5449,12 @@
           <a:p>
             <a:fld id="{6D22F896-40B5-4ADD-8801-0D06FADFA095}" type="slidenum">
               <a:rPr lang="en-US" smtClean="0"/>
-              <a:t>‹#›</a:t>
             </a:fld>
             <a:endParaRPr lang="en-US" dirty="0"/>
           </a:p>
         </p:txBody>
       </p:sp>
     </p:spTree>
-    <p:extLst>
-      <p:ext uri="{BB962C8B-B14F-4D97-AF65-F5344CB8AC3E}">
-        <p14:creationId xmlns:p14="http://schemas.microsoft.com/office/powerpoint/2010/main" val="2242855819"/>
-      </p:ext>
-    </p:extLst>
   </p:cSld>
   <p:clrMapOvr>
     <a:masterClrMapping/>
@@ -6020,6 +5527,7 @@
               <a:rPr lang="en-US"/>
               <a:t>Edit Master text styles</a:t>
             </a:r>
+            <a:endParaRPr lang="en-US"/>
           </a:p>
           <a:p>
             <a:pPr lvl="1"/>
@@ -6027,6 +5535,7 @@
               <a:rPr lang="en-US"/>
               <a:t>Second level</a:t>
             </a:r>
+            <a:endParaRPr lang="en-US"/>
           </a:p>
           <a:p>
             <a:pPr lvl="2"/>
@@ -6034,6 +5543,7 @@
               <a:rPr lang="en-US"/>
               <a:t>Third level</a:t>
             </a:r>
+            <a:endParaRPr lang="en-US"/>
           </a:p>
           <a:p>
             <a:pPr lvl="3"/>
@@ -6041,6 +5551,7 @@
               <a:rPr lang="en-US"/>
               <a:t>Fourth level</a:t>
             </a:r>
+            <a:endParaRPr lang="en-US"/>
           </a:p>
           <a:p>
             <a:pPr lvl="4"/>
@@ -6077,6 +5588,7 @@
               <a:rPr lang="en-US"/>
               <a:t>Edit Master text styles</a:t>
             </a:r>
+            <a:endParaRPr lang="en-US"/>
           </a:p>
           <a:p>
             <a:pPr lvl="1"/>
@@ -6084,6 +5596,7 @@
               <a:rPr lang="en-US"/>
               <a:t>Second level</a:t>
             </a:r>
+            <a:endParaRPr lang="en-US"/>
           </a:p>
           <a:p>
             <a:pPr lvl="2"/>
@@ -6091,6 +5604,7 @@
               <a:rPr lang="en-US"/>
               <a:t>Third level</a:t>
             </a:r>
+            <a:endParaRPr lang="en-US"/>
           </a:p>
           <a:p>
             <a:pPr lvl="3"/>
@@ -6098,6 +5612,7 @@
               <a:rPr lang="en-US"/>
               <a:t>Fourth level</a:t>
             </a:r>
+            <a:endParaRPr lang="en-US"/>
           </a:p>
           <a:p>
             <a:pPr lvl="4"/>
@@ -6126,7 +5641,6 @@
           <a:p>
             <a:fld id="{48A87A34-81AB-432B-8DAE-1953F412C126}" type="datetimeFigureOut">
               <a:rPr lang="en-US" smtClean="0"/>
-              <a:t>10/15/2025</a:t>
             </a:fld>
             <a:endParaRPr lang="en-US" dirty="0"/>
           </a:p>
@@ -6168,18 +5682,12 @@
           <a:p>
             <a:fld id="{6D22F896-40B5-4ADD-8801-0D06FADFA095}" type="slidenum">
               <a:rPr lang="en-US" smtClean="0"/>
-              <a:t>‹#›</a:t>
             </a:fld>
             <a:endParaRPr lang="en-US" dirty="0"/>
           </a:p>
         </p:txBody>
       </p:sp>
     </p:spTree>
-    <p:extLst>
-      <p:ext uri="{BB962C8B-B14F-4D97-AF65-F5344CB8AC3E}">
-        <p14:creationId xmlns:p14="http://schemas.microsoft.com/office/powerpoint/2010/main" val="3197318587"/>
-      </p:ext>
-    </p:extLst>
   </p:cSld>
   <p:clrMapOvr>
     <a:masterClrMapping/>
@@ -6321,6 +5829,7 @@
               <a:rPr lang="en-US"/>
               <a:t>Edit Master text styles</a:t>
             </a:r>
+            <a:endParaRPr lang="en-US"/>
           </a:p>
         </p:txBody>
       </p:sp>
@@ -6349,6 +5858,7 @@
               <a:rPr lang="en-US"/>
               <a:t>Edit Master text styles</a:t>
             </a:r>
+            <a:endParaRPr lang="en-US"/>
           </a:p>
           <a:p>
             <a:pPr lvl="1"/>
@@ -6356,6 +5866,7 @@
               <a:rPr lang="en-US"/>
               <a:t>Second level</a:t>
             </a:r>
+            <a:endParaRPr lang="en-US"/>
           </a:p>
           <a:p>
             <a:pPr lvl="2"/>
@@ -6363,6 +5874,7 @@
               <a:rPr lang="en-US"/>
               <a:t>Third level</a:t>
             </a:r>
+            <a:endParaRPr lang="en-US"/>
           </a:p>
           <a:p>
             <a:pPr lvl="3"/>
@@ -6370,6 +5882,7 @@
               <a:rPr lang="en-US"/>
               <a:t>Fourth level</a:t>
             </a:r>
+            <a:endParaRPr lang="en-US"/>
           </a:p>
           <a:p>
             <a:pPr lvl="4"/>
@@ -6442,6 +5955,7 @@
               <a:rPr lang="en-US"/>
               <a:t>Edit Master text styles</a:t>
             </a:r>
+            <a:endParaRPr lang="en-US"/>
           </a:p>
         </p:txBody>
       </p:sp>
@@ -6470,6 +5984,7 @@
               <a:rPr lang="en-US"/>
               <a:t>Edit Master text styles</a:t>
             </a:r>
+            <a:endParaRPr lang="en-US"/>
           </a:p>
           <a:p>
             <a:pPr lvl="1"/>
@@ -6477,6 +5992,7 @@
               <a:rPr lang="en-US"/>
               <a:t>Second level</a:t>
             </a:r>
+            <a:endParaRPr lang="en-US"/>
           </a:p>
           <a:p>
             <a:pPr lvl="2"/>
@@ -6484,6 +6000,7 @@
               <a:rPr lang="en-US"/>
               <a:t>Third level</a:t>
             </a:r>
+            <a:endParaRPr lang="en-US"/>
           </a:p>
           <a:p>
             <a:pPr lvl="3"/>
@@ -6491,6 +6008,7 @@
               <a:rPr lang="en-US"/>
               <a:t>Fourth level</a:t>
             </a:r>
+            <a:endParaRPr lang="en-US"/>
           </a:p>
           <a:p>
             <a:pPr lvl="4"/>
@@ -6519,7 +6037,6 @@
           <a:p>
             <a:fld id="{48A87A34-81AB-432B-8DAE-1953F412C126}" type="datetimeFigureOut">
               <a:rPr lang="en-US" smtClean="0"/>
-              <a:t>10/15/2025</a:t>
             </a:fld>
             <a:endParaRPr lang="en-US" dirty="0"/>
           </a:p>
@@ -6561,18 +6078,12 @@
           <a:p>
             <a:fld id="{6D22F896-40B5-4ADD-8801-0D06FADFA095}" type="slidenum">
               <a:rPr lang="en-US" smtClean="0"/>
-              <a:t>‹#›</a:t>
             </a:fld>
             <a:endParaRPr lang="en-US" dirty="0"/>
           </a:p>
         </p:txBody>
       </p:sp>
     </p:spTree>
-    <p:extLst>
-      <p:ext uri="{BB962C8B-B14F-4D97-AF65-F5344CB8AC3E}">
-        <p14:creationId xmlns:p14="http://schemas.microsoft.com/office/powerpoint/2010/main" val="2724868443"/>
-      </p:ext>
-    </p:extLst>
   </p:cSld>
   <p:clrMapOvr>
     <a:masterClrMapping/>
@@ -6637,7 +6148,6 @@
           <a:p>
             <a:fld id="{48A87A34-81AB-432B-8DAE-1953F412C126}" type="datetimeFigureOut">
               <a:rPr lang="en-US" smtClean="0"/>
-              <a:t>10/15/2025</a:t>
             </a:fld>
             <a:endParaRPr lang="en-US" dirty="0"/>
           </a:p>
@@ -6679,18 +6189,12 @@
           <a:p>
             <a:fld id="{6D22F896-40B5-4ADD-8801-0D06FADFA095}" type="slidenum">
               <a:rPr lang="en-US" smtClean="0"/>
-              <a:t>‹#›</a:t>
             </a:fld>
             <a:endParaRPr lang="en-US" dirty="0"/>
           </a:p>
         </p:txBody>
       </p:sp>
     </p:spTree>
-    <p:extLst>
-      <p:ext uri="{BB962C8B-B14F-4D97-AF65-F5344CB8AC3E}">
-        <p14:creationId xmlns:p14="http://schemas.microsoft.com/office/powerpoint/2010/main" val="840162751"/>
-      </p:ext>
-    </p:extLst>
   </p:cSld>
   <p:clrMapOvr>
     <a:masterClrMapping/>
@@ -6732,7 +6236,6 @@
           <a:p>
             <a:fld id="{48A87A34-81AB-432B-8DAE-1953F412C126}" type="datetimeFigureOut">
               <a:rPr lang="en-US" smtClean="0"/>
-              <a:t>10/15/2025</a:t>
             </a:fld>
             <a:endParaRPr lang="en-US" dirty="0"/>
           </a:p>
@@ -6774,18 +6277,12 @@
           <a:p>
             <a:fld id="{6D22F896-40B5-4ADD-8801-0D06FADFA095}" type="slidenum">
               <a:rPr lang="en-US" smtClean="0"/>
-              <a:t>‹#›</a:t>
             </a:fld>
             <a:endParaRPr lang="en-US" dirty="0"/>
           </a:p>
         </p:txBody>
       </p:sp>
     </p:spTree>
-    <p:extLst>
-      <p:ext uri="{BB962C8B-B14F-4D97-AF65-F5344CB8AC3E}">
-        <p14:creationId xmlns:p14="http://schemas.microsoft.com/office/powerpoint/2010/main" val="2792320390"/>
-      </p:ext>
-    </p:extLst>
   </p:cSld>
   <p:clrMapOvr>
     <a:masterClrMapping/>
@@ -6867,6 +6364,7 @@
               <a:rPr lang="en-US"/>
               <a:t>Edit Master text styles</a:t>
             </a:r>
+            <a:endParaRPr lang="en-US"/>
           </a:p>
           <a:p>
             <a:pPr lvl="1"/>
@@ -6874,6 +6372,7 @@
               <a:rPr lang="en-US"/>
               <a:t>Second level</a:t>
             </a:r>
+            <a:endParaRPr lang="en-US"/>
           </a:p>
           <a:p>
             <a:pPr lvl="2"/>
@@ -6881,6 +6380,7 @@
               <a:rPr lang="en-US"/>
               <a:t>Third level</a:t>
             </a:r>
+            <a:endParaRPr lang="en-US"/>
           </a:p>
           <a:p>
             <a:pPr lvl="3"/>
@@ -6888,6 +6388,7 @@
               <a:rPr lang="en-US"/>
               <a:t>Fourth level</a:t>
             </a:r>
+            <a:endParaRPr lang="en-US"/>
           </a:p>
           <a:p>
             <a:pPr lvl="4"/>
@@ -6985,6 +6486,7 @@
               <a:rPr lang="en-US"/>
               <a:t>Edit Master text styles</a:t>
             </a:r>
+            <a:endParaRPr lang="en-US"/>
           </a:p>
         </p:txBody>
       </p:sp>
@@ -7005,7 +6507,6 @@
           <a:p>
             <a:fld id="{48A87A34-81AB-432B-8DAE-1953F412C126}" type="datetimeFigureOut">
               <a:rPr lang="en-US" smtClean="0"/>
-              <a:t>10/15/2025</a:t>
             </a:fld>
             <a:endParaRPr lang="en-US" dirty="0"/>
           </a:p>
@@ -7047,18 +6548,12 @@
           <a:p>
             <a:fld id="{6D22F896-40B5-4ADD-8801-0D06FADFA095}" type="slidenum">
               <a:rPr lang="en-US" smtClean="0"/>
-              <a:t>‹#›</a:t>
             </a:fld>
             <a:endParaRPr lang="en-US" dirty="0"/>
           </a:p>
         </p:txBody>
       </p:sp>
     </p:spTree>
-    <p:extLst>
-      <p:ext uri="{BB962C8B-B14F-4D97-AF65-F5344CB8AC3E}">
-        <p14:creationId xmlns:p14="http://schemas.microsoft.com/office/powerpoint/2010/main" val="4115870879"/>
-      </p:ext>
-    </p:extLst>
   </p:cSld>
   <p:clrMapOvr>
     <a:masterClrMapping/>
@@ -7266,6 +6761,7 @@
               <a:rPr lang="en-US"/>
               <a:t>Edit Master text styles</a:t>
             </a:r>
+            <a:endParaRPr lang="en-US"/>
           </a:p>
         </p:txBody>
       </p:sp>
@@ -7286,7 +6782,6 @@
           <a:p>
             <a:fld id="{48A87A34-81AB-432B-8DAE-1953F412C126}" type="datetimeFigureOut">
               <a:rPr lang="en-US" smtClean="0"/>
-              <a:t>10/15/2025</a:t>
             </a:fld>
             <a:endParaRPr lang="en-US" dirty="0"/>
           </a:p>
@@ -7328,18 +6823,12 @@
           <a:p>
             <a:fld id="{6D22F896-40B5-4ADD-8801-0D06FADFA095}" type="slidenum">
               <a:rPr lang="en-US" smtClean="0"/>
-              <a:t>‹#›</a:t>
             </a:fld>
             <a:endParaRPr lang="en-US" dirty="0"/>
           </a:p>
         </p:txBody>
       </p:sp>
     </p:spTree>
-    <p:extLst>
-      <p:ext uri="{BB962C8B-B14F-4D97-AF65-F5344CB8AC3E}">
-        <p14:creationId xmlns:p14="http://schemas.microsoft.com/office/powerpoint/2010/main" val="1074148511"/>
-      </p:ext>
-    </p:extLst>
   </p:cSld>
   <p:clrMapOvr>
     <a:masterClrMapping/>
@@ -7353,7 +6842,7 @@
     <p:bg>
       <p:bgPr>
         <a:blipFill dpi="0" rotWithShape="1">
-          <a:blip r:embed="rId19">
+          <a:blip r:embed="rId18">
             <a:lum/>
           </a:blip>
           <a:srcRect/>
@@ -7441,6 +6930,7 @@
               <a:rPr lang="en-US"/>
               <a:t>Edit Master text styles</a:t>
             </a:r>
+            <a:endParaRPr lang="en-US"/>
           </a:p>
           <a:p>
             <a:pPr lvl="1"/>
@@ -7448,6 +6938,7 @@
               <a:rPr lang="en-US"/>
               <a:t>Second level</a:t>
             </a:r>
+            <a:endParaRPr lang="en-US"/>
           </a:p>
           <a:p>
             <a:pPr lvl="2"/>
@@ -7455,6 +6946,7 @@
               <a:rPr lang="en-US"/>
               <a:t>Third level</a:t>
             </a:r>
+            <a:endParaRPr lang="en-US"/>
           </a:p>
           <a:p>
             <a:pPr lvl="3"/>
@@ -7462,6 +6954,7 @@
               <a:rPr lang="en-US"/>
               <a:t>Fourth level</a:t>
             </a:r>
+            <a:endParaRPr lang="en-US"/>
           </a:p>
           <a:p>
             <a:pPr lvl="4"/>
@@ -7526,8 +7019,6 @@
           <a:p>
             <a:fld id="{48A87A34-81AB-432B-8DAE-1953F412C126}" type="datetimeFigureOut">
               <a:rPr lang="en-US" smtClean="0"/>
-              <a:pPr/>
-              <a:t>10/15/2025</a:t>
             </a:fld>
             <a:endParaRPr lang="en-US" dirty="0"/>
           </a:p>
@@ -7641,39 +7132,32 @@
           <a:p>
             <a:fld id="{6D22F896-40B5-4ADD-8801-0D06FADFA095}" type="slidenum">
               <a:rPr lang="en-US" smtClean="0"/>
-              <a:pPr/>
-              <a:t>‹#›</a:t>
             </a:fld>
             <a:endParaRPr lang="en-US" dirty="0"/>
           </a:p>
         </p:txBody>
       </p:sp>
     </p:spTree>
-    <p:extLst>
-      <p:ext uri="{BB962C8B-B14F-4D97-AF65-F5344CB8AC3E}">
-        <p14:creationId xmlns:p14="http://schemas.microsoft.com/office/powerpoint/2010/main" val="2068103270"/>
-      </p:ext>
-    </p:extLst>
   </p:cSld>
   <p:clrMap bg1="dk1" tx1="lt1" bg2="dk2" tx2="lt2" accent1="accent1" accent2="accent2" accent3="accent3" accent4="accent4" accent5="accent5" accent6="accent6" hlink="hlink" folHlink="folHlink"/>
   <p:sldLayoutIdLst>
-    <p:sldLayoutId id="2147483877" r:id="rId1"/>
-    <p:sldLayoutId id="2147483878" r:id="rId2"/>
-    <p:sldLayoutId id="2147483879" r:id="rId3"/>
-    <p:sldLayoutId id="2147483880" r:id="rId4"/>
-    <p:sldLayoutId id="2147483881" r:id="rId5"/>
-    <p:sldLayoutId id="2147483882" r:id="rId6"/>
-    <p:sldLayoutId id="2147483883" r:id="rId7"/>
-    <p:sldLayoutId id="2147483884" r:id="rId8"/>
-    <p:sldLayoutId id="2147483885" r:id="rId9"/>
-    <p:sldLayoutId id="2147483886" r:id="rId10"/>
-    <p:sldLayoutId id="2147483887" r:id="rId11"/>
-    <p:sldLayoutId id="2147483888" r:id="rId12"/>
-    <p:sldLayoutId id="2147483889" r:id="rId13"/>
-    <p:sldLayoutId id="2147483890" r:id="rId14"/>
-    <p:sldLayoutId id="2147483891" r:id="rId15"/>
-    <p:sldLayoutId id="2147483892" r:id="rId16"/>
-    <p:sldLayoutId id="2147483893" r:id="rId17"/>
+    <p:sldLayoutId id="2147483649" r:id="rId1"/>
+    <p:sldLayoutId id="2147483650" r:id="rId2"/>
+    <p:sldLayoutId id="2147483651" r:id="rId3"/>
+    <p:sldLayoutId id="2147483652" r:id="rId4"/>
+    <p:sldLayoutId id="2147483653" r:id="rId5"/>
+    <p:sldLayoutId id="2147483654" r:id="rId6"/>
+    <p:sldLayoutId id="2147483655" r:id="rId7"/>
+    <p:sldLayoutId id="2147483656" r:id="rId8"/>
+    <p:sldLayoutId id="2147483657" r:id="rId9"/>
+    <p:sldLayoutId id="2147483658" r:id="rId10"/>
+    <p:sldLayoutId id="2147483659" r:id="rId11"/>
+    <p:sldLayoutId id="2147483660" r:id="rId12"/>
+    <p:sldLayoutId id="2147483661" r:id="rId13"/>
+    <p:sldLayoutId id="2147483662" r:id="rId14"/>
+    <p:sldLayoutId id="2147483663" r:id="rId15"/>
+    <p:sldLayoutId id="2147483664" r:id="rId16"/>
+    <p:sldLayoutId id="2147483665" r:id="rId17"/>
   </p:sldLayoutIdLst>
   <p:txStyles>
     <p:titleStyle>
@@ -8266,6 +7750,7 @@
               <a:rPr lang="en-US" dirty="0"/>
               <a:t>You can’t improve what you can’t measure. </a:t>
             </a:r>
+            <a:endParaRPr lang="en-US" dirty="0"/>
           </a:p>
           <a:p>
             <a:pPr lvl="1"/>
@@ -8416,6 +7901,7 @@
               <a:rPr lang="en-US" sz="1800" dirty="0"/>
               <a:t>? </a:t>
             </a:r>
+            <a:endParaRPr lang="en-US" sz="1800" dirty="0"/>
           </a:p>
           <a:p>
             <a:pPr lvl="1"/>
@@ -8435,6 +7921,7 @@
               <a:rPr lang="en-US" sz="1800" dirty="0"/>
               <a:t> </a:t>
             </a:r>
+            <a:endParaRPr lang="en-US" sz="1800" dirty="0"/>
           </a:p>
           <a:p>
             <a:pPr lvl="1"/>
@@ -8461,6 +7948,7 @@
               <a:rPr lang="en-US" sz="1800" dirty="0"/>
               <a:t>?</a:t>
             </a:r>
+            <a:endParaRPr lang="en-US" sz="1800" dirty="0"/>
           </a:p>
           <a:p>
             <a:pPr lvl="1"/>
@@ -8488,6 +7976,7 @@
               <a:rPr lang="en-US" sz="1800" dirty="0"/>
               <a:t>.</a:t>
             </a:r>
+            <a:endParaRPr lang="en-US" sz="1800" dirty="0"/>
           </a:p>
           <a:p>
             <a:pPr lvl="2"/>
@@ -8503,6 +7992,7 @@
               <a:rPr lang="en-US" sz="1400" dirty="0"/>
               <a:t> </a:t>
             </a:r>
+            <a:endParaRPr lang="en-US" sz="1400" dirty="0"/>
           </a:p>
         </p:txBody>
       </p:sp>
@@ -9246,7 +8736,7 @@
           </p:nvPr>
         </p:nvPicPr>
         <p:blipFill>
-          <a:blip r:embed="rId2"/>
+          <a:blip r:embed="rId1"/>
           <a:stretch>
             <a:fillRect/>
           </a:stretch>
@@ -9262,11 +8752,6 @@
         </p:spPr>
       </p:pic>
     </p:spTree>
-    <p:extLst>
-      <p:ext uri="{BB962C8B-B14F-4D97-AF65-F5344CB8AC3E}">
-        <p14:creationId xmlns:p14="http://schemas.microsoft.com/office/powerpoint/2010/main" val="2230343479"/>
-      </p:ext>
-    </p:extLst>
   </p:cSld>
   <p:clrMapOvr>
     <a:masterClrMapping/>
@@ -9342,7 +8827,7 @@
           <p:nvPr/>
         </p:nvPicPr>
         <p:blipFill>
-          <a:blip r:embed="rId2"/>
+          <a:blip r:embed="rId1"/>
           <a:stretch>
             <a:fillRect/>
           </a:stretch>
@@ -9358,11 +8843,6 @@
         </p:spPr>
       </p:pic>
     </p:spTree>
-    <p:extLst>
-      <p:ext uri="{BB962C8B-B14F-4D97-AF65-F5344CB8AC3E}">
-        <p14:creationId xmlns:p14="http://schemas.microsoft.com/office/powerpoint/2010/main" val="1640774756"/>
-      </p:ext>
-    </p:extLst>
   </p:cSld>
   <p:clrMapOvr>
     <a:masterClrMapping/>
@@ -9443,7 +8923,7 @@
           </a:bodyPr>
           <a:lstStyle/>
           <a:p>
-            <a:pPr marL="118872" indent="0">
+            <a:pPr marL="118745" indent="0">
               <a:buNone/>
             </a:pPr>
             <a:r>
@@ -9542,7 +9022,7 @@
             <a:endParaRPr lang="en-US" sz="2000" dirty="0"/>
           </a:p>
           <a:p>
-            <a:pPr marL="118872" indent="0">
+            <a:pPr marL="118745" indent="0">
               <a:buNone/>
             </a:pPr>
             <a:r>
@@ -9554,11 +9034,6 @@
         </p:txBody>
       </p:sp>
     </p:spTree>
-    <p:extLst>
-      <p:ext uri="{BB962C8B-B14F-4D97-AF65-F5344CB8AC3E}">
-        <p14:creationId xmlns:p14="http://schemas.microsoft.com/office/powerpoint/2010/main" val="303877150"/>
-      </p:ext>
-    </p:extLst>
   </p:cSld>
   <p:clrMapOvr>
     <a:masterClrMapping/>
@@ -10274,6 +9749,7 @@
               <a:rPr lang="en-US" altLang="zh-CN" sz="2200" dirty="0"/>
               <a:t>How do you measure creativity?</a:t>
             </a:r>
+            <a:endParaRPr lang="en-US" altLang="zh-CN" sz="2200" dirty="0"/>
           </a:p>
           <a:p>
             <a:pPr lvl="1"/>
@@ -10285,6 +9761,7 @@
               <a:rPr lang="en-US" altLang="zh-CN" sz="2000" dirty="0"/>
               <a:t>? </a:t>
             </a:r>
+            <a:endParaRPr lang="en-US" altLang="zh-CN" sz="2000" dirty="0"/>
           </a:p>
           <a:p>
             <a:pPr lvl="1"/>
@@ -10296,36 +9773,22 @@
               <a:rPr lang="en-US" altLang="zh-CN" sz="2000" dirty="0"/>
               <a:t>? </a:t>
             </a:r>
+            <a:endParaRPr lang="en-US" altLang="zh-CN" sz="2000" dirty="0"/>
           </a:p>
           <a:p>
             <a:r>
               <a:rPr lang="en-US" altLang="zh-CN" sz="2200" dirty="0"/>
               <a:t>Is software Art or Engineering?</a:t>
             </a:r>
+            <a:endParaRPr lang="en-US" altLang="zh-CN" sz="2200" dirty="0"/>
           </a:p>
           <a:p>
             <a:pPr lvl="1"/>
             <a:r>
               <a:rPr lang="en-US" altLang="zh-CN" sz="2000" dirty="0"/>
-              <a:t>How do you measure an Artist?  </a:t>
-            </a:r>
-          </a:p>
-          <a:p>
-            <a:pPr lvl="1"/>
-            <a:r>
-              <a:rPr lang="en-US" altLang="zh-CN" sz="2000" dirty="0"/>
-              <a:t>“Gone with the Wind”   by </a:t>
-            </a:r>
-            <a:r>
-              <a:rPr lang="en-US" sz="2000" dirty="0">
-                <a:hlinkClick r:id="rId3" action="ppaction://hlinkfile" tooltip="Margaret Mitchell"/>
-              </a:rPr>
-              <a:t>Margaret Mitchell</a:t>
-            </a:r>
-            <a:r>
-              <a:rPr lang="en-US" altLang="zh-CN" sz="2000" dirty="0"/>
-              <a:t>;  </a:t>
-            </a:r>
+              <a:t>How do you measure an Artist?    </a:t>
+            </a:r>
+            <a:endParaRPr lang="en-US" altLang="zh-CN" sz="2000" dirty="0"/>
           </a:p>
           <a:p>
             <a:pPr lvl="1"/>
@@ -10653,49 +10116,6 @@
                                   </p:childTnLst>
                                 </p:cTn>
                               </p:par>
-                              <p:par>
-                                <p:cTn id="25" presetID="10" presetClass="entr" presetSubtype="0" fill="hold" grpId="0" nodeType="withEffect">
-                                  <p:stCondLst>
-                                    <p:cond delay="0"/>
-                                  </p:stCondLst>
-                                  <p:childTnLst>
-                                    <p:set>
-                                      <p:cBhvr>
-                                        <p:cTn id="26" dur="1" fill="hold">
-                                          <p:stCondLst>
-                                            <p:cond delay="0"/>
-                                          </p:stCondLst>
-                                        </p:cTn>
-                                        <p:tgtEl>
-                                          <p:spTgt spid="2">
-                                            <p:txEl>
-                                              <p:pRg st="6" end="6"/>
-                                            </p:txEl>
-                                          </p:spTgt>
-                                        </p:tgtEl>
-                                        <p:attrNameLst>
-                                          <p:attrName>style.visibility</p:attrName>
-                                        </p:attrNameLst>
-                                      </p:cBhvr>
-                                      <p:to>
-                                        <p:strVal val="visible"/>
-                                      </p:to>
-                                    </p:set>
-                                    <p:animEffect transition="in" filter="fade">
-                                      <p:cBhvr>
-                                        <p:cTn id="27" dur="2000"/>
-                                        <p:tgtEl>
-                                          <p:spTgt spid="2">
-                                            <p:txEl>
-                                              <p:pRg st="6" end="6"/>
-                                            </p:txEl>
-                                          </p:spTgt>
-                                        </p:tgtEl>
-                                      </p:cBhvr>
-                                    </p:animEffect>
-                                  </p:childTnLst>
-                                </p:cTn>
-                              </p:par>
                             </p:childTnLst>
                           </p:cTn>
                         </p:par>
@@ -10795,157 +10215,157 @@
             </a:pPr>
             <a:r>
               <a:rPr lang="zh-CN" altLang="en-US" sz="2400" dirty="0">
-                <a:latin typeface="Microsoft YaHei" pitchFamily="34" charset="-122"/>
-                <a:ea typeface="Microsoft YaHei" pitchFamily="34" charset="-122"/>
+                <a:latin typeface="微软雅黑" panose="020B0503020204020204" charset="-122"/>
+                <a:ea typeface="微软雅黑" panose="020B0503020204020204" charset="-122"/>
               </a:rPr>
               <a:t>念奴娇 </a:t>
             </a:r>
             <a:r>
               <a:rPr lang="en-US" altLang="zh-CN" sz="2400" dirty="0">
-                <a:latin typeface="Microsoft YaHei" pitchFamily="34" charset="-122"/>
-                <a:ea typeface="Microsoft YaHei" pitchFamily="34" charset="-122"/>
+                <a:latin typeface="微软雅黑" panose="020B0503020204020204" charset="-122"/>
+                <a:ea typeface="微软雅黑" panose="020B0503020204020204" charset="-122"/>
               </a:rPr>
               <a:t>· </a:t>
             </a:r>
             <a:r>
               <a:rPr lang="zh-CN" altLang="en-US" sz="2400" dirty="0">
-                <a:latin typeface="Microsoft YaHei" pitchFamily="34" charset="-122"/>
-                <a:ea typeface="Microsoft YaHei" pitchFamily="34" charset="-122"/>
+                <a:latin typeface="微软雅黑" panose="020B0503020204020204" charset="-122"/>
+                <a:ea typeface="微软雅黑" panose="020B0503020204020204" charset="-122"/>
               </a:rPr>
               <a:t>赤壁怀古 </a:t>
             </a:r>
             <a:br>
               <a:rPr lang="zh-CN" altLang="en-US" dirty="0">
-                <a:latin typeface="Microsoft YaHei" pitchFamily="34" charset="-122"/>
-                <a:ea typeface="Microsoft YaHei" pitchFamily="34" charset="-122"/>
+                <a:latin typeface="微软雅黑" panose="020B0503020204020204" charset="-122"/>
+                <a:ea typeface="微软雅黑" panose="020B0503020204020204" charset="-122"/>
               </a:rPr>
             </a:br>
             <a:br>
               <a:rPr lang="zh-CN" altLang="en-US" dirty="0">
-                <a:latin typeface="Microsoft YaHei" pitchFamily="34" charset="-122"/>
-                <a:ea typeface="Microsoft YaHei" pitchFamily="34" charset="-122"/>
+                <a:latin typeface="微软雅黑" panose="020B0503020204020204" charset="-122"/>
+                <a:ea typeface="微软雅黑" panose="020B0503020204020204" charset="-122"/>
               </a:rPr>
             </a:br>
             <a:r>
               <a:rPr lang="zh-CN" altLang="en-US" sz="2200" dirty="0">
-                <a:latin typeface="Microsoft YaHei" pitchFamily="34" charset="-122"/>
-                <a:ea typeface="Microsoft YaHei" pitchFamily="34" charset="-122"/>
+                <a:latin typeface="微软雅黑" panose="020B0503020204020204" charset="-122"/>
+                <a:ea typeface="微软雅黑" panose="020B0503020204020204" charset="-122"/>
               </a:rPr>
               <a:t>大江东去，浪淘尽，</a:t>
             </a:r>
             <a:br>
               <a:rPr lang="zh-CN" altLang="en-US" sz="2200" dirty="0">
-                <a:latin typeface="Microsoft YaHei" pitchFamily="34" charset="-122"/>
-                <a:ea typeface="Microsoft YaHei" pitchFamily="34" charset="-122"/>
+                <a:latin typeface="微软雅黑" panose="020B0503020204020204" charset="-122"/>
+                <a:ea typeface="微软雅黑" panose="020B0503020204020204" charset="-122"/>
               </a:rPr>
             </a:br>
             <a:r>
               <a:rPr lang="zh-CN" altLang="en-US" sz="2200" dirty="0">
-                <a:latin typeface="Microsoft YaHei" pitchFamily="34" charset="-122"/>
-                <a:ea typeface="Microsoft YaHei" pitchFamily="34" charset="-122"/>
+                <a:latin typeface="微软雅黑" panose="020B0503020204020204" charset="-122"/>
+                <a:ea typeface="微软雅黑" panose="020B0503020204020204" charset="-122"/>
               </a:rPr>
               <a:t>千古风流人物。</a:t>
             </a:r>
             <a:br>
               <a:rPr lang="zh-CN" altLang="en-US" sz="2200" dirty="0">
-                <a:latin typeface="Microsoft YaHei" pitchFamily="34" charset="-122"/>
-                <a:ea typeface="Microsoft YaHei" pitchFamily="34" charset="-122"/>
+                <a:latin typeface="微软雅黑" panose="020B0503020204020204" charset="-122"/>
+                <a:ea typeface="微软雅黑" panose="020B0503020204020204" charset="-122"/>
               </a:rPr>
             </a:br>
             <a:r>
               <a:rPr lang="zh-CN" altLang="en-US" sz="2200" dirty="0">
-                <a:latin typeface="Microsoft YaHei" pitchFamily="34" charset="-122"/>
-                <a:ea typeface="Microsoft YaHei" pitchFamily="34" charset="-122"/>
+                <a:latin typeface="微软雅黑" panose="020B0503020204020204" charset="-122"/>
+                <a:ea typeface="微软雅黑" panose="020B0503020204020204" charset="-122"/>
               </a:rPr>
               <a:t>故垒西边，人道是，三国周郎赤壁。</a:t>
             </a:r>
             <a:br>
               <a:rPr lang="zh-CN" altLang="en-US" sz="2200" dirty="0">
-                <a:latin typeface="Microsoft YaHei" pitchFamily="34" charset="-122"/>
-                <a:ea typeface="Microsoft YaHei" pitchFamily="34" charset="-122"/>
+                <a:latin typeface="微软雅黑" panose="020B0503020204020204" charset="-122"/>
+                <a:ea typeface="微软雅黑" panose="020B0503020204020204" charset="-122"/>
               </a:rPr>
             </a:br>
             <a:r>
               <a:rPr lang="zh-CN" altLang="en-US" sz="2200" dirty="0">
-                <a:latin typeface="Microsoft YaHei" pitchFamily="34" charset="-122"/>
-                <a:ea typeface="Microsoft YaHei" pitchFamily="34" charset="-122"/>
+                <a:latin typeface="微软雅黑" panose="020B0503020204020204" charset="-122"/>
+                <a:ea typeface="微软雅黑" panose="020B0503020204020204" charset="-122"/>
               </a:rPr>
               <a:t>乱石崩云，惊涛裂岸，卷起千堆雪。</a:t>
             </a:r>
             <a:br>
               <a:rPr lang="zh-CN" altLang="en-US" sz="2200" dirty="0">
-                <a:latin typeface="Microsoft YaHei" pitchFamily="34" charset="-122"/>
-                <a:ea typeface="Microsoft YaHei" pitchFamily="34" charset="-122"/>
+                <a:latin typeface="微软雅黑" panose="020B0503020204020204" charset="-122"/>
+                <a:ea typeface="微软雅黑" panose="020B0503020204020204" charset="-122"/>
               </a:rPr>
             </a:br>
             <a:r>
               <a:rPr lang="zh-CN" altLang="en-US" sz="2200" dirty="0">
-                <a:latin typeface="Microsoft YaHei" pitchFamily="34" charset="-122"/>
-                <a:ea typeface="Microsoft YaHei" pitchFamily="34" charset="-122"/>
+                <a:latin typeface="微软雅黑" panose="020B0503020204020204" charset="-122"/>
+                <a:ea typeface="微软雅黑" panose="020B0503020204020204" charset="-122"/>
               </a:rPr>
               <a:t>江山如画，一时多少豪杰。</a:t>
             </a:r>
             <a:br>
               <a:rPr lang="zh-CN" altLang="en-US" sz="2200" dirty="0">
-                <a:latin typeface="Microsoft YaHei" pitchFamily="34" charset="-122"/>
-                <a:ea typeface="Microsoft YaHei" pitchFamily="34" charset="-122"/>
+                <a:latin typeface="微软雅黑" panose="020B0503020204020204" charset="-122"/>
+                <a:ea typeface="微软雅黑" panose="020B0503020204020204" charset="-122"/>
               </a:rPr>
             </a:br>
             <a:br>
               <a:rPr lang="zh-CN" altLang="en-US" sz="2200" dirty="0">
-                <a:latin typeface="Microsoft YaHei" pitchFamily="34" charset="-122"/>
-                <a:ea typeface="Microsoft YaHei" pitchFamily="34" charset="-122"/>
+                <a:latin typeface="微软雅黑" panose="020B0503020204020204" charset="-122"/>
+                <a:ea typeface="微软雅黑" panose="020B0503020204020204" charset="-122"/>
               </a:rPr>
             </a:br>
             <a:r>
               <a:rPr lang="zh-CN" altLang="en-US" sz="2200" dirty="0">
-                <a:latin typeface="Microsoft YaHei" pitchFamily="34" charset="-122"/>
-                <a:ea typeface="Microsoft YaHei" pitchFamily="34" charset="-122"/>
+                <a:latin typeface="微软雅黑" panose="020B0503020204020204" charset="-122"/>
+                <a:ea typeface="微软雅黑" panose="020B0503020204020204" charset="-122"/>
               </a:rPr>
               <a:t>遥想公谨当年，小乔初嫁了。</a:t>
             </a:r>
             <a:br>
               <a:rPr lang="zh-CN" altLang="en-US" sz="2200" dirty="0">
-                <a:latin typeface="Microsoft YaHei" pitchFamily="34" charset="-122"/>
-                <a:ea typeface="Microsoft YaHei" pitchFamily="34" charset="-122"/>
+                <a:latin typeface="微软雅黑" panose="020B0503020204020204" charset="-122"/>
+                <a:ea typeface="微软雅黑" panose="020B0503020204020204" charset="-122"/>
               </a:rPr>
             </a:br>
             <a:r>
               <a:rPr lang="zh-CN" altLang="en-US" sz="2200" dirty="0">
-                <a:latin typeface="Microsoft YaHei" pitchFamily="34" charset="-122"/>
-                <a:ea typeface="Microsoft YaHei" pitchFamily="34" charset="-122"/>
+                <a:latin typeface="微软雅黑" panose="020B0503020204020204" charset="-122"/>
+                <a:ea typeface="微软雅黑" panose="020B0503020204020204" charset="-122"/>
               </a:rPr>
               <a:t>羽扇纶巾，谈笑间，樯橹灰飞烟灭。</a:t>
             </a:r>
             <a:br>
               <a:rPr lang="zh-CN" altLang="en-US" sz="2200" dirty="0">
-                <a:latin typeface="Microsoft YaHei" pitchFamily="34" charset="-122"/>
-                <a:ea typeface="Microsoft YaHei" pitchFamily="34" charset="-122"/>
+                <a:latin typeface="微软雅黑" panose="020B0503020204020204" charset="-122"/>
+                <a:ea typeface="微软雅黑" panose="020B0503020204020204" charset="-122"/>
               </a:rPr>
             </a:br>
             <a:r>
               <a:rPr lang="zh-CN" altLang="en-US" sz="2200" dirty="0">
-                <a:latin typeface="Microsoft YaHei" pitchFamily="34" charset="-122"/>
-                <a:ea typeface="Microsoft YaHei" pitchFamily="34" charset="-122"/>
+                <a:latin typeface="微软雅黑" panose="020B0503020204020204" charset="-122"/>
+                <a:ea typeface="微软雅黑" panose="020B0503020204020204" charset="-122"/>
               </a:rPr>
               <a:t>故国神游，多情应笑我，早生华发。</a:t>
             </a:r>
             <a:br>
               <a:rPr lang="zh-CN" altLang="en-US" sz="2200" dirty="0">
-                <a:latin typeface="Microsoft YaHei" pitchFamily="34" charset="-122"/>
-                <a:ea typeface="Microsoft YaHei" pitchFamily="34" charset="-122"/>
+                <a:latin typeface="微软雅黑" panose="020B0503020204020204" charset="-122"/>
+                <a:ea typeface="微软雅黑" panose="020B0503020204020204" charset="-122"/>
               </a:rPr>
             </a:br>
             <a:r>
               <a:rPr lang="zh-CN" altLang="en-US" sz="2200" dirty="0">
-                <a:latin typeface="Microsoft YaHei" pitchFamily="34" charset="-122"/>
-                <a:ea typeface="Microsoft YaHei" pitchFamily="34" charset="-122"/>
+                <a:latin typeface="微软雅黑" panose="020B0503020204020204" charset="-122"/>
+                <a:ea typeface="微软雅黑" panose="020B0503020204020204" charset="-122"/>
               </a:rPr>
               <a:t>人生如梦，一樽还酹江月。</a:t>
             </a:r>
             <a:endParaRPr lang="en-US" altLang="zh-CN" sz="2200" dirty="0">
-              <a:latin typeface="Microsoft YaHei" pitchFamily="34" charset="-122"/>
-              <a:ea typeface="Microsoft YaHei" pitchFamily="34" charset="-122"/>
+              <a:latin typeface="微软雅黑" panose="020B0503020204020204" charset="-122"/>
+              <a:ea typeface="微软雅黑" panose="020B0503020204020204" charset="-122"/>
             </a:endParaRPr>
           </a:p>
           <a:p>
@@ -10959,6 +10379,7 @@
               <a:rPr lang="en-US" altLang="zh-CN" sz="2200" dirty="0"/>
               <a:t>-----------------</a:t>
             </a:r>
+            <a:endParaRPr lang="en-US" altLang="zh-CN" sz="2200" dirty="0"/>
           </a:p>
           <a:p>
             <a:pPr>
@@ -10984,6 +10405,7 @@
               <a:rPr lang="en-US" altLang="zh-CN" sz="2200" dirty="0"/>
               <a:t>-----------------</a:t>
             </a:r>
+            <a:endParaRPr lang="en-US" altLang="zh-CN" sz="2200" dirty="0"/>
           </a:p>
           <a:p>
             <a:pPr>
@@ -11419,187 +10841,188 @@
               <a:rPr lang="en-US" altLang="zh-CN" dirty="0"/>
               <a:t>Which role is corresponding to software engineer?</a:t>
             </a:r>
+            <a:endParaRPr lang="en-US" altLang="zh-CN" dirty="0"/>
           </a:p>
           <a:p>
             <a:pPr lvl="1"/>
             <a:r>
               <a:rPr lang="zh-CN" altLang="en-US" dirty="0">
-                <a:latin typeface="Microsoft YaHei" pitchFamily="34" charset="-122"/>
-                <a:ea typeface="Microsoft YaHei" pitchFamily="34" charset="-122"/>
+                <a:latin typeface="微软雅黑" panose="020B0503020204020204" charset="-122"/>
+                <a:ea typeface="微软雅黑" panose="020B0503020204020204" charset="-122"/>
               </a:rPr>
               <a:t>房地产老板</a:t>
             </a:r>
             <a:endParaRPr lang="en-US" altLang="zh-CN" dirty="0">
-              <a:latin typeface="Microsoft YaHei" pitchFamily="34" charset="-122"/>
-              <a:ea typeface="Microsoft YaHei" pitchFamily="34" charset="-122"/>
+              <a:latin typeface="微软雅黑" panose="020B0503020204020204" charset="-122"/>
+              <a:ea typeface="微软雅黑" panose="020B0503020204020204" charset="-122"/>
             </a:endParaRPr>
           </a:p>
           <a:p>
             <a:pPr lvl="2"/>
             <a:r>
               <a:rPr lang="zh-CN" altLang="en-US" dirty="0">
-                <a:latin typeface="Microsoft YaHei" pitchFamily="34" charset="-122"/>
-                <a:ea typeface="Microsoft YaHei" pitchFamily="34" charset="-122"/>
+                <a:latin typeface="微软雅黑" panose="020B0503020204020204" charset="-122"/>
+                <a:ea typeface="微软雅黑" panose="020B0503020204020204" charset="-122"/>
               </a:rPr>
               <a:t>投标，买地</a:t>
             </a:r>
             <a:endParaRPr lang="en-US" altLang="zh-CN" dirty="0">
-              <a:latin typeface="Microsoft YaHei" pitchFamily="34" charset="-122"/>
-              <a:ea typeface="Microsoft YaHei" pitchFamily="34" charset="-122"/>
+              <a:latin typeface="微软雅黑" panose="020B0503020204020204" charset="-122"/>
+              <a:ea typeface="微软雅黑" panose="020B0503020204020204" charset="-122"/>
             </a:endParaRPr>
           </a:p>
           <a:p>
             <a:pPr lvl="1"/>
             <a:r>
               <a:rPr lang="zh-CN" altLang="en-US" dirty="0">
-                <a:latin typeface="Microsoft YaHei" pitchFamily="34" charset="-122"/>
-                <a:ea typeface="Microsoft YaHei" pitchFamily="34" charset="-122"/>
+                <a:latin typeface="微软雅黑" panose="020B0503020204020204" charset="-122"/>
+                <a:ea typeface="微软雅黑" panose="020B0503020204020204" charset="-122"/>
               </a:rPr>
               <a:t>建筑设计师</a:t>
             </a:r>
             <a:endParaRPr lang="en-US" altLang="zh-CN" dirty="0">
-              <a:latin typeface="Microsoft YaHei" pitchFamily="34" charset="-122"/>
-              <a:ea typeface="Microsoft YaHei" pitchFamily="34" charset="-122"/>
+              <a:latin typeface="微软雅黑" panose="020B0503020204020204" charset="-122"/>
+              <a:ea typeface="微软雅黑" panose="020B0503020204020204" charset="-122"/>
             </a:endParaRPr>
           </a:p>
           <a:p>
             <a:pPr lvl="2"/>
             <a:r>
               <a:rPr lang="zh-CN" altLang="en-US" dirty="0">
-                <a:latin typeface="Microsoft YaHei" pitchFamily="34" charset="-122"/>
-                <a:ea typeface="Microsoft YaHei" pitchFamily="34" charset="-122"/>
+                <a:latin typeface="微软雅黑" panose="020B0503020204020204" charset="-122"/>
+                <a:ea typeface="微软雅黑" panose="020B0503020204020204" charset="-122"/>
               </a:rPr>
               <a:t>设计建筑</a:t>
             </a:r>
             <a:endParaRPr lang="en-US" altLang="zh-CN" dirty="0">
-              <a:latin typeface="Microsoft YaHei" pitchFamily="34" charset="-122"/>
-              <a:ea typeface="Microsoft YaHei" pitchFamily="34" charset="-122"/>
+              <a:latin typeface="微软雅黑" panose="020B0503020204020204" charset="-122"/>
+              <a:ea typeface="微软雅黑" panose="020B0503020204020204" charset="-122"/>
             </a:endParaRPr>
           </a:p>
           <a:p>
             <a:pPr lvl="1"/>
             <a:r>
               <a:rPr lang="zh-CN" altLang="en-US" dirty="0">
-                <a:latin typeface="Microsoft YaHei" pitchFamily="34" charset="-122"/>
-                <a:ea typeface="Microsoft YaHei" pitchFamily="34" charset="-122"/>
+                <a:latin typeface="微软雅黑" panose="020B0503020204020204" charset="-122"/>
+                <a:ea typeface="微软雅黑" panose="020B0503020204020204" charset="-122"/>
               </a:rPr>
               <a:t>土木工程师</a:t>
             </a:r>
             <a:endParaRPr lang="en-US" altLang="zh-CN" dirty="0">
-              <a:latin typeface="Microsoft YaHei" pitchFamily="34" charset="-122"/>
-              <a:ea typeface="Microsoft YaHei" pitchFamily="34" charset="-122"/>
+              <a:latin typeface="微软雅黑" panose="020B0503020204020204" charset="-122"/>
+              <a:ea typeface="微软雅黑" panose="020B0503020204020204" charset="-122"/>
             </a:endParaRPr>
           </a:p>
           <a:p>
             <a:pPr lvl="2"/>
             <a:r>
               <a:rPr lang="zh-CN" altLang="en-US" dirty="0">
-                <a:latin typeface="Microsoft YaHei" pitchFamily="34" charset="-122"/>
-                <a:ea typeface="Microsoft YaHei" pitchFamily="34" charset="-122"/>
+                <a:latin typeface="微软雅黑" panose="020B0503020204020204" charset="-122"/>
+                <a:ea typeface="微软雅黑" panose="020B0503020204020204" charset="-122"/>
               </a:rPr>
               <a:t>设计土木结构</a:t>
             </a:r>
             <a:endParaRPr lang="en-US" altLang="zh-CN" dirty="0">
-              <a:latin typeface="Microsoft YaHei" pitchFamily="34" charset="-122"/>
-              <a:ea typeface="Microsoft YaHei" pitchFamily="34" charset="-122"/>
+              <a:latin typeface="微软雅黑" panose="020B0503020204020204" charset="-122"/>
+              <a:ea typeface="微软雅黑" panose="020B0503020204020204" charset="-122"/>
             </a:endParaRPr>
           </a:p>
           <a:p>
             <a:pPr lvl="1"/>
             <a:r>
               <a:rPr lang="zh-CN" altLang="en-US" dirty="0">
-                <a:latin typeface="Microsoft YaHei" pitchFamily="34" charset="-122"/>
-                <a:ea typeface="Microsoft YaHei" pitchFamily="34" charset="-122"/>
+                <a:latin typeface="微软雅黑" panose="020B0503020204020204" charset="-122"/>
+                <a:ea typeface="微软雅黑" panose="020B0503020204020204" charset="-122"/>
               </a:rPr>
               <a:t>建筑工人</a:t>
             </a:r>
             <a:endParaRPr lang="en-US" altLang="zh-CN" dirty="0">
-              <a:latin typeface="Microsoft YaHei" pitchFamily="34" charset="-122"/>
-              <a:ea typeface="Microsoft YaHei" pitchFamily="34" charset="-122"/>
+              <a:latin typeface="微软雅黑" panose="020B0503020204020204" charset="-122"/>
+              <a:ea typeface="微软雅黑" panose="020B0503020204020204" charset="-122"/>
             </a:endParaRPr>
           </a:p>
           <a:p>
             <a:pPr lvl="2"/>
             <a:r>
               <a:rPr lang="zh-CN" altLang="en-US" dirty="0">
-                <a:latin typeface="Microsoft YaHei" pitchFamily="34" charset="-122"/>
-                <a:ea typeface="Microsoft YaHei" pitchFamily="34" charset="-122"/>
+                <a:latin typeface="微软雅黑" panose="020B0503020204020204" charset="-122"/>
+                <a:ea typeface="微软雅黑" panose="020B0503020204020204" charset="-122"/>
               </a:rPr>
               <a:t>具体建设</a:t>
             </a:r>
             <a:endParaRPr lang="en-US" altLang="zh-CN" dirty="0">
-              <a:latin typeface="Microsoft YaHei" pitchFamily="34" charset="-122"/>
-              <a:ea typeface="Microsoft YaHei" pitchFamily="34" charset="-122"/>
+              <a:latin typeface="微软雅黑" panose="020B0503020204020204" charset="-122"/>
+              <a:ea typeface="微软雅黑" panose="020B0503020204020204" charset="-122"/>
             </a:endParaRPr>
           </a:p>
           <a:p>
             <a:pPr lvl="1"/>
             <a:r>
               <a:rPr lang="zh-CN" altLang="en-US" dirty="0">
-                <a:latin typeface="Microsoft YaHei" pitchFamily="34" charset="-122"/>
-                <a:ea typeface="Microsoft YaHei" pitchFamily="34" charset="-122"/>
+                <a:latin typeface="微软雅黑" panose="020B0503020204020204" charset="-122"/>
+                <a:ea typeface="微软雅黑" panose="020B0503020204020204" charset="-122"/>
               </a:rPr>
               <a:t>工程监理</a:t>
             </a:r>
             <a:endParaRPr lang="en-US" altLang="zh-CN" dirty="0">
-              <a:latin typeface="Microsoft YaHei" pitchFamily="34" charset="-122"/>
-              <a:ea typeface="Microsoft YaHei" pitchFamily="34" charset="-122"/>
+              <a:latin typeface="微软雅黑" panose="020B0503020204020204" charset="-122"/>
+              <a:ea typeface="微软雅黑" panose="020B0503020204020204" charset="-122"/>
             </a:endParaRPr>
           </a:p>
           <a:p>
             <a:pPr lvl="2"/>
             <a:r>
               <a:rPr lang="zh-CN" altLang="en-US" dirty="0">
-                <a:latin typeface="Microsoft YaHei" pitchFamily="34" charset="-122"/>
-                <a:ea typeface="Microsoft YaHei" pitchFamily="34" charset="-122"/>
+                <a:latin typeface="微软雅黑" panose="020B0503020204020204" charset="-122"/>
+                <a:ea typeface="微软雅黑" panose="020B0503020204020204" charset="-122"/>
               </a:rPr>
               <a:t>监管质量</a:t>
             </a:r>
             <a:endParaRPr lang="en-US" altLang="zh-CN" dirty="0">
-              <a:latin typeface="Microsoft YaHei" pitchFamily="34" charset="-122"/>
-              <a:ea typeface="Microsoft YaHei" pitchFamily="34" charset="-122"/>
+              <a:latin typeface="微软雅黑" panose="020B0503020204020204" charset="-122"/>
+              <a:ea typeface="微软雅黑" panose="020B0503020204020204" charset="-122"/>
             </a:endParaRPr>
           </a:p>
           <a:p>
             <a:pPr lvl="1"/>
             <a:r>
               <a:rPr lang="zh-CN" altLang="en-US" dirty="0">
-                <a:latin typeface="Microsoft YaHei" pitchFamily="34" charset="-122"/>
-                <a:ea typeface="Microsoft YaHei" pitchFamily="34" charset="-122"/>
+                <a:latin typeface="微软雅黑" panose="020B0503020204020204" charset="-122"/>
+                <a:ea typeface="微软雅黑" panose="020B0503020204020204" charset="-122"/>
               </a:rPr>
               <a:t>装修工人</a:t>
             </a:r>
             <a:endParaRPr lang="en-US" altLang="zh-CN" dirty="0">
-              <a:latin typeface="Microsoft YaHei" pitchFamily="34" charset="-122"/>
-              <a:ea typeface="Microsoft YaHei" pitchFamily="34" charset="-122"/>
+              <a:latin typeface="微软雅黑" panose="020B0503020204020204" charset="-122"/>
+              <a:ea typeface="微软雅黑" panose="020B0503020204020204" charset="-122"/>
             </a:endParaRPr>
           </a:p>
           <a:p>
             <a:pPr lvl="1"/>
             <a:r>
               <a:rPr lang="zh-CN" altLang="en-US" dirty="0">
-                <a:latin typeface="Microsoft YaHei" pitchFamily="34" charset="-122"/>
-                <a:ea typeface="Microsoft YaHei" pitchFamily="34" charset="-122"/>
+                <a:latin typeface="微软雅黑" panose="020B0503020204020204" charset="-122"/>
+                <a:ea typeface="微软雅黑" panose="020B0503020204020204" charset="-122"/>
               </a:rPr>
               <a:t>楼房销售</a:t>
             </a:r>
             <a:endParaRPr lang="en-US" altLang="zh-CN" dirty="0">
-              <a:latin typeface="Microsoft YaHei" pitchFamily="34" charset="-122"/>
-              <a:ea typeface="Microsoft YaHei" pitchFamily="34" charset="-122"/>
+              <a:latin typeface="微软雅黑" panose="020B0503020204020204" charset="-122"/>
+              <a:ea typeface="微软雅黑" panose="020B0503020204020204" charset="-122"/>
             </a:endParaRPr>
           </a:p>
           <a:p>
             <a:pPr lvl="1"/>
             <a:r>
               <a:rPr lang="zh-CN" altLang="en-US" dirty="0">
-                <a:latin typeface="Microsoft YaHei" pitchFamily="34" charset="-122"/>
-                <a:ea typeface="Microsoft YaHei" pitchFamily="34" charset="-122"/>
+                <a:latin typeface="微软雅黑" panose="020B0503020204020204" charset="-122"/>
+                <a:ea typeface="微软雅黑" panose="020B0503020204020204" charset="-122"/>
               </a:rPr>
               <a:t>楼房中介</a:t>
             </a:r>
             <a:endParaRPr lang="en-US" altLang="zh-CN" dirty="0">
-              <a:latin typeface="Microsoft YaHei" pitchFamily="34" charset="-122"/>
-              <a:ea typeface="Microsoft YaHei" pitchFamily="34" charset="-122"/>
+              <a:latin typeface="微软雅黑" panose="020B0503020204020204" charset="-122"/>
+              <a:ea typeface="微软雅黑" panose="020B0503020204020204" charset="-122"/>
             </a:endParaRPr>
           </a:p>
           <a:p>
@@ -11608,8 +11031,8 @@
               <a:t>Should software engineering include elements of art?</a:t>
             </a:r>
             <a:endParaRPr lang="en-US" altLang="zh-CN" dirty="0">
-              <a:latin typeface="Microsoft YaHei" pitchFamily="34" charset="-122"/>
-              <a:ea typeface="Microsoft YaHei" pitchFamily="34" charset="-122"/>
+              <a:latin typeface="微软雅黑" panose="020B0503020204020204" charset="-122"/>
+              <a:ea typeface="微软雅黑" panose="020B0503020204020204" charset="-122"/>
             </a:endParaRPr>
           </a:p>
         </p:txBody>
@@ -11691,6 +11114,7 @@
               <a:rPr lang="en-US" altLang="zh-CN" dirty="0"/>
               <a:t> </a:t>
             </a:r>
+            <a:endParaRPr lang="en-US" altLang="zh-CN" dirty="0"/>
           </a:p>
           <a:p>
             <a:r>
@@ -12796,6 +12220,7 @@
               <a:rPr lang="en-US" dirty="0"/>
               <a:t>The Pragmatic Approach</a:t>
             </a:r>
+            <a:endParaRPr lang="en-US" dirty="0"/>
           </a:p>
         </p:txBody>
       </p:sp>
@@ -12857,18 +12282,21 @@
               <a:rPr lang="en-US" sz="1800" dirty="0"/>
               <a:t> </a:t>
             </a:r>
+            <a:endParaRPr lang="en-US" sz="1800" dirty="0"/>
           </a:p>
           <a:p>
             <a:r>
               <a:rPr lang="en-US" sz="2000" dirty="0"/>
               <a:t>How does TPP guide engineer in:</a:t>
             </a:r>
+            <a:endParaRPr lang="en-US" sz="2000" dirty="0"/>
           </a:p>
           <a:p>
             <a:r>
               <a:rPr lang="en-US" sz="2000" dirty="0"/>
               <a:t>Planning</a:t>
             </a:r>
+            <a:endParaRPr lang="en-US" sz="2000" dirty="0"/>
           </a:p>
           <a:p>
             <a:r>
@@ -12879,6 +12307,7 @@
               <a:rPr lang="en-US" sz="2000" dirty="0"/>
               <a:t>evelopment </a:t>
             </a:r>
+            <a:endParaRPr lang="en-US" sz="2000" dirty="0"/>
           </a:p>
           <a:p>
             <a:pPr lvl="1"/>
@@ -12890,34 +12319,37 @@
               <a:rPr lang="en-US" sz="1800" dirty="0"/>
               <a:t>esign, </a:t>
             </a:r>
-          </a:p>
-          <a:p>
-            <a:pPr marL="887412" lvl="3" indent="-255588">
+            <a:endParaRPr lang="en-US" sz="1800" dirty="0"/>
+          </a:p>
+          <a:p>
+            <a:pPr marL="887095" lvl="3" indent="-255905">
               <a:spcBef>
                 <a:spcPts val="400"/>
               </a:spcBef>
               <a:buSzPct val="68000"/>
-              <a:buFont typeface="Wingdings 3" pitchFamily="18" charset="2"/>
+              <a:buFont typeface="Wingdings 3" panose="05040102010807070707" pitchFamily="18" charset="2"/>
               <a:buChar char=""/>
             </a:pPr>
             <a:r>
               <a:rPr lang="en-US" dirty="0"/>
               <a:t>design review and code review</a:t>
             </a:r>
-          </a:p>
-          <a:p>
-            <a:pPr marL="887412" lvl="3" indent="-255588">
+            <a:endParaRPr lang="en-US" dirty="0"/>
+          </a:p>
+          <a:p>
+            <a:pPr marL="887095" lvl="3" indent="-255905">
               <a:spcBef>
                 <a:spcPts val="400"/>
               </a:spcBef>
               <a:buSzPct val="68000"/>
-              <a:buFont typeface="Wingdings 3" pitchFamily="18" charset="2"/>
+              <a:buFont typeface="Wingdings 3" panose="05040102010807070707" pitchFamily="18" charset="2"/>
               <a:buChar char=""/>
             </a:pPr>
             <a:r>
               <a:rPr lang="en-US" dirty="0"/>
               <a:t>coding standard</a:t>
             </a:r>
+            <a:endParaRPr lang="en-US" dirty="0"/>
           </a:p>
           <a:p>
             <a:pPr lvl="1"/>
@@ -12925,6 +12357,7 @@
               <a:rPr lang="en-US" sz="1800" dirty="0"/>
               <a:t>Coding</a:t>
             </a:r>
+            <a:endParaRPr lang="en-US" sz="1800" dirty="0"/>
           </a:p>
           <a:p>
             <a:pPr lvl="2"/>
@@ -12944,6 +12377,7 @@
               <a:rPr lang="en-US" sz="1800" dirty="0"/>
               <a:t>est </a:t>
             </a:r>
+            <a:endParaRPr lang="en-US" sz="1800" dirty="0"/>
           </a:p>
           <a:p>
             <a:r>
@@ -12954,6 +12388,7 @@
               <a:rPr lang="en-US" sz="2000" dirty="0"/>
               <a:t>ostmortem</a:t>
             </a:r>
+            <a:endParaRPr lang="en-US" sz="2000" dirty="0"/>
           </a:p>
         </p:txBody>
       </p:sp>
@@ -12966,7 +12401,7 @@
           <p:nvPr/>
         </p:nvPicPr>
         <p:blipFill>
-          <a:blip r:embed="rId2">
+          <a:blip r:embed="rId1">
             <a:extLst>
               <a:ext uri="{28A0092B-C50C-407E-A947-70E740481C1C}">
                 <a14:useLocalDpi xmlns:a14="http://schemas.microsoft.com/office/drawing/2010/main" val="0"/>
@@ -13089,7 +12524,7 @@
           </a:bodyPr>
           <a:lstStyle/>
           <a:p>
-            <a:pPr marL="4763" indent="-4763">
+            <a:pPr marL="5080" indent="-5080">
               <a:buClr>
                 <a:schemeClr val="accent3"/>
               </a:buClr>
@@ -13123,6 +12558,7 @@
               <a:rPr lang="en-US" dirty="0"/>
               <a:t>Personal Software Process</a:t>
             </a:r>
+            <a:endParaRPr lang="en-US" dirty="0"/>
           </a:p>
           <a:p>
             <a:pPr>
@@ -13166,6 +12602,7 @@
               <a:rPr lang="en-US" dirty="0"/>
               <a:t>Team Software Process</a:t>
             </a:r>
+            <a:endParaRPr lang="en-US" dirty="0"/>
           </a:p>
           <a:p>
             <a:pPr>
@@ -13191,7 +12628,7 @@
           <p:nvPr/>
         </p:nvPicPr>
         <p:blipFill>
-          <a:blip r:embed="rId3" cstate="print"/>
+          <a:blip r:embed="rId1" cstate="print"/>
           <a:srcRect/>
           <a:stretch>
             <a:fillRect/>
@@ -13217,7 +12654,7 @@
           <p:nvPr/>
         </p:nvPicPr>
         <p:blipFill>
-          <a:blip r:embed="rId4" cstate="print"/>
+          <a:blip r:embed="rId2" cstate="print"/>
           <a:srcRect/>
           <a:stretch>
             <a:fillRect/>
@@ -13827,13 +13264,7 @@
           <p:cNvGraphicFramePr>
             <a:graphicFrameLocks noGrp="1"/>
           </p:cNvGraphicFramePr>
-          <p:nvPr>
-            <p:extLst>
-              <p:ext uri="{D42A27DB-BD31-4B8C-83A1-F6EECF244321}">
-                <p14:modId xmlns:p14="http://schemas.microsoft.com/office/powerpoint/2010/main" val="746464362"/>
-              </p:ext>
-            </p:extLst>
-          </p:nvPr>
+          <p:nvPr/>
         </p:nvGraphicFramePr>
         <p:xfrm>
           <a:off x="2514600" y="3997180"/>
@@ -13846,41 +13277,11 @@
                 <a:tableStyleId>{5C22544A-7EE6-4342-B048-85BDC9FD1C3A}</a:tableStyleId>
               </a:tblPr>
               <a:tblGrid>
-                <a:gridCol w="1417320">
-                  <a:extLst>
-                    <a:ext uri="{9D8B030D-6E8A-4147-A177-3AD203B41FA5}">
-                      <a16:colId xmlns:a16="http://schemas.microsoft.com/office/drawing/2014/main" val="20000"/>
-                    </a:ext>
-                  </a:extLst>
-                </a:gridCol>
-                <a:gridCol w="1417320">
-                  <a:extLst>
-                    <a:ext uri="{9D8B030D-6E8A-4147-A177-3AD203B41FA5}">
-                      <a16:colId xmlns:a16="http://schemas.microsoft.com/office/drawing/2014/main" val="20001"/>
-                    </a:ext>
-                  </a:extLst>
-                </a:gridCol>
-                <a:gridCol w="1417320">
-                  <a:extLst>
-                    <a:ext uri="{9D8B030D-6E8A-4147-A177-3AD203B41FA5}">
-                      <a16:colId xmlns:a16="http://schemas.microsoft.com/office/drawing/2014/main" val="20002"/>
-                    </a:ext>
-                  </a:extLst>
-                </a:gridCol>
-                <a:gridCol w="1417320">
-                  <a:extLst>
-                    <a:ext uri="{9D8B030D-6E8A-4147-A177-3AD203B41FA5}">
-                      <a16:colId xmlns:a16="http://schemas.microsoft.com/office/drawing/2014/main" val="20003"/>
-                    </a:ext>
-                  </a:extLst>
-                </a:gridCol>
-                <a:gridCol w="1417320">
-                  <a:extLst>
-                    <a:ext uri="{9D8B030D-6E8A-4147-A177-3AD203B41FA5}">
-                      <a16:colId xmlns:a16="http://schemas.microsoft.com/office/drawing/2014/main" val="20004"/>
-                    </a:ext>
-                  </a:extLst>
-                </a:gridCol>
+                <a:gridCol w="1417320"/>
+                <a:gridCol w="1417320"/>
+                <a:gridCol w="1417320"/>
+                <a:gridCol w="1417320"/>
+                <a:gridCol w="1417320"/>
               </a:tblGrid>
               <a:tr h="517381">
                 <a:tc>
@@ -13892,6 +13293,7 @@
                         <a:rPr lang="en-US" sz="1600" dirty="0"/>
                         <a:t>Assignment</a:t>
                       </a:r>
+                      <a:endParaRPr lang="en-US" sz="1600" dirty="0"/>
                     </a:p>
                   </a:txBody>
                   <a:tcPr/>
@@ -13905,6 +13307,7 @@
                         <a:rPr lang="en-US" sz="1600" dirty="0"/>
                         <a:t>Al’s estimation</a:t>
                       </a:r>
+                      <a:endParaRPr lang="en-US" sz="1600" dirty="0"/>
                     </a:p>
                   </a:txBody>
                   <a:tcPr/>
@@ -13918,6 +13321,7 @@
                         <a:rPr lang="en-US" sz="1600" dirty="0"/>
                         <a:t>Al’s delivery</a:t>
                       </a:r>
+                      <a:endParaRPr lang="en-US" sz="1600" dirty="0"/>
                     </a:p>
                   </a:txBody>
                   <a:tcPr/>
@@ -13931,6 +13335,7 @@
                         <a:rPr lang="en-US" sz="1600" dirty="0"/>
                         <a:t>Bob’s estimation</a:t>
                       </a:r>
+                      <a:endParaRPr lang="en-US" sz="1600" dirty="0"/>
                     </a:p>
                   </a:txBody>
                   <a:tcPr/>
@@ -13944,15 +13349,11 @@
                         <a:rPr lang="en-US" sz="1600" dirty="0"/>
                         <a:t>Bob’s delivery</a:t>
                       </a:r>
+                      <a:endParaRPr lang="en-US" sz="1600" dirty="0"/>
                     </a:p>
                   </a:txBody>
                   <a:tcPr/>
                 </a:tc>
-                <a:extLst>
-                  <a:ext uri="{0D108BD9-81ED-4DB2-BD59-A6C34878D82A}">
-                    <a16:rowId xmlns:a16="http://schemas.microsoft.com/office/drawing/2014/main" val="10000"/>
-                  </a:ext>
-                </a:extLst>
               </a:tr>
               <a:tr h="513275">
                 <a:tc>
@@ -14018,6 +13419,7 @@
                         <a:rPr lang="en-US" dirty="0"/>
                         <a:t>10 day</a:t>
                       </a:r>
+                      <a:endParaRPr lang="en-US" dirty="0"/>
                     </a:p>
                   </a:txBody>
                   <a:tcPr/>
@@ -14040,11 +13442,6 @@
                   </a:txBody>
                   <a:tcPr/>
                 </a:tc>
-                <a:extLst>
-                  <a:ext uri="{0D108BD9-81ED-4DB2-BD59-A6C34878D82A}">
-                    <a16:rowId xmlns:a16="http://schemas.microsoft.com/office/drawing/2014/main" val="10001"/>
-                  </a:ext>
-                </a:extLst>
               </a:tr>
               <a:tr h="513275">
                 <a:tc>
@@ -14056,6 +13453,7 @@
                         <a:rPr lang="en-US" dirty="0"/>
                         <a:t>4,5,6</a:t>
                       </a:r>
+                      <a:endParaRPr lang="en-US" dirty="0"/>
                     </a:p>
                   </a:txBody>
                   <a:tcPr/>
@@ -14087,6 +13485,7 @@
                         <a:rPr lang="en-US" dirty="0"/>
                         <a:t>1, 9, 11</a:t>
                       </a:r>
+                      <a:endParaRPr lang="en-US" dirty="0"/>
                     </a:p>
                   </a:txBody>
                   <a:tcPr/>
@@ -14118,15 +13517,11 @@
                         <a:rPr lang="en-US" dirty="0"/>
                         <a:t>7,8,9</a:t>
                       </a:r>
+                      <a:endParaRPr lang="en-US" dirty="0"/>
                     </a:p>
                   </a:txBody>
                   <a:tcPr/>
                 </a:tc>
-                <a:extLst>
-                  <a:ext uri="{0D108BD9-81ED-4DB2-BD59-A6C34878D82A}">
-                    <a16:rowId xmlns:a16="http://schemas.microsoft.com/office/drawing/2014/main" val="10002"/>
-                  </a:ext>
-                </a:extLst>
               </a:tr>
               <a:tr h="513275">
                 <a:tc>
@@ -14158,6 +13553,7 @@
                         <a:rPr lang="en-US" dirty="0"/>
                         <a:t>Average = 7</a:t>
                       </a:r>
+                      <a:endParaRPr lang="en-US" dirty="0"/>
                     </a:p>
                   </a:txBody>
                   <a:tcPr/>
@@ -14181,15 +13577,11 @@
                         <a:rPr lang="en-US" dirty="0"/>
                         <a:t>Average=8</a:t>
                       </a:r>
+                      <a:endParaRPr lang="en-US" dirty="0"/>
                     </a:p>
                   </a:txBody>
                   <a:tcPr/>
                 </a:tc>
-                <a:extLst>
-                  <a:ext uri="{0D108BD9-81ED-4DB2-BD59-A6C34878D82A}">
-                    <a16:rowId xmlns:a16="http://schemas.microsoft.com/office/drawing/2014/main" val="10003"/>
-                  </a:ext>
-                </a:extLst>
               </a:tr>
               <a:tr h="513275">
                 <a:tc>
@@ -14225,6 +13617,7 @@
                         <a:rPr lang="en-US" dirty="0"/>
                         <a:t>=5.3</a:t>
                       </a:r>
+                      <a:endParaRPr lang="en-US" dirty="0"/>
                     </a:p>
                   </a:txBody>
                   <a:tcPr/>
@@ -14252,15 +13645,11 @@
                         <a:rPr lang="en-US" dirty="0"/>
                         <a:t>=1</a:t>
                       </a:r>
+                      <a:endParaRPr lang="en-US" dirty="0"/>
                     </a:p>
                   </a:txBody>
                   <a:tcPr/>
                 </a:tc>
-                <a:extLst>
-                  <a:ext uri="{0D108BD9-81ED-4DB2-BD59-A6C34878D82A}">
-                    <a16:rowId xmlns:a16="http://schemas.microsoft.com/office/drawing/2014/main" val="10004"/>
-                  </a:ext>
-                </a:extLst>
               </a:tr>
             </a:tbl>
           </a:graphicData>
@@ -14607,13 +13996,14 @@
           <a:bodyPr/>
           <a:lstStyle/>
           <a:p>
-            <a:pPr marL="118872" indent="0">
+            <a:pPr marL="118745" indent="0">
               <a:buNone/>
             </a:pPr>
             <a:r>
               <a:rPr lang="en-US" i="1" dirty="0"/>
               <a:t>Standard deviation is key to the quality of service, and key to build trust.   </a:t>
             </a:r>
+            <a:endParaRPr lang="en-US" i="1" dirty="0"/>
           </a:p>
           <a:p>
             <a:pPr marL="274320" lvl="1" indent="0">
@@ -14623,12 +14013,14 @@
               <a:rPr lang="en-US" altLang="zh-CN" dirty="0"/>
               <a:t>		- Jack Welch</a:t>
             </a:r>
+            <a:endParaRPr lang="en-US" altLang="zh-CN" dirty="0"/>
           </a:p>
           <a:p>
             <a:r>
               <a:rPr lang="en-US" altLang="zh-CN" dirty="0"/>
               <a:t>Estimation/Promise  vs.  Delivery</a:t>
             </a:r>
+            <a:endParaRPr lang="en-US" altLang="zh-CN" dirty="0"/>
           </a:p>
           <a:p>
             <a:r>
@@ -14672,13 +14064,7 @@
       </p:grpSpPr>
       <p:sp>
         <p:nvSpPr>
-          <p:cNvPr id="2" name="Title 1">
-            <a:extLst>
-              <a:ext uri="{FF2B5EF4-FFF2-40B4-BE49-F238E27FC236}">
-                <a16:creationId xmlns:a16="http://schemas.microsoft.com/office/drawing/2014/main" id="{847B9925-DD12-440D-8933-ED9C696D74D2}"/>
-              </a:ext>
-            </a:extLst>
-          </p:cNvPr>
+          <p:cNvPr id="2" name="Title 1"/>
           <p:cNvSpPr>
             <a:spLocks noGrp="1"/>
           </p:cNvSpPr>
@@ -14701,13 +14087,7 @@
       </p:sp>
       <p:pic>
         <p:nvPicPr>
-          <p:cNvPr id="4" name="Content Placeholder 3">
-            <a:extLst>
-              <a:ext uri="{FF2B5EF4-FFF2-40B4-BE49-F238E27FC236}">
-                <a16:creationId xmlns:a16="http://schemas.microsoft.com/office/drawing/2014/main" id="{A6753D51-0347-49BA-B950-1932ED6F1AAF}"/>
-              </a:ext>
-            </a:extLst>
-          </p:cNvPr>
+          <p:cNvPr id="4" name="Content Placeholder 3"/>
           <p:cNvPicPr>
             <a:picLocks noGrp="1" noChangeAspect="1"/>
           </p:cNvPicPr>
@@ -14716,7 +14096,7 @@
           </p:nvPr>
         </p:nvPicPr>
         <p:blipFill>
-          <a:blip r:embed="rId2"/>
+          <a:blip r:embed="rId1"/>
           <a:stretch>
             <a:fillRect/>
           </a:stretch>
@@ -14732,11 +14112,6 @@
         </p:spPr>
       </p:pic>
     </p:spTree>
-    <p:extLst>
-      <p:ext uri="{BB962C8B-B14F-4D97-AF65-F5344CB8AC3E}">
-        <p14:creationId xmlns:p14="http://schemas.microsoft.com/office/powerpoint/2010/main" val="961310438"/>
-      </p:ext>
-    </p:extLst>
   </p:cSld>
   <p:clrMapOvr>
     <a:masterClrMapping/>
@@ -14763,13 +14138,7 @@
       </p:grpSpPr>
       <p:sp>
         <p:nvSpPr>
-          <p:cNvPr id="2" name="Title 1">
-            <a:extLst>
-              <a:ext uri="{FF2B5EF4-FFF2-40B4-BE49-F238E27FC236}">
-                <a16:creationId xmlns:a16="http://schemas.microsoft.com/office/drawing/2014/main" id="{341A175D-6F43-4530-B64F-FCADB81EBA81}"/>
-              </a:ext>
-            </a:extLst>
-          </p:cNvPr>
+          <p:cNvPr id="2" name="Title 1"/>
           <p:cNvSpPr>
             <a:spLocks noGrp="1"/>
           </p:cNvSpPr>
@@ -14792,13 +14161,7 @@
       </p:sp>
       <p:sp>
         <p:nvSpPr>
-          <p:cNvPr id="3" name="Content Placeholder 2">
-            <a:extLst>
-              <a:ext uri="{FF2B5EF4-FFF2-40B4-BE49-F238E27FC236}">
-                <a16:creationId xmlns:a16="http://schemas.microsoft.com/office/drawing/2014/main" id="{63E977AD-DCFC-4342-A6FD-6185369E1083}"/>
-              </a:ext>
-            </a:extLst>
-          </p:cNvPr>
+          <p:cNvPr id="3" name="Content Placeholder 2"/>
           <p:cNvSpPr>
             <a:spLocks noGrp="1"/>
           </p:cNvSpPr>
@@ -15026,9 +14389,10 @@
               <a:rPr lang="zh-CN" altLang="en-US" dirty="0"/>
               <a:t>绝大部分软件工程师的工作成果都是可以公开的，你参与的产品用户评价如何？市场 占有率如何？对用户有多大价值？你在其中起了什么作用？行胜于言，这些实际的工作成果，是最重要的评价标准。</a:t>
             </a:r>
-          </a:p>
-          <a:p>
-            <a:pPr marL="118872" indent="0">
+            <a:endParaRPr lang="zh-CN" altLang="en-US" dirty="0"/>
+          </a:p>
+          <a:p>
+            <a:pPr marL="118745" indent="0">
               <a:lnSpc>
                 <a:spcPct val="120000"/>
               </a:lnSpc>
@@ -15039,11 +14403,6 @@
         </p:txBody>
       </p:sp>
     </p:spTree>
-    <p:extLst>
-      <p:ext uri="{BB962C8B-B14F-4D97-AF65-F5344CB8AC3E}">
-        <p14:creationId xmlns:p14="http://schemas.microsoft.com/office/powerpoint/2010/main" val="3142170630"/>
-      </p:ext>
-    </p:extLst>
   </p:cSld>
   <p:clrMapOvr>
     <a:masterClrMapping/>
@@ -15070,13 +14429,7 @@
       </p:grpSpPr>
       <p:sp>
         <p:nvSpPr>
-          <p:cNvPr id="2" name="Title 1">
-            <a:extLst>
-              <a:ext uri="{FF2B5EF4-FFF2-40B4-BE49-F238E27FC236}">
-                <a16:creationId xmlns:a16="http://schemas.microsoft.com/office/drawing/2014/main" id="{D79D026B-2EFE-4060-882A-AE65C0C4D00B}"/>
-              </a:ext>
-            </a:extLst>
-          </p:cNvPr>
+          <p:cNvPr id="2" name="Title 1"/>
           <p:cNvSpPr>
             <a:spLocks noGrp="1"/>
           </p:cNvSpPr>
@@ -15101,13 +14454,7 @@
       </p:sp>
       <p:sp>
         <p:nvSpPr>
-          <p:cNvPr id="3" name="Content Placeholder 2">
-            <a:extLst>
-              <a:ext uri="{FF2B5EF4-FFF2-40B4-BE49-F238E27FC236}">
-                <a16:creationId xmlns:a16="http://schemas.microsoft.com/office/drawing/2014/main" id="{82935234-AFFA-4D32-9A17-3F2F59285C68}"/>
-              </a:ext>
-            </a:extLst>
-          </p:cNvPr>
+          <p:cNvPr id="3" name="Content Placeholder 2"/>
           <p:cNvSpPr>
             <a:spLocks noGrp="1"/>
           </p:cNvSpPr>
@@ -15204,11 +14551,6 @@
         </p:txBody>
       </p:sp>
     </p:spTree>
-    <p:extLst>
-      <p:ext uri="{BB962C8B-B14F-4D97-AF65-F5344CB8AC3E}">
-        <p14:creationId xmlns:p14="http://schemas.microsoft.com/office/powerpoint/2010/main" val="37366169"/>
-      </p:ext>
-    </p:extLst>
   </p:cSld>
   <p:clrMapOvr>
     <a:masterClrMapping/>
@@ -15235,13 +14577,7 @@
       </p:grpSpPr>
       <p:sp>
         <p:nvSpPr>
-          <p:cNvPr id="2" name="Title 1">
-            <a:extLst>
-              <a:ext uri="{FF2B5EF4-FFF2-40B4-BE49-F238E27FC236}">
-                <a16:creationId xmlns:a16="http://schemas.microsoft.com/office/drawing/2014/main" id="{5CE18483-0F71-4391-B196-18C3E1BE3B0B}"/>
-              </a:ext>
-            </a:extLst>
-          </p:cNvPr>
+          <p:cNvPr id="2" name="Title 1"/>
           <p:cNvSpPr>
             <a:spLocks noGrp="1"/>
           </p:cNvSpPr>
@@ -15264,13 +14600,7 @@
       </p:sp>
       <p:sp>
         <p:nvSpPr>
-          <p:cNvPr id="3" name="Content Placeholder 2">
-            <a:extLst>
-              <a:ext uri="{FF2B5EF4-FFF2-40B4-BE49-F238E27FC236}">
-                <a16:creationId xmlns:a16="http://schemas.microsoft.com/office/drawing/2014/main" id="{55E0976A-1108-44FE-B28E-89297F048DD1}"/>
-              </a:ext>
-            </a:extLst>
-          </p:cNvPr>
+          <p:cNvPr id="3" name="Content Placeholder 2"/>
           <p:cNvSpPr>
             <a:spLocks noGrp="1"/>
           </p:cNvSpPr>
@@ -15328,7 +14658,7 @@
             <a:endParaRPr lang="en-US" altLang="zh-CN" dirty="0"/>
           </a:p>
           <a:p>
-            <a:pPr marL="118872" indent="0">
+            <a:pPr marL="118745" indent="0">
               <a:buNone/>
             </a:pPr>
             <a:endParaRPr lang="en-US" dirty="0"/>
@@ -15336,11 +14666,6 @@
         </p:txBody>
       </p:sp>
     </p:spTree>
-    <p:extLst>
-      <p:ext uri="{BB962C8B-B14F-4D97-AF65-F5344CB8AC3E}">
-        <p14:creationId xmlns:p14="http://schemas.microsoft.com/office/powerpoint/2010/main" val="224053405"/>
-      </p:ext>
-    </p:extLst>
   </p:cSld>
   <p:clrMapOvr>
     <a:masterClrMapping/>
@@ -15367,13 +14692,7 @@
       </p:grpSpPr>
       <p:sp>
         <p:nvSpPr>
-          <p:cNvPr id="2" name="Title 1">
-            <a:extLst>
-              <a:ext uri="{FF2B5EF4-FFF2-40B4-BE49-F238E27FC236}">
-                <a16:creationId xmlns:a16="http://schemas.microsoft.com/office/drawing/2014/main" id="{59685598-4CD3-4C35-8C3F-AAC62F930BFB}"/>
-              </a:ext>
-            </a:extLst>
-          </p:cNvPr>
+          <p:cNvPr id="2" name="Title 1"/>
           <p:cNvSpPr>
             <a:spLocks noGrp="1"/>
           </p:cNvSpPr>
@@ -15398,13 +14717,7 @@
       </p:sp>
       <p:sp>
         <p:nvSpPr>
-          <p:cNvPr id="3" name="Content Placeholder 2">
-            <a:extLst>
-              <a:ext uri="{FF2B5EF4-FFF2-40B4-BE49-F238E27FC236}">
-                <a16:creationId xmlns:a16="http://schemas.microsoft.com/office/drawing/2014/main" id="{9F449120-2354-4B84-892E-F00A42C74A5D}"/>
-              </a:ext>
-            </a:extLst>
-          </p:cNvPr>
+          <p:cNvPr id="3" name="Content Placeholder 2"/>
           <p:cNvSpPr>
             <a:spLocks noGrp="1"/>
           </p:cNvSpPr>
@@ -15617,11 +14930,6 @@
         </p:txBody>
       </p:sp>
     </p:spTree>
-    <p:extLst>
-      <p:ext uri="{BB962C8B-B14F-4D97-AF65-F5344CB8AC3E}">
-        <p14:creationId xmlns:p14="http://schemas.microsoft.com/office/powerpoint/2010/main" val="1469810937"/>
-      </p:ext>
-    </p:extLst>
   </p:cSld>
   <p:clrMapOvr>
     <a:masterClrMapping/>
@@ -15648,13 +14956,7 @@
       </p:grpSpPr>
       <p:sp>
         <p:nvSpPr>
-          <p:cNvPr id="2" name="Title 1">
-            <a:extLst>
-              <a:ext uri="{FF2B5EF4-FFF2-40B4-BE49-F238E27FC236}">
-                <a16:creationId xmlns:a16="http://schemas.microsoft.com/office/drawing/2014/main" id="{92364B9B-A74F-4934-81F4-ACDA5F2EEB9D}"/>
-              </a:ext>
-            </a:extLst>
-          </p:cNvPr>
+          <p:cNvPr id="2" name="Title 1"/>
           <p:cNvSpPr>
             <a:spLocks noGrp="1"/>
           </p:cNvSpPr>
@@ -15677,13 +14979,7 @@
       </p:sp>
       <p:sp>
         <p:nvSpPr>
-          <p:cNvPr id="3" name="Content Placeholder 2">
-            <a:extLst>
-              <a:ext uri="{FF2B5EF4-FFF2-40B4-BE49-F238E27FC236}">
-                <a16:creationId xmlns:a16="http://schemas.microsoft.com/office/drawing/2014/main" id="{62EB2482-9CFE-4BA5-87D1-6F24EB602CB8}"/>
-              </a:ext>
-            </a:extLst>
-          </p:cNvPr>
+          <p:cNvPr id="3" name="Content Placeholder 2"/>
           <p:cNvSpPr>
             <a:spLocks noGrp="1"/>
           </p:cNvSpPr>
@@ -15737,20 +15033,14 @@
         <p:nvPicPr>
           <p:cNvPr id="1026" name="Picture 2" descr="æ¥å Â·å-æ´æ¯ãå¾çï¼Courtesy of Getty Images.">
-            <a:extLst>
-              <a:ext uri="{FF2B5EF4-FFF2-40B4-BE49-F238E27FC236}">
-                <a16:creationId xmlns:a16="http://schemas.microsoft.com/office/drawing/2014/main" id="{1380D148-CC6F-40C1-8380-92D9216CF3C3}"/>
-              </a:ext>
-            </a:extLst>
-          </p:cNvPr>
+æ´æ¯ãå¾çï¼Courtesy of Getty Images."/>
           <p:cNvPicPr>
             <a:picLocks noChangeAspect="1" noChangeArrowheads="1"/>
           </p:cNvPicPr>
           <p:nvPr/>
         </p:nvPicPr>
         <p:blipFill>
-          <a:blip r:embed="rId2">
+          <a:blip r:embed="rId1">
             <a:extLst>
               <a:ext uri="{28A0092B-C50C-407E-A947-70E740481C1C}">
                 <a14:useLocalDpi xmlns:a14="http://schemas.microsoft.com/office/drawing/2010/main" val="0"/>
@@ -15783,11 +15073,6 @@
         </p:spPr>
       </p:pic>
     </p:spTree>
-    <p:extLst>
-      <p:ext uri="{BB962C8B-B14F-4D97-AF65-F5344CB8AC3E}">
-        <p14:creationId xmlns:p14="http://schemas.microsoft.com/office/powerpoint/2010/main" val="3059523748"/>
-      </p:ext>
-    </p:extLst>
   </p:cSld>
   <p:clrMapOvr>
     <a:masterClrMapping/>
@@ -15814,13 +15099,7 @@
       </p:grpSpPr>
       <p:sp>
         <p:nvSpPr>
-          <p:cNvPr id="2" name="Title 1">
-            <a:extLst>
-              <a:ext uri="{FF2B5EF4-FFF2-40B4-BE49-F238E27FC236}">
-                <a16:creationId xmlns:a16="http://schemas.microsoft.com/office/drawing/2014/main" id="{7F0D5F66-C581-4BB1-9C74-6D06BDFA7204}"/>
-              </a:ext>
-            </a:extLst>
-          </p:cNvPr>
+          <p:cNvPr id="2" name="Title 1"/>
           <p:cNvSpPr>
             <a:spLocks noGrp="1"/>
           </p:cNvSpPr>
@@ -15843,13 +15122,7 @@
       </p:sp>
       <p:sp>
         <p:nvSpPr>
-          <p:cNvPr id="3" name="Content Placeholder 2">
-            <a:extLst>
-              <a:ext uri="{FF2B5EF4-FFF2-40B4-BE49-F238E27FC236}">
-                <a16:creationId xmlns:a16="http://schemas.microsoft.com/office/drawing/2014/main" id="{891A0752-746C-4640-BAB7-6364138D2C96}"/>
-              </a:ext>
-            </a:extLst>
-          </p:cNvPr>
+          <p:cNvPr id="3" name="Content Placeholder 2"/>
           <p:cNvSpPr>
             <a:spLocks noGrp="1"/>
           </p:cNvSpPr>
@@ -15892,6 +15165,7 @@
               <a:rPr lang="en-US" dirty="0"/>
               <a:t>There is a hole in my bucket</a:t>
             </a:r>
+            <a:endParaRPr lang="en-US" dirty="0"/>
           </a:p>
           <a:p>
             <a:pPr lvl="1"/>
@@ -15930,12 +15204,7 @@
       <p:pic>
         <p:nvPicPr>
           <p:cNvPr id="4" name="Picture 3">
-            <a:hlinkClick r:id="rId2"/>
-            <a:extLst>
-              <a:ext uri="{FF2B5EF4-FFF2-40B4-BE49-F238E27FC236}">
-                <a16:creationId xmlns:a16="http://schemas.microsoft.com/office/drawing/2014/main" id="{75463CFF-537B-43C4-9208-178321B74503}"/>
-              </a:ext>
-            </a:extLst>
+            <a:hlinkClick r:id="rId1"/>
           </p:cNvPr>
           <p:cNvPicPr>
             <a:picLocks noChangeAspect="1"/>
@@ -15943,7 +15212,7 @@
           <p:nvPr/>
         </p:nvPicPr>
         <p:blipFill>
-          <a:blip r:embed="rId3"/>
+          <a:blip r:embed="rId2"/>
           <a:stretch>
             <a:fillRect/>
           </a:stretch>
@@ -15959,11 +15228,6 @@
         </p:spPr>
       </p:pic>
     </p:spTree>
-    <p:extLst>
-      <p:ext uri="{BB962C8B-B14F-4D97-AF65-F5344CB8AC3E}">
-        <p14:creationId xmlns:p14="http://schemas.microsoft.com/office/powerpoint/2010/main" val="1735068261"/>
-      </p:ext>
-    </p:extLst>
   </p:cSld>
   <p:clrMapOvr>
     <a:masterClrMapping/>
@@ -15990,13 +15254,7 @@
       </p:grpSpPr>
       <p:sp>
         <p:nvSpPr>
-          <p:cNvPr id="2" name="Title 1">
-            <a:extLst>
-              <a:ext uri="{FF2B5EF4-FFF2-40B4-BE49-F238E27FC236}">
-                <a16:creationId xmlns:a16="http://schemas.microsoft.com/office/drawing/2014/main" id="{D1B8A3F4-908E-47FE-8D82-8D7634E72B42}"/>
-              </a:ext>
-            </a:extLst>
-          </p:cNvPr>
+          <p:cNvPr id="2" name="Title 1"/>
           <p:cNvSpPr>
             <a:spLocks noGrp="1"/>
           </p:cNvSpPr>
@@ -16029,13 +15287,7 @@
       </p:sp>
       <p:sp>
         <p:nvSpPr>
-          <p:cNvPr id="3" name="Content Placeholder 2">
-            <a:extLst>
-              <a:ext uri="{FF2B5EF4-FFF2-40B4-BE49-F238E27FC236}">
-                <a16:creationId xmlns:a16="http://schemas.microsoft.com/office/drawing/2014/main" id="{3953811D-FB60-4427-9B84-943EB8BDA8CD}"/>
-              </a:ext>
-            </a:extLst>
-          </p:cNvPr>
+          <p:cNvPr id="3" name="Content Placeholder 2"/>
           <p:cNvSpPr>
             <a:spLocks noGrp="1"/>
           </p:cNvSpPr>
@@ -16061,19 +15313,29 @@
             </a:r>
             <a:r>
               <a:rPr lang="en-US" altLang="zh-CN" dirty="0">
+                <a:hlinkClick r:id="rId1"/>
+              </a:rPr>
+              <a:t>Yak Shaving</a:t>
+            </a:r>
+            <a:r>
+              <a:rPr lang="en-US" altLang="zh-CN" dirty="0"/>
+              <a:t> (</a:t>
+            </a:r>
+            <a:r>
+              <a:rPr lang="en-US" altLang="zh-CN" dirty="0">
                 <a:hlinkClick r:id="rId2"/>
               </a:rPr>
-              <a:t>Yak Shaving</a:t>
+              <a:t>source</a:t>
             </a:r>
             <a:r>
               <a:rPr lang="en-US" altLang="zh-CN" dirty="0"/>
-              <a:t> (</a:t>
+              <a:t>) (</a:t>
             </a:r>
             <a:r>
               <a:rPr lang="en-US" altLang="zh-CN" dirty="0">
                 <a:hlinkClick r:id="rId3"/>
               </a:rPr>
-              <a:t>source</a:t>
+              <a:t>video</a:t>
             </a:r>
             <a:r>
               <a:rPr lang="en-US" altLang="zh-CN" dirty="0"/>
@@ -16083,22 +15345,13 @@
               <a:rPr lang="en-US" altLang="zh-CN" dirty="0">
                 <a:hlinkClick r:id="rId4"/>
               </a:rPr>
-              <a:t>video</a:t>
-            </a:r>
-            <a:r>
-              <a:rPr lang="en-US" altLang="zh-CN" dirty="0"/>
-              <a:t>) (</a:t>
-            </a:r>
-            <a:r>
-              <a:rPr lang="en-US" altLang="zh-CN" dirty="0">
-                <a:hlinkClick r:id="rId5"/>
-              </a:rPr>
               <a:t>article</a:t>
             </a:r>
             <a:r>
               <a:rPr lang="en-US" altLang="zh-CN" dirty="0"/>
               <a:t>)</a:t>
             </a:r>
+            <a:endParaRPr lang="en-US" altLang="zh-CN" dirty="0"/>
           </a:p>
           <a:p>
             <a:pPr>
@@ -16270,6 +15523,11 @@
               </a:rPr>
               <a:t>剪牦牛的毛 </a:t>
             </a:r>
+            <a:endParaRPr lang="zh-CN" altLang="en-US" dirty="0">
+              <a:highlight>
+                <a:srgbClr val="0000FF"/>
+              </a:highlight>
+            </a:endParaRPr>
           </a:p>
           <a:p>
             <a:pPr>
@@ -16305,6 +15563,7 @@
               <a:rPr lang="en-US" altLang="zh-CN" dirty="0"/>
               <a:t>……</a:t>
             </a:r>
+            <a:endParaRPr lang="en-US" altLang="zh-CN" dirty="0"/>
           </a:p>
           <a:p>
             <a:pPr>
@@ -16345,11 +15604,6 @@
         </p:txBody>
       </p:sp>
     </p:spTree>
-    <p:extLst>
-      <p:ext uri="{BB962C8B-B14F-4D97-AF65-F5344CB8AC3E}">
-        <p14:creationId xmlns:p14="http://schemas.microsoft.com/office/powerpoint/2010/main" val="1647869658"/>
-      </p:ext>
-    </p:extLst>
   </p:cSld>
   <p:clrMapOvr>
     <a:masterClrMapping/>
@@ -16770,6 +16024,7 @@
               <a:rPr lang="en-US" b="0" dirty="0"/>
               <a:t> </a:t>
             </a:r>
+            <a:endParaRPr lang="en-US" b="0" dirty="0"/>
           </a:p>
         </p:txBody>
       </p:sp>
@@ -16868,6 +16123,7 @@
               <a:rPr lang="en-US" altLang="zh-CN" dirty="0"/>
               <a:t> </a:t>
             </a:r>
+            <a:endParaRPr lang="en-US" altLang="zh-CN" dirty="0"/>
           </a:p>
           <a:p>
             <a:r>
@@ -16891,7 +16147,7 @@
       <p:pic>
         <p:nvPicPr>
           <p:cNvPr id="1031" name="Picture 7" descr="http://t1.gstatic.com/images?q=tbn:Ervd0cBao52trM:http://s3.amazonaws.com/pixmac-preview/soccer-player-silhouettes-1.jpg">
-            <a:hlinkClick r:id="rId3"/>
+            <a:hlinkClick r:id="rId1"/>
           </p:cNvPr>
           <p:cNvPicPr>
             <a:picLocks noChangeAspect="1" noChangeArrowheads="1"/>
@@ -16899,7 +16155,7 @@
           <p:nvPr/>
         </p:nvPicPr>
         <p:blipFill>
-          <a:blip r:embed="rId4" cstate="print"/>
+          <a:blip r:embed="rId2" cstate="print"/>
           <a:srcRect/>
           <a:stretch>
             <a:fillRect/>
@@ -16925,7 +16181,7 @@
           <p:nvPr/>
         </p:nvPicPr>
         <p:blipFill>
-          <a:blip r:embed="rId5" cstate="print"/>
+          <a:blip r:embed="rId3" cstate="print"/>
           <a:srcRect/>
           <a:stretch>
             <a:fillRect/>
@@ -17619,13 +16875,7 @@
       </p:grpSpPr>
       <p:sp>
         <p:nvSpPr>
-          <p:cNvPr id="2" name="Title 1">
-            <a:extLst>
-              <a:ext uri="{FF2B5EF4-FFF2-40B4-BE49-F238E27FC236}">
-                <a16:creationId xmlns:a16="http://schemas.microsoft.com/office/drawing/2014/main" id="{FF4D2C3E-FCDF-4D04-9831-BB36DB39F392}"/>
-              </a:ext>
-            </a:extLst>
-          </p:cNvPr>
+          <p:cNvPr id="2" name="Title 1"/>
           <p:cNvSpPr>
             <a:spLocks noGrp="1"/>
           </p:cNvSpPr>
@@ -17656,13 +16906,7 @@
       </p:sp>
       <p:sp>
         <p:nvSpPr>
-          <p:cNvPr id="3" name="Content Placeholder 2">
-            <a:extLst>
-              <a:ext uri="{FF2B5EF4-FFF2-40B4-BE49-F238E27FC236}">
-                <a16:creationId xmlns:a16="http://schemas.microsoft.com/office/drawing/2014/main" id="{FCAC2359-F7D4-4211-ADAB-6DAE8ED42820}"/>
-              </a:ext>
-            </a:extLst>
-          </p:cNvPr>
+          <p:cNvPr id="3" name="Content Placeholder 2"/>
           <p:cNvSpPr>
             <a:spLocks noGrp="1"/>
           </p:cNvSpPr>
@@ -17691,6 +16935,7 @@
               <a:rPr lang="zh-CN" altLang="en-US" dirty="0"/>
               <a:t>王屋村软件学院的小飞同学在下雨的时候经常打着一把很精巧的小雨伞，和同学们一起匆匆赶 路。同学们提醒他：</a:t>
             </a:r>
+            <a:endParaRPr lang="zh-CN" altLang="en-US" dirty="0"/>
           </a:p>
           <a:p>
             <a:pPr lvl="1">
@@ -17702,6 +16947,7 @@
               <a:rPr lang="zh-CN" altLang="en-US" dirty="0"/>
               <a:t>小飞，你这雨伞太小了，你的裤腿都湿了！</a:t>
             </a:r>
+            <a:endParaRPr lang="zh-CN" altLang="en-US" dirty="0"/>
           </a:p>
           <a:p>
             <a:pPr>
@@ -17713,6 +16959,7 @@
               <a:rPr lang="zh-CN" altLang="en-US" dirty="0"/>
               <a:t>但是小飞还是打着这把小雨伞。几年过去了，在毕业酒会上，大家又谈起这个故事。女同学小 李说：有一次我没有带伞，他邀请我和他一起走，但是他的伞太小了，我就没答应。小飞红着脸解释了原因：</a:t>
             </a:r>
+            <a:endParaRPr lang="zh-CN" altLang="en-US" dirty="0"/>
           </a:p>
           <a:p>
             <a:pPr>
@@ -17724,6 +16971,7 @@
               <a:rPr lang="zh-CN" altLang="en-US" dirty="0"/>
               <a:t>我原来想，如果有女朋友的话，两人在雨中打着很小的雨伞，她就会离我近一些。现在我还是 单身，我想起了“过早优化是一切烦恼的根源”。</a:t>
             </a:r>
+            <a:endParaRPr lang="zh-CN" altLang="en-US" dirty="0"/>
           </a:p>
           <a:p>
             <a:pPr>
@@ -17737,13 +16985,7 @@
       </p:sp>
       <p:sp>
         <p:nvSpPr>
-          <p:cNvPr id="4" name="TextBox 3">
-            <a:extLst>
-              <a:ext uri="{FF2B5EF4-FFF2-40B4-BE49-F238E27FC236}">
-                <a16:creationId xmlns:a16="http://schemas.microsoft.com/office/drawing/2014/main" id="{636875EA-935F-44BA-9DA1-6A1CC1CEC348}"/>
-              </a:ext>
-            </a:extLst>
-          </p:cNvPr>
+          <p:cNvPr id="4" name="TextBox 3"/>
           <p:cNvSpPr txBox="1"/>
           <p:nvPr/>
         </p:nvSpPr>
@@ -17775,25 +17017,20 @@
               <a:rPr lang="en-US" dirty="0"/>
               <a:t>.</a:t>
             </a:r>
+            <a:endParaRPr lang="en-US" dirty="0"/>
           </a:p>
         </p:txBody>
       </p:sp>
       <p:pic>
         <p:nvPicPr>
-          <p:cNvPr id="2050" name="Picture 2" descr="https://upload.wikimedia.org/wikipedia/commons/4/4f/KnuthAtOpenContentAlliance.jpg">
-            <a:extLst>
-              <a:ext uri="{FF2B5EF4-FFF2-40B4-BE49-F238E27FC236}">
-                <a16:creationId xmlns:a16="http://schemas.microsoft.com/office/drawing/2014/main" id="{1C7E2AEC-7B5D-4FFB-AA24-F6E1E43EFA36}"/>
-              </a:ext>
-            </a:extLst>
-          </p:cNvPr>
+          <p:cNvPr id="2050" name="Picture 2" descr="https://upload.wikimedia.org/wikipedia/commons/4/4f/KnuthAtOpenContentAlliance.jpg"/>
           <p:cNvPicPr>
             <a:picLocks noChangeAspect="1" noChangeArrowheads="1"/>
           </p:cNvPicPr>
           <p:nvPr/>
         </p:nvPicPr>
         <p:blipFill>
-          <a:blip r:embed="rId2">
+          <a:blip r:embed="rId1">
             <a:extLst>
               <a:ext uri="{28A0092B-C50C-407E-A947-70E740481C1C}">
                 <a14:useLocalDpi xmlns:a14="http://schemas.microsoft.com/office/drawing/2010/main" val="0"/>
@@ -17826,11 +17063,6 @@
         </p:spPr>
       </p:pic>
     </p:spTree>
-    <p:extLst>
-      <p:ext uri="{BB962C8B-B14F-4D97-AF65-F5344CB8AC3E}">
-        <p14:creationId xmlns:p14="http://schemas.microsoft.com/office/powerpoint/2010/main" val="3479106841"/>
-      </p:ext>
-    </p:extLst>
   </p:cSld>
   <p:clrMapOvr>
     <a:masterClrMapping/>
@@ -17857,13 +17089,7 @@
       </p:grpSpPr>
       <p:sp>
         <p:nvSpPr>
-          <p:cNvPr id="2" name="Title 1">
-            <a:extLst>
-              <a:ext uri="{FF2B5EF4-FFF2-40B4-BE49-F238E27FC236}">
-                <a16:creationId xmlns:a16="http://schemas.microsoft.com/office/drawing/2014/main" id="{CC713153-A66C-4BEE-AD57-324BE397291E}"/>
-              </a:ext>
-            </a:extLst>
-          </p:cNvPr>
+          <p:cNvPr id="2" name="Title 1"/>
           <p:cNvSpPr>
             <a:spLocks noGrp="1"/>
           </p:cNvSpPr>
@@ -17890,13 +17116,7 @@
       </p:sp>
       <p:sp>
         <p:nvSpPr>
-          <p:cNvPr id="3" name="Content Placeholder 2">
-            <a:extLst>
-              <a:ext uri="{FF2B5EF4-FFF2-40B4-BE49-F238E27FC236}">
-                <a16:creationId xmlns:a16="http://schemas.microsoft.com/office/drawing/2014/main" id="{C9F998A9-C3A7-466C-92A1-62E643270429}"/>
-              </a:ext>
-            </a:extLst>
-          </p:cNvPr>
+          <p:cNvPr id="3" name="Content Placeholder 2"/>
           <p:cNvSpPr>
             <a:spLocks noGrp="1"/>
           </p:cNvSpPr>
@@ -17913,7 +17133,7 @@
           <a:p>
             <a:r>
               <a:rPr lang="zh-CN" altLang="en-US" dirty="0">
-                <a:hlinkClick r:id="rId2"/>
+                <a:hlinkClick r:id="rId1"/>
               </a:rPr>
               <a:t>画扇面</a:t>
             </a:r>
@@ -17940,20 +17160,14 @@
       </p:sp>
       <p:pic>
         <p:nvPicPr>
-          <p:cNvPr id="4" name="Picture 3">
-            <a:extLst>
-              <a:ext uri="{FF2B5EF4-FFF2-40B4-BE49-F238E27FC236}">
-                <a16:creationId xmlns:a16="http://schemas.microsoft.com/office/drawing/2014/main" id="{237F48E3-111F-434A-9FF4-74609C59D4BD}"/>
-              </a:ext>
-            </a:extLst>
-          </p:cNvPr>
+          <p:cNvPr id="4" name="Picture 3"/>
           <p:cNvPicPr>
             <a:picLocks noChangeAspect="1"/>
           </p:cNvPicPr>
           <p:nvPr/>
         </p:nvPicPr>
         <p:blipFill>
-          <a:blip r:embed="rId3"/>
+          <a:blip r:embed="rId2"/>
           <a:stretch>
             <a:fillRect/>
           </a:stretch>
@@ -17969,11 +17183,6 @@
         </p:spPr>
       </p:pic>
     </p:spTree>
-    <p:extLst>
-      <p:ext uri="{BB962C8B-B14F-4D97-AF65-F5344CB8AC3E}">
-        <p14:creationId xmlns:p14="http://schemas.microsoft.com/office/powerpoint/2010/main" val="2111016971"/>
-      </p:ext>
-    </p:extLst>
   </p:cSld>
   <p:clrMapOvr>
     <a:masterClrMapping/>
@@ -18000,13 +17209,7 @@
       </p:grpSpPr>
       <p:sp>
         <p:nvSpPr>
-          <p:cNvPr id="2" name="Title 1">
-            <a:extLst>
-              <a:ext uri="{FF2B5EF4-FFF2-40B4-BE49-F238E27FC236}">
-                <a16:creationId xmlns:a16="http://schemas.microsoft.com/office/drawing/2014/main" id="{B4B5EDE4-BB76-48B6-83A2-D7CA600CBC75}"/>
-              </a:ext>
-            </a:extLst>
-          </p:cNvPr>
+          <p:cNvPr id="2" name="Title 1"/>
           <p:cNvSpPr>
             <a:spLocks noGrp="1"/>
           </p:cNvSpPr>
@@ -18037,13 +17240,7 @@
       </p:sp>
       <p:sp>
         <p:nvSpPr>
-          <p:cNvPr id="3" name="Content Placeholder 2">
-            <a:extLst>
-              <a:ext uri="{FF2B5EF4-FFF2-40B4-BE49-F238E27FC236}">
-                <a16:creationId xmlns:a16="http://schemas.microsoft.com/office/drawing/2014/main" id="{8BBB6F6F-81CF-4431-AF56-035DB7A8F17C}"/>
-              </a:ext>
-            </a:extLst>
-          </p:cNvPr>
+          <p:cNvPr id="3" name="Content Placeholder 2"/>
           <p:cNvSpPr>
             <a:spLocks noGrp="1"/>
           </p:cNvSpPr>
@@ -18071,6 +17268,7 @@
               <a:rPr lang="en-US" altLang="zh-CN" dirty="0"/>
               <a:t>( Temporary Work) </a:t>
             </a:r>
+            <a:endParaRPr lang="en-US" altLang="zh-CN" dirty="0"/>
           </a:p>
           <a:p>
             <a:pPr marL="925830" lvl="1" indent="-514350">
@@ -18257,7 +17455,7 @@
             <a:endParaRPr lang="en-US" altLang="zh-CN" dirty="0"/>
           </a:p>
           <a:p>
-            <a:pPr marL="633222" indent="-514350">
+            <a:pPr marL="633095" indent="-514350">
               <a:lnSpc>
                 <a:spcPct val="120000"/>
               </a:lnSpc>
@@ -18271,11 +17469,6 @@
         </p:txBody>
       </p:sp>
     </p:spTree>
-    <p:extLst>
-      <p:ext uri="{BB962C8B-B14F-4D97-AF65-F5344CB8AC3E}">
-        <p14:creationId xmlns:p14="http://schemas.microsoft.com/office/powerpoint/2010/main" val="2300063515"/>
-      </p:ext>
-    </p:extLst>
   </p:cSld>
   <p:clrMapOvr>
     <a:masterClrMapping/>
@@ -18302,13 +17495,7 @@
       </p:grpSpPr>
       <p:sp>
         <p:nvSpPr>
-          <p:cNvPr id="2" name="Title 1">
-            <a:extLst>
-              <a:ext uri="{FF2B5EF4-FFF2-40B4-BE49-F238E27FC236}">
-                <a16:creationId xmlns:a16="http://schemas.microsoft.com/office/drawing/2014/main" id="{915E581D-1C3A-4D84-9BB3-E1E6A48645E8}"/>
-              </a:ext>
-            </a:extLst>
-          </p:cNvPr>
+          <p:cNvPr id="2" name="Title 1"/>
           <p:cNvSpPr>
             <a:spLocks noGrp="1"/>
           </p:cNvSpPr>
@@ -18335,13 +17522,7 @@
       </p:sp>
       <p:pic>
         <p:nvPicPr>
-          <p:cNvPr id="5" name="Content Placeholder 4" descr="A screenshot of a cell phone&#10;&#10;Description generated with very high confidence">
-            <a:extLst>
-              <a:ext uri="{FF2B5EF4-FFF2-40B4-BE49-F238E27FC236}">
-                <a16:creationId xmlns:a16="http://schemas.microsoft.com/office/drawing/2014/main" id="{56C10E46-038D-4453-954F-4E1ACF587B15}"/>
-              </a:ext>
-            </a:extLst>
-          </p:cNvPr>
+          <p:cNvPr id="5" name="Content Placeholder 4" descr="A screenshot of a cell phone&#10;&#10;Description generated with very high confidence"/>
           <p:cNvPicPr>
             <a:picLocks noGrp="1" noChangeAspect="1"/>
           </p:cNvPicPr>
@@ -18350,7 +17531,7 @@
           </p:nvPr>
         </p:nvPicPr>
         <p:blipFill>
-          <a:blip r:embed="rId2">
+          <a:blip r:embed="rId1">
             <a:extLst>
               <a:ext uri="{28A0092B-C50C-407E-A947-70E740481C1C}">
                 <a14:useLocalDpi xmlns:a14="http://schemas.microsoft.com/office/drawing/2010/main" val="0"/>
@@ -18375,20 +17556,14 @@
       </p:pic>
       <p:pic>
         <p:nvPicPr>
-          <p:cNvPr id="6" name="Picture 5">
-            <a:extLst>
-              <a:ext uri="{FF2B5EF4-FFF2-40B4-BE49-F238E27FC236}">
-                <a16:creationId xmlns:a16="http://schemas.microsoft.com/office/drawing/2014/main" id="{45334B2E-393A-4523-ACF7-68CB31302DC5}"/>
-              </a:ext>
-            </a:extLst>
-          </p:cNvPr>
+          <p:cNvPr id="6" name="Picture 5"/>
           <p:cNvPicPr>
             <a:picLocks noChangeAspect="1"/>
           </p:cNvPicPr>
           <p:nvPr/>
         </p:nvPicPr>
         <p:blipFill>
-          <a:blip r:embed="rId3"/>
+          <a:blip r:embed="rId2"/>
           <a:stretch>
             <a:fillRect/>
           </a:stretch>
@@ -18410,13 +17585,7 @@
       </p:pic>
       <p:sp>
         <p:nvSpPr>
-          <p:cNvPr id="7" name="TextBox 6">
-            <a:extLst>
-              <a:ext uri="{FF2B5EF4-FFF2-40B4-BE49-F238E27FC236}">
-                <a16:creationId xmlns:a16="http://schemas.microsoft.com/office/drawing/2014/main" id="{D4465468-0AD9-417C-9815-8E2D3AB86EDE}"/>
-              </a:ext>
-            </a:extLst>
-          </p:cNvPr>
+          <p:cNvPr id="7" name="TextBox 6"/>
           <p:cNvSpPr txBox="1"/>
           <p:nvPr/>
         </p:nvSpPr>
@@ -18449,11 +17618,6 @@
         </p:txBody>
       </p:sp>
     </p:spTree>
-    <p:extLst>
-      <p:ext uri="{BB962C8B-B14F-4D97-AF65-F5344CB8AC3E}">
-        <p14:creationId xmlns:p14="http://schemas.microsoft.com/office/powerpoint/2010/main" val="2324583193"/>
-      </p:ext>
-    </p:extLst>
   </p:cSld>
   <p:clrMapOvr>
     <a:masterClrMapping/>
@@ -18480,13 +17644,7 @@
       </p:grpSpPr>
       <p:sp>
         <p:nvSpPr>
-          <p:cNvPr id="2" name="Title 1">
-            <a:extLst>
-              <a:ext uri="{FF2B5EF4-FFF2-40B4-BE49-F238E27FC236}">
-                <a16:creationId xmlns:a16="http://schemas.microsoft.com/office/drawing/2014/main" id="{3CAD3260-D3B2-467A-9605-1567B03BC767}"/>
-              </a:ext>
-            </a:extLst>
-          </p:cNvPr>
+          <p:cNvPr id="2" name="Title 1"/>
           <p:cNvSpPr>
             <a:spLocks noGrp="1"/>
           </p:cNvSpPr>
@@ -18509,13 +17667,7 @@
       </p:sp>
       <p:pic>
         <p:nvPicPr>
-          <p:cNvPr id="5" name="Content Placeholder 4" descr="A picture containing photo&#10;&#10;Description generated with very high confidence">
-            <a:extLst>
-              <a:ext uri="{FF2B5EF4-FFF2-40B4-BE49-F238E27FC236}">
-                <a16:creationId xmlns:a16="http://schemas.microsoft.com/office/drawing/2014/main" id="{9B6DC81D-1AF6-41E5-BF33-87EE08AB62DC}"/>
-              </a:ext>
-            </a:extLst>
-          </p:cNvPr>
+          <p:cNvPr id="5" name="Content Placeholder 4" descr="A picture containing photo&#10;&#10;Description generated with very high confidence"/>
           <p:cNvPicPr>
             <a:picLocks noGrp="1" noChangeAspect="1"/>
           </p:cNvPicPr>
@@ -18524,7 +17676,7 @@
           </p:nvPr>
         </p:nvPicPr>
         <p:blipFill>
-          <a:blip r:embed="rId2">
+          <a:blip r:embed="rId1">
             <a:extLst>
               <a:ext uri="{28A0092B-C50C-407E-A947-70E740481C1C}">
                 <a14:useLocalDpi xmlns:a14="http://schemas.microsoft.com/office/drawing/2010/main" val="0"/>
@@ -18544,20 +17696,14 @@
       </p:pic>
       <p:pic>
         <p:nvPicPr>
-          <p:cNvPr id="7" name="Picture 6" descr="A picture containing photo, showing, different&#10;&#10;Description generated with very high confidence">
-            <a:extLst>
-              <a:ext uri="{FF2B5EF4-FFF2-40B4-BE49-F238E27FC236}">
-                <a16:creationId xmlns:a16="http://schemas.microsoft.com/office/drawing/2014/main" id="{CF7246D8-CDB3-458A-9C98-2C4163664A29}"/>
-              </a:ext>
-            </a:extLst>
-          </p:cNvPr>
+          <p:cNvPr id="7" name="Picture 6" descr="A picture containing photo, showing, different&#10;&#10;Description generated with very high confidence"/>
           <p:cNvPicPr>
             <a:picLocks noChangeAspect="1"/>
           </p:cNvPicPr>
           <p:nvPr/>
         </p:nvPicPr>
         <p:blipFill>
-          <a:blip r:embed="rId3">
+          <a:blip r:embed="rId2">
             <a:extLst>
               <a:ext uri="{28A0092B-C50C-407E-A947-70E740481C1C}">
                 <a14:useLocalDpi xmlns:a14="http://schemas.microsoft.com/office/drawing/2010/main" val="0"/>
@@ -18580,13 +17726,7 @@
       </p:pic>
       <p:sp>
         <p:nvSpPr>
-          <p:cNvPr id="8" name="TextBox 7">
-            <a:extLst>
-              <a:ext uri="{FF2B5EF4-FFF2-40B4-BE49-F238E27FC236}">
-                <a16:creationId xmlns:a16="http://schemas.microsoft.com/office/drawing/2014/main" id="{7EFD9301-16B7-4DB9-BE5C-86698CD44A14}"/>
-              </a:ext>
-            </a:extLst>
-          </p:cNvPr>
+          <p:cNvPr id="8" name="TextBox 7"/>
           <p:cNvSpPr txBox="1"/>
           <p:nvPr/>
         </p:nvSpPr>
@@ -18689,11 +17829,6 @@
         </p:txBody>
       </p:sp>
     </p:spTree>
-    <p:extLst>
-      <p:ext uri="{BB962C8B-B14F-4D97-AF65-F5344CB8AC3E}">
-        <p14:creationId xmlns:p14="http://schemas.microsoft.com/office/powerpoint/2010/main" val="852070667"/>
-      </p:ext>
-    </p:extLst>
   </p:cSld>
   <p:clrMapOvr>
     <a:masterClrMapping/>
@@ -18888,13 +18023,7 @@
       </p:grpSpPr>
       <p:sp>
         <p:nvSpPr>
-          <p:cNvPr id="2" name="Title 1">
-            <a:extLst>
-              <a:ext uri="{FF2B5EF4-FFF2-40B4-BE49-F238E27FC236}">
-                <a16:creationId xmlns:a16="http://schemas.microsoft.com/office/drawing/2014/main" id="{E8E1F3B1-E8CF-412B-8E5A-F0AA062CD54D}"/>
-              </a:ext>
-            </a:extLst>
-          </p:cNvPr>
+          <p:cNvPr id="2" name="Title 1"/>
           <p:cNvSpPr>
             <a:spLocks noGrp="1"/>
           </p:cNvSpPr>
@@ -18917,13 +18046,7 @@
       </p:sp>
       <p:pic>
         <p:nvPicPr>
-          <p:cNvPr id="4" name="Content Placeholder 3">
-            <a:extLst>
-              <a:ext uri="{FF2B5EF4-FFF2-40B4-BE49-F238E27FC236}">
-                <a16:creationId xmlns:a16="http://schemas.microsoft.com/office/drawing/2014/main" id="{BFD6E818-E535-4091-B8A3-9135B124C9F4}"/>
-              </a:ext>
-            </a:extLst>
-          </p:cNvPr>
+          <p:cNvPr id="4" name="Content Placeholder 3"/>
           <p:cNvPicPr>
             <a:picLocks noGrp="1" noChangeAspect="1"/>
           </p:cNvPicPr>
@@ -18932,7 +18055,7 @@
           </p:nvPr>
         </p:nvPicPr>
         <p:blipFill>
-          <a:blip r:embed="rId2"/>
+          <a:blip r:embed="rId1"/>
           <a:stretch>
             <a:fillRect/>
           </a:stretch>
@@ -18948,11 +18071,6 @@
         </p:spPr>
       </p:pic>
     </p:spTree>
-    <p:extLst>
-      <p:ext uri="{BB962C8B-B14F-4D97-AF65-F5344CB8AC3E}">
-        <p14:creationId xmlns:p14="http://schemas.microsoft.com/office/powerpoint/2010/main" val="1015395711"/>
-      </p:ext>
-    </p:extLst>
   </p:cSld>
   <p:clrMapOvr>
     <a:masterClrMapping/>
@@ -18979,13 +18097,7 @@
       </p:grpSpPr>
       <p:sp>
         <p:nvSpPr>
-          <p:cNvPr id="2" name="Title 1">
-            <a:extLst>
-              <a:ext uri="{FF2B5EF4-FFF2-40B4-BE49-F238E27FC236}">
-                <a16:creationId xmlns:a16="http://schemas.microsoft.com/office/drawing/2014/main" id="{EB5EBCE9-2E20-4101-BCFE-AC298CC1B610}"/>
-              </a:ext>
-            </a:extLst>
-          </p:cNvPr>
+          <p:cNvPr id="2" name="Title 1"/>
           <p:cNvSpPr>
             <a:spLocks noGrp="1"/>
           </p:cNvSpPr>
@@ -19020,13 +18132,7 @@
       </p:sp>
       <p:sp>
         <p:nvSpPr>
-          <p:cNvPr id="3" name="Content Placeholder 2">
-            <a:extLst>
-              <a:ext uri="{FF2B5EF4-FFF2-40B4-BE49-F238E27FC236}">
-                <a16:creationId xmlns:a16="http://schemas.microsoft.com/office/drawing/2014/main" id="{F876E99F-11C0-4993-8B59-8472014E7D55}"/>
-              </a:ext>
-            </a:extLst>
-          </p:cNvPr>
+          <p:cNvPr id="3" name="Content Placeholder 2"/>
           <p:cNvSpPr>
             <a:spLocks noGrp="1"/>
           </p:cNvSpPr>
@@ -19037,7 +18143,7 @@
         <p:spPr/>
         <p:txBody>
           <a:bodyPr>
-            <a:normAutofit fontScale="47500" lnSpcReduction="20000"/>
+            <a:normAutofit fontScale="67500" lnSpcReduction="20000"/>
           </a:bodyPr>
           <a:lstStyle/>
           <a:p>
@@ -19074,6 +18180,7 @@
               <a:rPr lang="zh-CN" altLang="en-US" dirty="0"/>
               <a:t>全国计算机技术与软件专业技术资格考试</a:t>
             </a:r>
+            <a:endParaRPr lang="zh-CN" altLang="en-US" dirty="0"/>
           </a:p>
           <a:p>
             <a:pPr>
@@ -19109,6 +18216,7 @@
               <a:rPr lang="zh-CN" altLang="en-US" dirty="0"/>
               <a:t>任何人都可以参与</a:t>
             </a:r>
+            <a:endParaRPr lang="zh-CN" altLang="en-US" dirty="0"/>
           </a:p>
           <a:p>
             <a:pPr>
@@ -19140,6 +18248,7 @@
               <a:rPr lang="zh-CN" altLang="en-US" dirty="0"/>
               <a:t>评分为主要考试形式，没有面对面的口试</a:t>
             </a:r>
+            <a:endParaRPr lang="zh-CN" altLang="en-US" dirty="0"/>
           </a:p>
           <a:p>
             <a:pPr lvl="1">
@@ -19173,7 +18282,7 @@
             </a:pPr>
             <a:r>
               <a:rPr lang="zh-CN" altLang="en-US" dirty="0"/>
-              <a:t>职业资格认证</a:t>
+              <a:t>企业认证</a:t>
             </a:r>
             <a:endParaRPr lang="en-US" altLang="zh-CN" dirty="0"/>
           </a:p>
@@ -19184,104 +18293,14 @@
               </a:lnSpc>
             </a:pPr>
             <a:r>
-              <a:rPr lang="en-US" altLang="zh-CN" dirty="0">
-                <a:hlinkClick r:id="rId2"/>
-              </a:rPr>
-              <a:t>http://cspro.ccf.org.cn</a:t>
-            </a:r>
-            <a:r>
-              <a:rPr lang="en-US" altLang="zh-CN" dirty="0"/>
-              <a:t> </a:t>
-            </a:r>
-            <a:r>
-              <a:rPr lang="zh-CN" altLang="en-US" dirty="0"/>
-              <a:t>（中国计算机协会）</a:t>
-            </a:r>
-            <a:endParaRPr lang="en-US" altLang="zh-CN" dirty="0"/>
-          </a:p>
-          <a:p>
-            <a:pPr lvl="1">
-              <a:lnSpc>
-                <a:spcPct val="120000"/>
-              </a:lnSpc>
-            </a:pPr>
-            <a:r>
-              <a:rPr lang="en-US" altLang="zh-CN" dirty="0">
-                <a:hlinkClick r:id="rId3"/>
-              </a:rPr>
-              <a:t>http://pat.zju.edu.cn</a:t>
-            </a:r>
-            <a:r>
-              <a:rPr lang="en-US" altLang="zh-CN" dirty="0"/>
-              <a:t> (</a:t>
-            </a:r>
-            <a:r>
-              <a:rPr lang="zh-CN" altLang="en-US" dirty="0"/>
-              <a:t>浙江大学开发）</a:t>
-            </a:r>
-            <a:endParaRPr lang="en-US" altLang="zh-CN" dirty="0"/>
-          </a:p>
-          <a:p>
-            <a:pPr>
-              <a:lnSpc>
-                <a:spcPct val="120000"/>
-              </a:lnSpc>
-            </a:pPr>
-            <a:r>
-              <a:rPr lang="zh-CN" altLang="en-US" dirty="0"/>
-              <a:t>企业认证</a:t>
-            </a:r>
-            <a:endParaRPr lang="en-US" altLang="zh-CN" dirty="0"/>
-          </a:p>
-          <a:p>
-            <a:pPr lvl="1">
-              <a:lnSpc>
-                <a:spcPct val="120000"/>
-              </a:lnSpc>
-            </a:pPr>
-            <a:r>
               <a:rPr lang="en-US" altLang="zh-CN" dirty="0"/>
               <a:t>Microsoft Certified Professional, etc. </a:t>
             </a:r>
+            <a:endParaRPr lang="en-US" altLang="zh-CN" dirty="0"/>
           </a:p>
         </p:txBody>
       </p:sp>
-      <p:pic>
-        <p:nvPicPr>
-          <p:cNvPr id="4" name="Picture 3">
-            <a:extLst>
-              <a:ext uri="{FF2B5EF4-FFF2-40B4-BE49-F238E27FC236}">
-                <a16:creationId xmlns:a16="http://schemas.microsoft.com/office/drawing/2014/main" id="{25861AAB-F464-4090-8DC9-BFE6E0655A4F}"/>
-              </a:ext>
-            </a:extLst>
-          </p:cNvPr>
-          <p:cNvPicPr>
-            <a:picLocks noChangeAspect="1"/>
-          </p:cNvPicPr>
-          <p:nvPr/>
-        </p:nvPicPr>
-        <p:blipFill>
-          <a:blip r:embed="rId4"/>
-          <a:stretch>
-            <a:fillRect/>
-          </a:stretch>
-        </p:blipFill>
-        <p:spPr>
-          <a:xfrm>
-            <a:off x="6128657" y="1794786"/>
-            <a:ext cx="5659554" cy="2964337"/>
-          </a:xfrm>
-          <a:prstGeom prst="rect">
-            <a:avLst/>
-          </a:prstGeom>
-        </p:spPr>
-      </p:pic>
     </p:spTree>
-    <p:extLst>
-      <p:ext uri="{BB962C8B-B14F-4D97-AF65-F5344CB8AC3E}">
-        <p14:creationId xmlns:p14="http://schemas.microsoft.com/office/powerpoint/2010/main" val="4114594668"/>
-      </p:ext>
-    </p:extLst>
   </p:cSld>
   <p:clrMapOvr>
     <a:masterClrMapping/>
@@ -19308,13 +18327,7 @@
       </p:grpSpPr>
       <p:sp>
         <p:nvSpPr>
-          <p:cNvPr id="2" name="Title 1">
-            <a:extLst>
-              <a:ext uri="{FF2B5EF4-FFF2-40B4-BE49-F238E27FC236}">
-                <a16:creationId xmlns:a16="http://schemas.microsoft.com/office/drawing/2014/main" id="{32419C9C-D443-489E-A0C5-7EC2B17D18AB}"/>
-              </a:ext>
-            </a:extLst>
-          </p:cNvPr>
+          <p:cNvPr id="2" name="Title 1"/>
           <p:cNvSpPr>
             <a:spLocks noGrp="1"/>
           </p:cNvSpPr>
@@ -19345,13 +18358,7 @@
       </p:sp>
       <p:sp>
         <p:nvSpPr>
-          <p:cNvPr id="3" name="Content Placeholder 2">
-            <a:extLst>
-              <a:ext uri="{FF2B5EF4-FFF2-40B4-BE49-F238E27FC236}">
-                <a16:creationId xmlns:a16="http://schemas.microsoft.com/office/drawing/2014/main" id="{406BD772-20A0-42CA-8865-8FBCE242C12A}"/>
-              </a:ext>
-            </a:extLst>
-          </p:cNvPr>
+          <p:cNvPr id="3" name="Content Placeholder 2"/>
           <p:cNvSpPr>
             <a:spLocks noGrp="1"/>
           </p:cNvSpPr>
@@ -19380,15 +18387,17 @@
               <a:rPr lang="en-US" altLang="zh-CN" dirty="0"/>
               <a:t>: Professional Development Ladder</a:t>
             </a:r>
+            <a:endParaRPr lang="en-US" altLang="zh-CN" dirty="0"/>
           </a:p>
           <a:p>
             <a:r>
               <a:rPr lang="en-US" altLang="zh-CN" dirty="0"/>
               <a:t>Microsoft</a:t>
             </a:r>
-          </a:p>
-          <a:p>
-            <a:pPr marL="118872" indent="0">
+            <a:endParaRPr lang="en-US" altLang="zh-CN" dirty="0"/>
+          </a:p>
+          <a:p>
+            <a:pPr marL="118745" indent="0">
               <a:buNone/>
             </a:pPr>
             <a:endParaRPr lang="en-US" altLang="zh-CN" dirty="0"/>
@@ -19397,20 +18406,14 @@
       </p:sp>
       <p:pic>
         <p:nvPicPr>
-          <p:cNvPr id="4" name="Picture 3">
-            <a:extLst>
-              <a:ext uri="{FF2B5EF4-FFF2-40B4-BE49-F238E27FC236}">
-                <a16:creationId xmlns:a16="http://schemas.microsoft.com/office/drawing/2014/main" id="{CC7A7975-767A-4493-86EC-7B0A63AA8B7B}"/>
-              </a:ext>
-            </a:extLst>
-          </p:cNvPr>
+          <p:cNvPr id="4" name="Picture 3"/>
           <p:cNvPicPr>
             <a:picLocks noChangeAspect="1"/>
           </p:cNvPicPr>
           <p:nvPr/>
         </p:nvPicPr>
         <p:blipFill>
-          <a:blip r:embed="rId2"/>
+          <a:blip r:embed="rId1"/>
           <a:stretch>
             <a:fillRect/>
           </a:stretch>
@@ -19426,11 +18429,6 @@
         </p:spPr>
       </p:pic>
     </p:spTree>
-    <p:extLst>
-      <p:ext uri="{BB962C8B-B14F-4D97-AF65-F5344CB8AC3E}">
-        <p14:creationId xmlns:p14="http://schemas.microsoft.com/office/powerpoint/2010/main" val="4083450557"/>
-      </p:ext>
-    </p:extLst>
   </p:cSld>
   <p:clrMapOvr>
     <a:masterClrMapping/>
@@ -19457,13 +18455,7 @@
       </p:grpSpPr>
       <p:sp>
         <p:nvSpPr>
-          <p:cNvPr id="2" name="Title 1">
-            <a:extLst>
-              <a:ext uri="{FF2B5EF4-FFF2-40B4-BE49-F238E27FC236}">
-                <a16:creationId xmlns:a16="http://schemas.microsoft.com/office/drawing/2014/main" id="{45D92FF8-9FC2-4C26-9C43-08F83C140D51}"/>
-              </a:ext>
-            </a:extLst>
-          </p:cNvPr>
+          <p:cNvPr id="2" name="Title 1"/>
           <p:cNvSpPr>
             <a:spLocks noGrp="1"/>
           </p:cNvSpPr>
@@ -19490,13 +18482,7 @@
       </p:sp>
       <p:sp>
         <p:nvSpPr>
-          <p:cNvPr id="3" name="Content Placeholder 2">
-            <a:extLst>
-              <a:ext uri="{FF2B5EF4-FFF2-40B4-BE49-F238E27FC236}">
-                <a16:creationId xmlns:a16="http://schemas.microsoft.com/office/drawing/2014/main" id="{8F410D44-6CD5-4A59-973A-E621E87AF488}"/>
-              </a:ext>
-            </a:extLst>
-          </p:cNvPr>
+          <p:cNvPr id="3" name="Content Placeholder 2"/>
           <p:cNvSpPr>
             <a:spLocks noGrp="1"/>
           </p:cNvSpPr>
@@ -19616,15 +18602,11 @@
               <a:rPr lang="zh-CN" altLang="en-US" dirty="0"/>
               <a:t>）打交道的时候，你是否往往都能赢得别人的支持， 而不是和别人反复争执，抱怨不休？</a:t>
             </a:r>
+            <a:endParaRPr lang="zh-CN" altLang="en-US" dirty="0"/>
           </a:p>
         </p:txBody>
       </p:sp>
     </p:spTree>
-    <p:extLst>
-      <p:ext uri="{BB962C8B-B14F-4D97-AF65-F5344CB8AC3E}">
-        <p14:creationId xmlns:p14="http://schemas.microsoft.com/office/powerpoint/2010/main" val="2827362311"/>
-      </p:ext>
-    </p:extLst>
   </p:cSld>
   <p:clrMapOvr>
     <a:masterClrMapping/>
@@ -19701,6 +18683,7 @@
               <a:rPr lang="en-US" dirty="0"/>
               <a:t>When can you claim you have the skill?</a:t>
             </a:r>
+            <a:endParaRPr lang="en-US" dirty="0"/>
           </a:p>
           <a:p>
             <a:r>
@@ -19711,6 +18694,7 @@
               <a:rPr lang="en-US" dirty="0"/>
               <a:t>What’s the opposite of skill?</a:t>
             </a:r>
+            <a:endParaRPr lang="en-US" dirty="0"/>
           </a:p>
           <a:p>
             <a:pPr lvl="1"/>
@@ -19718,6 +18702,7 @@
               <a:rPr lang="en-US" dirty="0"/>
               <a:t>Unskilled?</a:t>
             </a:r>
+            <a:endParaRPr lang="en-US" dirty="0"/>
           </a:p>
           <a:p>
             <a:pPr lvl="1"/>
@@ -19725,6 +18710,7 @@
               <a:rPr lang="en-US" dirty="0"/>
               <a:t>“problem solving”</a:t>
             </a:r>
+            <a:endParaRPr lang="en-US" dirty="0"/>
           </a:p>
           <a:p>
             <a:endParaRPr lang="en-US" dirty="0"/>
@@ -19732,43 +18718,45 @@
           <a:p>
             <a:r>
               <a:rPr lang="en-US" dirty="0">
+                <a:hlinkClick r:id="rId1"/>
+              </a:rPr>
+              <a:t>http://www.billbuxton.com/xc.html</a:t>
+            </a:r>
+            <a:endParaRPr lang="en-US" dirty="0"/>
+          </a:p>
+          <a:p>
+            <a:endParaRPr lang="en-US" dirty="0"/>
+          </a:p>
+          <a:p>
+            <a:r>
+              <a:rPr lang="en-US" dirty="0"/>
+              <a:t>Quality vs. Quantity</a:t>
+            </a:r>
+            <a:endParaRPr lang="en-US" dirty="0"/>
+          </a:p>
+          <a:p>
+            <a:pPr lvl="1"/>
+            <a:r>
+              <a:rPr lang="zh-CN" altLang="en-US" dirty="0"/>
+              <a:t>陶艺课的故事</a:t>
+            </a:r>
+            <a:r>
+              <a:rPr lang="en-US" dirty="0"/>
+              <a:t>,  the “quantity group” vs. “quality group”</a:t>
+            </a:r>
+            <a:endParaRPr lang="en-US" dirty="0"/>
+          </a:p>
+          <a:p>
+            <a:r>
+              <a:rPr lang="en-US" altLang="zh-CN" dirty="0">
                 <a:hlinkClick r:id="rId2"/>
               </a:rPr>
-              <a:t>http://www.billbuxton.com/xc.html</a:t>
-            </a:r>
-            <a:endParaRPr lang="en-US" dirty="0"/>
-          </a:p>
-          <a:p>
-            <a:endParaRPr lang="en-US" dirty="0"/>
-          </a:p>
-          <a:p>
-            <a:r>
-              <a:rPr lang="en-US" dirty="0"/>
-              <a:t>Quality vs. Quantity</a:t>
-            </a:r>
-          </a:p>
-          <a:p>
-            <a:pPr lvl="1"/>
-            <a:r>
-              <a:rPr lang="zh-CN" altLang="en-US" dirty="0"/>
-              <a:t>陶艺课的故事</a:t>
-            </a:r>
-            <a:r>
-              <a:rPr lang="en-US" dirty="0"/>
-              <a:t>,  the “quantity group” vs. “quality group”</a:t>
-            </a:r>
-          </a:p>
-          <a:p>
-            <a:r>
-              <a:rPr lang="en-US" altLang="zh-CN" dirty="0">
-                <a:hlinkClick r:id="rId3"/>
-              </a:rPr>
               <a:t>http://www.cnblogs.com/codingcrazy/archive/2011/02/28/1967503.html</a:t>
             </a:r>
             <a:endParaRPr lang="en-US" altLang="zh-CN" dirty="0"/>
           </a:p>
           <a:p>
-            <a:pPr marL="118872" indent="0">
+            <a:pPr marL="118745" indent="0">
               <a:buNone/>
             </a:pPr>
             <a:endParaRPr lang="en-US" dirty="0"/>
@@ -19776,11 +18764,6 @@
         </p:txBody>
       </p:sp>
     </p:spTree>
-    <p:extLst>
-      <p:ext uri="{BB962C8B-B14F-4D97-AF65-F5344CB8AC3E}">
-        <p14:creationId xmlns:p14="http://schemas.microsoft.com/office/powerpoint/2010/main" val="3413591577"/>
-      </p:ext>
-    </p:extLst>
   </p:cSld>
   <p:clrMapOvr>
     <a:masterClrMapping/>
@@ -19868,6 +18851,7 @@
               <a:rPr lang="en-US" sz="2400" dirty="0"/>
               <a:t> Contributor (IC)</a:t>
             </a:r>
+            <a:endParaRPr lang="en-US" sz="2400" dirty="0"/>
           </a:p>
           <a:p>
             <a:r>
@@ -19937,6 +18921,7 @@
               <a:rPr lang="en-US" sz="2800" dirty="0"/>
               <a:t> </a:t>
             </a:r>
+            <a:endParaRPr lang="en-US" sz="2800" dirty="0"/>
           </a:p>
         </p:txBody>
       </p:sp>
@@ -20002,7 +18987,7 @@
           </p:nvPr>
         </p:nvPicPr>
         <p:blipFill>
-          <a:blip r:embed="rId2"/>
+          <a:blip r:embed="rId1"/>
           <a:stretch>
             <a:fillRect/>
           </a:stretch>
@@ -20018,11 +19003,6 @@
         </p:spPr>
       </p:pic>
     </p:spTree>
-    <p:extLst>
-      <p:ext uri="{BB962C8B-B14F-4D97-AF65-F5344CB8AC3E}">
-        <p14:creationId xmlns:p14="http://schemas.microsoft.com/office/powerpoint/2010/main" val="2788818676"/>
-      </p:ext>
-    </p:extLst>
   </p:cSld>
   <p:clrMapOvr>
     <a:masterClrMapping/>
@@ -20093,6 +19073,7 @@
               <a:rPr lang="en-US" altLang="zh-CN" dirty="0"/>
               <a:t>?  </a:t>
             </a:r>
+            <a:endParaRPr lang="en-US" altLang="zh-CN" dirty="0"/>
           </a:p>
           <a:p>
             <a:pPr lvl="1"/>
@@ -20104,6 +19085,7 @@
               <a:rPr lang="zh-CN" altLang="en-US" dirty="0"/>
               <a:t>给面试者一个各面打乱颜色的魔方； </a:t>
             </a:r>
+            <a:endParaRPr lang="zh-CN" altLang="en-US" dirty="0"/>
           </a:p>
           <a:p>
             <a:pPr lvl="1"/>
@@ -20115,6 +19097,7 @@
               <a:rPr lang="zh-CN" altLang="en-US" dirty="0"/>
               <a:t>要求他把六面还原； </a:t>
             </a:r>
+            <a:endParaRPr lang="zh-CN" altLang="en-US" dirty="0"/>
           </a:p>
           <a:p>
             <a:pPr lvl="1"/>
@@ -20168,11 +19151,6 @@
         </p:txBody>
       </p:sp>
     </p:spTree>
-    <p:extLst>
-      <p:ext uri="{BB962C8B-B14F-4D97-AF65-F5344CB8AC3E}">
-        <p14:creationId xmlns:p14="http://schemas.microsoft.com/office/powerpoint/2010/main" val="2540468610"/>
-      </p:ext>
-    </p:extLst>
   </p:cSld>
   <p:clrMapOvr>
     <a:masterClrMapping/>
@@ -20290,12 +19268,12 @@
             <a:endParaRPr lang="en-US" altLang="zh-CN" dirty="0"/>
           </a:p>
           <a:p>
-            <a:pPr marL="118872" indent="0">
+            <a:pPr marL="118745" indent="0">
               <a:buNone/>
             </a:pPr>
             <a:r>
               <a:rPr lang="en-US" altLang="zh-CN" dirty="0">
-                <a:hlinkClick r:id="rId2"/>
+                <a:hlinkClick r:id="rId1"/>
               </a:rPr>
               <a:t>http://www.cnblogs.com/xinz/p/3852177.html</a:t>
             </a:r>
@@ -20308,11 +19286,6 @@
         </p:txBody>
       </p:sp>
     </p:spTree>
-    <p:extLst>
-      <p:ext uri="{BB962C8B-B14F-4D97-AF65-F5344CB8AC3E}">
-        <p14:creationId xmlns:p14="http://schemas.microsoft.com/office/powerpoint/2010/main" val="4135875331"/>
-      </p:ext>
-    </p:extLst>
   </p:cSld>
   <p:clrMapOvr>
     <a:masterClrMapping/>
@@ -20379,7 +19352,7 @@
           <a:p>
             <a:r>
               <a:rPr lang="en-US" altLang="zh-CN">
-                <a:hlinkClick r:id="rId2"/>
+                <a:hlinkClick r:id="rId1"/>
               </a:rPr>
               <a:t>http://www.cnblogs.com/xinz/p/3803109.html</a:t>
             </a:r>
@@ -20393,6 +19366,7 @@
               <a:rPr lang="en-US" altLang="zh-CN" dirty="0"/>
               <a:t>how do you measure the performance of each team member?</a:t>
             </a:r>
+            <a:endParaRPr lang="en-US" altLang="zh-CN" dirty="0"/>
           </a:p>
           <a:p>
             <a:pPr lvl="1"/>
@@ -20540,6 +19514,7 @@
               <a:rPr lang="en-US" altLang="zh-CN" sz="2200" b="1" dirty="0"/>
               <a:t>(this is your focus)</a:t>
             </a:r>
+            <a:endParaRPr lang="en-US" altLang="zh-CN" sz="2200" b="1" dirty="0"/>
           </a:p>
           <a:p>
             <a:pPr>
@@ -20585,6 +19560,7 @@
               <a:rPr lang="en-US" altLang="zh-CN" sz="2400" dirty="0"/>
               <a:t>?</a:t>
             </a:r>
+            <a:endParaRPr lang="en-US" altLang="zh-CN" sz="2400" dirty="0"/>
           </a:p>
           <a:p>
             <a:pPr>
@@ -20596,7 +19572,7 @@
             </a:r>
             <a:r>
               <a:rPr lang="en-US" altLang="zh-CN" sz="2400" dirty="0">
-                <a:sym typeface="Wingdings" pitchFamily="2" charset="2"/>
+                <a:sym typeface="Wingdings" panose="05000000000000000000" pitchFamily="2" charset="2"/>
               </a:rPr>
               <a:t></a:t>
             </a:r>
@@ -20605,11 +19581,6 @@
         </p:txBody>
       </p:sp>
     </p:spTree>
-    <p:extLst>
-      <p:ext uri="{BB962C8B-B14F-4D97-AF65-F5344CB8AC3E}">
-        <p14:creationId xmlns:p14="http://schemas.microsoft.com/office/powerpoint/2010/main" val="3555601642"/>
-      </p:ext>
-    </p:extLst>
   </p:cSld>
   <p:clrMapOvr>
     <a:masterClrMapping/>
@@ -20656,6 +19627,7 @@
               <a:rPr lang="en-US" dirty="0"/>
               <a:t>Questions and Answer</a:t>
             </a:r>
+            <a:endParaRPr lang="en-US" dirty="0"/>
           </a:p>
         </p:txBody>
       </p:sp>
@@ -20679,11 +19651,6 @@
         </p:txBody>
       </p:sp>
     </p:spTree>
-    <p:extLst>
-      <p:ext uri="{BB962C8B-B14F-4D97-AF65-F5344CB8AC3E}">
-        <p14:creationId xmlns:p14="http://schemas.microsoft.com/office/powerpoint/2010/main" val="1088086049"/>
-      </p:ext>
-    </p:extLst>
   </p:cSld>
   <p:clrMapOvr>
     <a:masterClrMapping/>
@@ -20710,13 +19677,7 @@
       </p:grpSpPr>
       <p:sp>
         <p:nvSpPr>
-          <p:cNvPr id="2" name="Title 1">
-            <a:extLst>
-              <a:ext uri="{FF2B5EF4-FFF2-40B4-BE49-F238E27FC236}">
-                <a16:creationId xmlns:a16="http://schemas.microsoft.com/office/drawing/2014/main" id="{24577D88-E090-464B-BC87-D60EE9128A0F}"/>
-              </a:ext>
-            </a:extLst>
-          </p:cNvPr>
+          <p:cNvPr id="2" name="Title 1"/>
           <p:cNvSpPr>
             <a:spLocks noGrp="1"/>
           </p:cNvSpPr>
@@ -20733,18 +19694,13 @@
               <a:rPr lang="en-US" dirty="0"/>
               <a:t>appendix</a:t>
             </a:r>
+            <a:endParaRPr lang="en-US" dirty="0"/>
           </a:p>
         </p:txBody>
       </p:sp>
       <p:sp>
         <p:nvSpPr>
-          <p:cNvPr id="3" name="Content Placeholder 2">
-            <a:extLst>
-              <a:ext uri="{FF2B5EF4-FFF2-40B4-BE49-F238E27FC236}">
-                <a16:creationId xmlns:a16="http://schemas.microsoft.com/office/drawing/2014/main" id="{3402149D-B9D8-49F7-8135-09433B6F86C7}"/>
-              </a:ext>
-            </a:extLst>
-          </p:cNvPr>
+          <p:cNvPr id="3" name="Content Placeholder 2"/>
           <p:cNvSpPr>
             <a:spLocks noGrp="1"/>
           </p:cNvSpPr>
@@ -20762,11 +19718,6 @@
         </p:txBody>
       </p:sp>
     </p:spTree>
-    <p:extLst>
-      <p:ext uri="{BB962C8B-B14F-4D97-AF65-F5344CB8AC3E}">
-        <p14:creationId xmlns:p14="http://schemas.microsoft.com/office/powerpoint/2010/main" val="161325156"/>
-      </p:ext>
-    </p:extLst>
   </p:cSld>
   <p:clrMapOvr>
     <a:masterClrMapping/>
@@ -20852,6 +19803,7 @@
               <a:rPr lang="en-US" altLang="zh-CN" dirty="0"/>
               <a:t>?</a:t>
             </a:r>
+            <a:endParaRPr lang="en-US" altLang="zh-CN" dirty="0"/>
           </a:p>
           <a:p>
             <a:pPr>
@@ -20867,6 +19819,7 @@
               <a:rPr lang="en-US" altLang="zh-CN" dirty="0"/>
               <a:t>:</a:t>
             </a:r>
+            <a:endParaRPr lang="en-US" altLang="zh-CN" dirty="0"/>
           </a:p>
           <a:p>
             <a:pPr lvl="1">
@@ -20934,6 +19887,7 @@
               <a:rPr lang="en-US" altLang="zh-CN" dirty="0"/>
               <a:t>:</a:t>
             </a:r>
+            <a:endParaRPr lang="en-US" altLang="zh-CN" dirty="0"/>
           </a:p>
           <a:p>
             <a:pPr lvl="1">
@@ -20957,6 +19911,7 @@
               <a:rPr lang="en-US" altLang="zh-CN" dirty="0"/>
               <a:t>…</a:t>
             </a:r>
+            <a:endParaRPr lang="en-US" altLang="zh-CN" dirty="0"/>
           </a:p>
           <a:p>
             <a:pPr lvl="1">
@@ -20980,6 +19935,7 @@
               <a:rPr lang="en-US" altLang="zh-CN" dirty="0"/>
               <a:t>…</a:t>
             </a:r>
+            <a:endParaRPr lang="en-US" altLang="zh-CN" dirty="0"/>
           </a:p>
           <a:p>
             <a:pPr lvl="1">
@@ -21039,6 +19995,7 @@
               <a:rPr lang="en-US" altLang="zh-CN" dirty="0"/>
               <a:t>? </a:t>
             </a:r>
+            <a:endParaRPr lang="en-US" altLang="zh-CN" dirty="0"/>
           </a:p>
           <a:p>
             <a:pPr>
@@ -21054,6 +20011,7 @@
               <a:rPr lang="en-US" altLang="zh-CN" dirty="0"/>
               <a:t>?</a:t>
             </a:r>
+            <a:endParaRPr lang="en-US" altLang="zh-CN" dirty="0"/>
           </a:p>
           <a:p>
             <a:pPr lvl="1">
@@ -21074,11 +20032,6 @@
         </p:txBody>
       </p:sp>
     </p:spTree>
-    <p:extLst>
-      <p:ext uri="{BB962C8B-B14F-4D97-AF65-F5344CB8AC3E}">
-        <p14:creationId xmlns:p14="http://schemas.microsoft.com/office/powerpoint/2010/main" val="2010243271"/>
-      </p:ext>
-    </p:extLst>
   </p:cSld>
   <p:clrMapOvr>
     <a:masterClrMapping/>
@@ -21705,6 +20658,7 @@
               <a:rPr lang="zh-CN" altLang="en-US" dirty="0"/>
               <a:t>远不如让学生自己构建</a:t>
             </a:r>
+            <a:endParaRPr lang="zh-CN" altLang="en-US" dirty="0"/>
           </a:p>
           <a:p>
             <a:r>
@@ -21739,6 +20693,7 @@
               <a:rPr lang="zh-CN" altLang="en-US" dirty="0"/>
               <a:t>喊口号的培训未必改变了人的认知模型</a:t>
             </a:r>
+            <a:endParaRPr lang="zh-CN" altLang="en-US" dirty="0"/>
           </a:p>
           <a:p>
             <a:r>
@@ -21765,6 +20720,7 @@
               <a:rPr lang="en-US" altLang="zh-CN" dirty="0"/>
               <a:t>,</a:t>
             </a:r>
+            <a:endParaRPr lang="en-US" altLang="zh-CN" dirty="0"/>
           </a:p>
           <a:p>
             <a:r>
@@ -21779,15 +20735,11 @@
               <a:rPr lang="zh-CN" altLang="en-US" dirty="0"/>
               <a:t>回顾总结是成长的关键   </a:t>
             </a:r>
+            <a:endParaRPr lang="zh-CN" altLang="en-US" dirty="0"/>
           </a:p>
         </p:txBody>
       </p:sp>
     </p:spTree>
-    <p:extLst>
-      <p:ext uri="{BB962C8B-B14F-4D97-AF65-F5344CB8AC3E}">
-        <p14:creationId xmlns:p14="http://schemas.microsoft.com/office/powerpoint/2010/main" val="45561062"/>
-      </p:ext>
-    </p:extLst>
   </p:cSld>
   <p:clrMapOvr>
     <a:masterClrMapping/>
@@ -21878,18 +20830,25 @@
               </a:rPr>
               <a:t>0</a:t>
             </a:r>
+            <a:endParaRPr lang="en-US" sz="2800" b="1" dirty="0">
+              <a:solidFill>
+                <a:srgbClr val="FF0000"/>
+              </a:solidFill>
+            </a:endParaRPr>
           </a:p>
           <a:p>
             <a:r>
               <a:rPr lang="en-US" sz="2800" dirty="0"/>
               <a:t>Planning</a:t>
             </a:r>
+            <a:endParaRPr lang="en-US" sz="2800" dirty="0"/>
           </a:p>
           <a:p>
             <a:r>
               <a:rPr lang="en-US" sz="2800" dirty="0"/>
               <a:t>Development</a:t>
             </a:r>
+            <a:endParaRPr lang="en-US" sz="2800" dirty="0"/>
           </a:p>
           <a:p>
             <a:pPr lvl="1"/>
@@ -21897,6 +20856,7 @@
               <a:rPr lang="en-US" sz="2400" dirty="0"/>
               <a:t>Design</a:t>
             </a:r>
+            <a:endParaRPr lang="en-US" sz="2400" dirty="0"/>
           </a:p>
           <a:p>
             <a:pPr lvl="1"/>
@@ -21904,6 +20864,7 @@
               <a:rPr lang="en-US" sz="2400" dirty="0"/>
               <a:t>Coding</a:t>
             </a:r>
+            <a:endParaRPr lang="en-US" sz="2400" dirty="0"/>
           </a:p>
           <a:p>
             <a:pPr lvl="1"/>
@@ -21911,21 +20872,21 @@
               <a:rPr lang="en-US" sz="2400" dirty="0"/>
               <a:t>Test</a:t>
             </a:r>
+            <a:endParaRPr lang="en-US" sz="2400" dirty="0"/>
           </a:p>
           <a:p>
             <a:r>
               <a:rPr lang="en-US" sz="2800" dirty="0"/>
               <a:t>Postmortem</a:t>
             </a:r>
+            <a:endParaRPr lang="en-US" sz="2800" dirty="0"/>
           </a:p>
         </p:txBody>
       </p:sp>
       <p:sp>
         <p:nvSpPr>
           <p:cNvPr id="4" name="Content Placeholder 2"/>
-          <p:cNvSpPr txBox="1">
-            <a:spLocks/>
-          </p:cNvSpPr>
+          <p:cNvSpPr txBox="1"/>
           <p:nvPr/>
         </p:nvSpPr>
         <p:spPr>
@@ -21951,7 +20912,7 @@
               <a:spcBef>
                 <a:spcPct val="20000"/>
               </a:spcBef>
-              <a:buFont typeface="Arial" pitchFamily="34" charset="0"/>
+              <a:buFont typeface="Arial" panose="020B0604020202020204" pitchFamily="34" charset="0"/>
               <a:buChar char="•"/>
               <a:defRPr sz="3200" kern="1200">
                 <a:solidFill>
@@ -21966,7 +20927,7 @@
               <a:spcBef>
                 <a:spcPct val="20000"/>
               </a:spcBef>
-              <a:buFont typeface="Arial" pitchFamily="34" charset="0"/>
+              <a:buFont typeface="Arial" panose="020B0604020202020204" pitchFamily="34" charset="0"/>
               <a:buChar char="–"/>
               <a:defRPr sz="2800" kern="1200">
                 <a:solidFill>
@@ -21981,7 +20942,7 @@
               <a:spcBef>
                 <a:spcPct val="20000"/>
               </a:spcBef>
-              <a:buFont typeface="Arial" pitchFamily="34" charset="0"/>
+              <a:buFont typeface="Arial" panose="020B0604020202020204" pitchFamily="34" charset="0"/>
               <a:buChar char="•"/>
               <a:defRPr sz="2400" kern="1200">
                 <a:solidFill>
@@ -21996,7 +20957,7 @@
               <a:spcBef>
                 <a:spcPct val="20000"/>
               </a:spcBef>
-              <a:buFont typeface="Arial" pitchFamily="34" charset="0"/>
+              <a:buFont typeface="Arial" panose="020B0604020202020204" pitchFamily="34" charset="0"/>
               <a:buChar char="–"/>
               <a:defRPr sz="2000" kern="1200">
                 <a:solidFill>
@@ -22011,7 +20972,7 @@
               <a:spcBef>
                 <a:spcPct val="20000"/>
               </a:spcBef>
-              <a:buFont typeface="Arial" pitchFamily="34" charset="0"/>
+              <a:buFont typeface="Arial" panose="020B0604020202020204" pitchFamily="34" charset="0"/>
               <a:buChar char="»"/>
               <a:defRPr sz="2000" kern="1200">
                 <a:solidFill>
@@ -22026,7 +20987,7 @@
               <a:spcBef>
                 <a:spcPct val="20000"/>
               </a:spcBef>
-              <a:buFont typeface="Arial" pitchFamily="34" charset="0"/>
+              <a:buFont typeface="Arial" panose="020B0604020202020204" pitchFamily="34" charset="0"/>
               <a:buChar char="•"/>
               <a:defRPr sz="2000" kern="1200">
                 <a:solidFill>
@@ -22041,7 +21002,7 @@
               <a:spcBef>
                 <a:spcPct val="20000"/>
               </a:spcBef>
-              <a:buFont typeface="Arial" pitchFamily="34" charset="0"/>
+              <a:buFont typeface="Arial" panose="020B0604020202020204" pitchFamily="34" charset="0"/>
               <a:buChar char="•"/>
               <a:defRPr sz="2000" kern="1200">
                 <a:solidFill>
@@ -22056,7 +21017,7 @@
               <a:spcBef>
                 <a:spcPct val="20000"/>
               </a:spcBef>
-              <a:buFont typeface="Arial" pitchFamily="34" charset="0"/>
+              <a:buFont typeface="Arial" panose="020B0604020202020204" pitchFamily="34" charset="0"/>
               <a:buChar char="•"/>
               <a:defRPr sz="2000" kern="1200">
                 <a:solidFill>
@@ -22071,7 +21032,7 @@
               <a:spcBef>
                 <a:spcPct val="20000"/>
               </a:spcBef>
-              <a:buFont typeface="Arial" pitchFamily="34" charset="0"/>
+              <a:buFont typeface="Arial" panose="020B0604020202020204" pitchFamily="34" charset="0"/>
               <a:buChar char="•"/>
               <a:defRPr sz="2000" kern="1200">
                 <a:solidFill>
@@ -22096,18 +21057,25 @@
               </a:rPr>
               <a:t>0.1</a:t>
             </a:r>
+            <a:endParaRPr lang="en-US" sz="2000" b="1" dirty="0">
+              <a:solidFill>
+                <a:srgbClr val="FF0000"/>
+              </a:solidFill>
+            </a:endParaRPr>
           </a:p>
           <a:p>
             <a:r>
               <a:rPr lang="en-US" sz="2000" dirty="0"/>
               <a:t>Planning</a:t>
             </a:r>
+            <a:endParaRPr lang="en-US" sz="2000" dirty="0"/>
           </a:p>
           <a:p>
             <a:r>
               <a:rPr lang="en-US" sz="2000" dirty="0"/>
               <a:t>Development</a:t>
             </a:r>
+            <a:endParaRPr lang="en-US" sz="2000" dirty="0"/>
           </a:p>
           <a:p>
             <a:pPr lvl="1"/>
@@ -22119,6 +21087,11 @@
               </a:rPr>
               <a:t>Coding Standard</a:t>
             </a:r>
+            <a:endParaRPr lang="en-US" sz="1800" b="1" dirty="0">
+              <a:solidFill>
+                <a:srgbClr val="FF0000"/>
+              </a:solidFill>
+            </a:endParaRPr>
           </a:p>
           <a:p>
             <a:pPr lvl="1"/>
@@ -22126,6 +21099,7 @@
               <a:rPr lang="en-US" sz="1800" dirty="0"/>
               <a:t>Design</a:t>
             </a:r>
+            <a:endParaRPr lang="en-US" sz="1800" dirty="0"/>
           </a:p>
           <a:p>
             <a:pPr lvl="1"/>
@@ -22133,6 +21107,7 @@
               <a:rPr lang="en-US" sz="1800" dirty="0"/>
               <a:t>Coding</a:t>
             </a:r>
+            <a:endParaRPr lang="en-US" sz="1800" dirty="0"/>
           </a:p>
           <a:p>
             <a:pPr lvl="1"/>
@@ -22140,6 +21115,7 @@
               <a:rPr lang="en-US" sz="1800" dirty="0"/>
               <a:t>Test</a:t>
             </a:r>
+            <a:endParaRPr lang="en-US" sz="1800" dirty="0"/>
           </a:p>
           <a:p>
             <a:r>
@@ -22150,12 +21126,18 @@
               </a:rPr>
               <a:t>Size Measurement</a:t>
             </a:r>
+            <a:endParaRPr lang="en-US" sz="2000" b="1" dirty="0">
+              <a:solidFill>
+                <a:srgbClr val="FF0000"/>
+              </a:solidFill>
+            </a:endParaRPr>
           </a:p>
           <a:p>
             <a:r>
               <a:rPr lang="en-US" sz="2000" dirty="0"/>
               <a:t>Postmortem</a:t>
             </a:r>
+            <a:endParaRPr lang="en-US" sz="2000" dirty="0"/>
           </a:p>
           <a:p>
             <a:r>
@@ -22166,15 +21148,18 @@
               </a:rPr>
               <a:t>Process Improvement Plan</a:t>
             </a:r>
+            <a:endParaRPr lang="en-US" sz="2000" b="1" dirty="0">
+              <a:solidFill>
+                <a:srgbClr val="FF0000"/>
+              </a:solidFill>
+            </a:endParaRPr>
           </a:p>
         </p:txBody>
       </p:sp>
       <p:sp>
         <p:nvSpPr>
           <p:cNvPr id="5" name="Content Placeholder 2"/>
-          <p:cNvSpPr txBox="1">
-            <a:spLocks/>
-          </p:cNvSpPr>
+          <p:cNvSpPr txBox="1"/>
           <p:nvPr/>
         </p:nvSpPr>
         <p:spPr>
@@ -22195,7 +21180,7 @@
               <a:spcBef>
                 <a:spcPct val="20000"/>
               </a:spcBef>
-              <a:buFont typeface="Arial" pitchFamily="34" charset="0"/>
+              <a:buFont typeface="Arial" panose="020B0604020202020204" pitchFamily="34" charset="0"/>
               <a:buChar char="•"/>
               <a:defRPr sz="3200" kern="1200">
                 <a:solidFill>
@@ -22210,7 +21195,7 @@
               <a:spcBef>
                 <a:spcPct val="20000"/>
               </a:spcBef>
-              <a:buFont typeface="Arial" pitchFamily="34" charset="0"/>
+              <a:buFont typeface="Arial" panose="020B0604020202020204" pitchFamily="34" charset="0"/>
               <a:buChar char="–"/>
               <a:defRPr sz="2800" kern="1200">
                 <a:solidFill>
@@ -22225,7 +21210,7 @@
               <a:spcBef>
                 <a:spcPct val="20000"/>
               </a:spcBef>
-              <a:buFont typeface="Arial" pitchFamily="34" charset="0"/>
+              <a:buFont typeface="Arial" panose="020B0604020202020204" pitchFamily="34" charset="0"/>
               <a:buChar char="•"/>
               <a:defRPr sz="2400" kern="1200">
                 <a:solidFill>
@@ -22240,7 +21225,7 @@
               <a:spcBef>
                 <a:spcPct val="20000"/>
               </a:spcBef>
-              <a:buFont typeface="Arial" pitchFamily="34" charset="0"/>
+              <a:buFont typeface="Arial" panose="020B0604020202020204" pitchFamily="34" charset="0"/>
               <a:buChar char="–"/>
               <a:defRPr sz="2000" kern="1200">
                 <a:solidFill>
@@ -22255,7 +21240,7 @@
               <a:spcBef>
                 <a:spcPct val="20000"/>
               </a:spcBef>
-              <a:buFont typeface="Arial" pitchFamily="34" charset="0"/>
+              <a:buFont typeface="Arial" panose="020B0604020202020204" pitchFamily="34" charset="0"/>
               <a:buChar char="»"/>
               <a:defRPr sz="2000" kern="1200">
                 <a:solidFill>
@@ -22270,7 +21255,7 @@
               <a:spcBef>
                 <a:spcPct val="20000"/>
               </a:spcBef>
-              <a:buFont typeface="Arial" pitchFamily="34" charset="0"/>
+              <a:buFont typeface="Arial" panose="020B0604020202020204" pitchFamily="34" charset="0"/>
               <a:buChar char="•"/>
               <a:defRPr sz="2000" kern="1200">
                 <a:solidFill>
@@ -22285,7 +21270,7 @@
               <a:spcBef>
                 <a:spcPct val="20000"/>
               </a:spcBef>
-              <a:buFont typeface="Arial" pitchFamily="34" charset="0"/>
+              <a:buFont typeface="Arial" panose="020B0604020202020204" pitchFamily="34" charset="0"/>
               <a:buChar char="•"/>
               <a:defRPr sz="2000" kern="1200">
                 <a:solidFill>
@@ -22300,7 +21285,7 @@
               <a:spcBef>
                 <a:spcPct val="20000"/>
               </a:spcBef>
-              <a:buFont typeface="Arial" pitchFamily="34" charset="0"/>
+              <a:buFont typeface="Arial" panose="020B0604020202020204" pitchFamily="34" charset="0"/>
               <a:buChar char="•"/>
               <a:defRPr sz="2000" kern="1200">
                 <a:solidFill>
@@ -22315,7 +21300,7 @@
               <a:spcBef>
                 <a:spcPct val="20000"/>
               </a:spcBef>
-              <a:buFont typeface="Arial" pitchFamily="34" charset="0"/>
+              <a:buFont typeface="Arial" panose="020B0604020202020204" pitchFamily="34" charset="0"/>
               <a:buChar char="•"/>
               <a:defRPr sz="2000" kern="1200">
                 <a:solidFill>
@@ -22335,9 +21320,7 @@
       <p:sp>
         <p:nvSpPr>
           <p:cNvPr id="6" name="Content Placeholder 2"/>
-          <p:cNvSpPr txBox="1">
-            <a:spLocks/>
-          </p:cNvSpPr>
+          <p:cNvSpPr txBox="1"/>
           <p:nvPr/>
         </p:nvSpPr>
         <p:spPr>
@@ -22363,7 +21346,7 @@
               <a:spcBef>
                 <a:spcPct val="20000"/>
               </a:spcBef>
-              <a:buFont typeface="Arial" pitchFamily="34" charset="0"/>
+              <a:buFont typeface="Arial" panose="020B0604020202020204" pitchFamily="34" charset="0"/>
               <a:buChar char="•"/>
               <a:defRPr sz="3200" kern="1200">
                 <a:solidFill>
@@ -22378,7 +21361,7 @@
               <a:spcBef>
                 <a:spcPct val="20000"/>
               </a:spcBef>
-              <a:buFont typeface="Arial" pitchFamily="34" charset="0"/>
+              <a:buFont typeface="Arial" panose="020B0604020202020204" pitchFamily="34" charset="0"/>
               <a:buChar char="–"/>
               <a:defRPr sz="2800" kern="1200">
                 <a:solidFill>
@@ -22393,7 +21376,7 @@
               <a:spcBef>
                 <a:spcPct val="20000"/>
               </a:spcBef>
-              <a:buFont typeface="Arial" pitchFamily="34" charset="0"/>
+              <a:buFont typeface="Arial" panose="020B0604020202020204" pitchFamily="34" charset="0"/>
               <a:buChar char="•"/>
               <a:defRPr sz="2400" kern="1200">
                 <a:solidFill>
@@ -22408,7 +21391,7 @@
               <a:spcBef>
                 <a:spcPct val="20000"/>
               </a:spcBef>
-              <a:buFont typeface="Arial" pitchFamily="34" charset="0"/>
+              <a:buFont typeface="Arial" panose="020B0604020202020204" pitchFamily="34" charset="0"/>
               <a:buChar char="–"/>
               <a:defRPr sz="2000" kern="1200">
                 <a:solidFill>
@@ -22423,7 +21406,7 @@
               <a:spcBef>
                 <a:spcPct val="20000"/>
               </a:spcBef>
-              <a:buFont typeface="Arial" pitchFamily="34" charset="0"/>
+              <a:buFont typeface="Arial" panose="020B0604020202020204" pitchFamily="34" charset="0"/>
               <a:buChar char="»"/>
               <a:defRPr sz="2000" kern="1200">
                 <a:solidFill>
@@ -22438,7 +21421,7 @@
               <a:spcBef>
                 <a:spcPct val="20000"/>
               </a:spcBef>
-              <a:buFont typeface="Arial" pitchFamily="34" charset="0"/>
+              <a:buFont typeface="Arial" panose="020B0604020202020204" pitchFamily="34" charset="0"/>
               <a:buChar char="•"/>
               <a:defRPr sz="2000" kern="1200">
                 <a:solidFill>
@@ -22453,7 +21436,7 @@
               <a:spcBef>
                 <a:spcPct val="20000"/>
               </a:spcBef>
-              <a:buFont typeface="Arial" pitchFamily="34" charset="0"/>
+              <a:buFont typeface="Arial" panose="020B0604020202020204" pitchFamily="34" charset="0"/>
               <a:buChar char="•"/>
               <a:defRPr sz="2000" kern="1200">
                 <a:solidFill>
@@ -22468,7 +21451,7 @@
               <a:spcBef>
                 <a:spcPct val="20000"/>
               </a:spcBef>
-              <a:buFont typeface="Arial" pitchFamily="34" charset="0"/>
+              <a:buFont typeface="Arial" panose="020B0604020202020204" pitchFamily="34" charset="0"/>
               <a:buChar char="•"/>
               <a:defRPr sz="2000" kern="1200">
                 <a:solidFill>
@@ -22483,7 +21466,7 @@
               <a:spcBef>
                 <a:spcPct val="20000"/>
               </a:spcBef>
-              <a:buFont typeface="Arial" pitchFamily="34" charset="0"/>
+              <a:buFont typeface="Arial" panose="020B0604020202020204" pitchFamily="34" charset="0"/>
               <a:buChar char="•"/>
               <a:defRPr sz="2000" kern="1200">
                 <a:solidFill>
@@ -22508,12 +21491,18 @@
               </a:rPr>
               <a:t>1</a:t>
             </a:r>
+            <a:endParaRPr lang="en-US" b="1" dirty="0">
+              <a:solidFill>
+                <a:srgbClr val="FF0000"/>
+              </a:solidFill>
+            </a:endParaRPr>
           </a:p>
           <a:p>
             <a:r>
               <a:rPr lang="en-US" dirty="0"/>
               <a:t>Planning</a:t>
             </a:r>
+            <a:endParaRPr lang="en-US" dirty="0"/>
           </a:p>
           <a:p>
             <a:pPr lvl="1"/>
@@ -22529,12 +21518,14 @@
               <a:rPr lang="en-US" dirty="0"/>
               <a:t> </a:t>
             </a:r>
+            <a:endParaRPr lang="en-US" dirty="0"/>
           </a:p>
           <a:p>
             <a:r>
               <a:rPr lang="en-US" dirty="0"/>
               <a:t>Development</a:t>
             </a:r>
+            <a:endParaRPr lang="en-US" dirty="0"/>
           </a:p>
           <a:p>
             <a:pPr lvl="1"/>
@@ -22542,6 +21533,7 @@
               <a:rPr lang="en-US" dirty="0"/>
               <a:t>Coding Standard</a:t>
             </a:r>
+            <a:endParaRPr lang="en-US" dirty="0"/>
           </a:p>
           <a:p>
             <a:pPr lvl="1"/>
@@ -22549,6 +21541,7 @@
               <a:rPr lang="en-US" dirty="0"/>
               <a:t>Design</a:t>
             </a:r>
+            <a:endParaRPr lang="en-US" dirty="0"/>
           </a:p>
           <a:p>
             <a:pPr lvl="1"/>
@@ -22556,6 +21549,7 @@
               <a:rPr lang="en-US" dirty="0"/>
               <a:t>Coding</a:t>
             </a:r>
+            <a:endParaRPr lang="en-US" dirty="0"/>
           </a:p>
           <a:p>
             <a:pPr lvl="1"/>
@@ -22563,6 +21557,7 @@
               <a:rPr lang="en-US" dirty="0"/>
               <a:t>Test</a:t>
             </a:r>
+            <a:endParaRPr lang="en-US" dirty="0"/>
           </a:p>
           <a:p>
             <a:r>
@@ -22573,33 +21568,36 @@
               </a:rPr>
               <a:t>Test Report</a:t>
             </a:r>
+            <a:endParaRPr lang="en-US" b="1" dirty="0">
+              <a:solidFill>
+                <a:srgbClr val="FF0000"/>
+              </a:solidFill>
+            </a:endParaRPr>
           </a:p>
           <a:p>
             <a:r>
               <a:rPr lang="en-US" dirty="0"/>
               <a:t>Size Measurement</a:t>
             </a:r>
+            <a:endParaRPr lang="en-US" dirty="0"/>
           </a:p>
           <a:p>
             <a:r>
               <a:rPr lang="en-US" dirty="0"/>
               <a:t>Postmortem</a:t>
             </a:r>
+            <a:endParaRPr lang="en-US" dirty="0"/>
           </a:p>
           <a:p>
             <a:r>
               <a:rPr lang="en-US" dirty="0"/>
               <a:t>Process Improvement Plan</a:t>
             </a:r>
+            <a:endParaRPr lang="en-US" dirty="0"/>
           </a:p>
         </p:txBody>
       </p:sp>
     </p:spTree>
-    <p:extLst>
-      <p:ext uri="{BB962C8B-B14F-4D97-AF65-F5344CB8AC3E}">
-        <p14:creationId xmlns:p14="http://schemas.microsoft.com/office/powerpoint/2010/main" val="3264438971"/>
-      </p:ext>
-    </p:extLst>
   </p:cSld>
   <p:clrMapOvr>
     <a:masterClrMapping/>
@@ -23042,7 +22040,7 @@
       </p:par>
     </p:tnLst>
     <p:bldLst>
-      <p:bldP spid="3" grpId="0" build="p" animBg="1"/>
+      <p:bldP spid="3" grpId="0" animBg="1" build="p"/>
       <p:bldP spid="4" grpId="0" animBg="1"/>
       <p:bldP spid="6" grpId="0" animBg="1"/>
     </p:bldLst>
@@ -23086,6 +22084,7 @@
               <a:rPr lang="en-US" dirty="0"/>
               <a:t>PSP Evolution (cont.)</a:t>
             </a:r>
+            <a:endParaRPr lang="en-US" dirty="0"/>
           </a:p>
         </p:txBody>
       </p:sp>
@@ -23122,7 +22121,7 @@
               <a:spcBef>
                 <a:spcPct val="20000"/>
               </a:spcBef>
-              <a:buFont typeface="Arial" pitchFamily="34" charset="0"/>
+              <a:buFont typeface="Arial" panose="020B0604020202020204" pitchFamily="34" charset="0"/>
               <a:buChar char="•"/>
               <a:defRPr sz="3200" kern="1200">
                 <a:solidFill>
@@ -23137,7 +22136,7 @@
               <a:spcBef>
                 <a:spcPct val="20000"/>
               </a:spcBef>
-              <a:buFont typeface="Arial" pitchFamily="34" charset="0"/>
+              <a:buFont typeface="Arial" panose="020B0604020202020204" pitchFamily="34" charset="0"/>
               <a:buChar char="–"/>
               <a:defRPr sz="2800" kern="1200">
                 <a:solidFill>
@@ -23152,7 +22151,7 @@
               <a:spcBef>
                 <a:spcPct val="20000"/>
               </a:spcBef>
-              <a:buFont typeface="Arial" pitchFamily="34" charset="0"/>
+              <a:buFont typeface="Arial" panose="020B0604020202020204" pitchFamily="34" charset="0"/>
               <a:buChar char="•"/>
               <a:defRPr sz="2400" kern="1200">
                 <a:solidFill>
@@ -23167,7 +22166,7 @@
               <a:spcBef>
                 <a:spcPct val="20000"/>
               </a:spcBef>
-              <a:buFont typeface="Arial" pitchFamily="34" charset="0"/>
+              <a:buFont typeface="Arial" panose="020B0604020202020204" pitchFamily="34" charset="0"/>
               <a:buChar char="–"/>
               <a:defRPr sz="2000" kern="1200">
                 <a:solidFill>
@@ -23182,7 +22181,7 @@
               <a:spcBef>
                 <a:spcPct val="20000"/>
               </a:spcBef>
-              <a:buFont typeface="Arial" pitchFamily="34" charset="0"/>
+              <a:buFont typeface="Arial" panose="020B0604020202020204" pitchFamily="34" charset="0"/>
               <a:buChar char="»"/>
               <a:defRPr sz="2000" kern="1200">
                 <a:solidFill>
@@ -23197,7 +22196,7 @@
               <a:spcBef>
                 <a:spcPct val="20000"/>
               </a:spcBef>
-              <a:buFont typeface="Arial" pitchFamily="34" charset="0"/>
+              <a:buFont typeface="Arial" panose="020B0604020202020204" pitchFamily="34" charset="0"/>
               <a:buChar char="•"/>
               <a:defRPr sz="2000" kern="1200">
                 <a:solidFill>
@@ -23212,7 +22211,7 @@
               <a:spcBef>
                 <a:spcPct val="20000"/>
               </a:spcBef>
-              <a:buFont typeface="Arial" pitchFamily="34" charset="0"/>
+              <a:buFont typeface="Arial" panose="020B0604020202020204" pitchFamily="34" charset="0"/>
               <a:buChar char="•"/>
               <a:defRPr sz="2000" kern="1200">
                 <a:solidFill>
@@ -23227,7 +22226,7 @@
               <a:spcBef>
                 <a:spcPct val="20000"/>
               </a:spcBef>
-              <a:buFont typeface="Arial" pitchFamily="34" charset="0"/>
+              <a:buFont typeface="Arial" panose="020B0604020202020204" pitchFamily="34" charset="0"/>
               <a:buChar char="•"/>
               <a:defRPr sz="2000" kern="1200">
                 <a:solidFill>
@@ -23242,7 +22241,7 @@
               <a:spcBef>
                 <a:spcPct val="20000"/>
               </a:spcBef>
-              <a:buFont typeface="Arial" pitchFamily="34" charset="0"/>
+              <a:buFont typeface="Arial" panose="020B0604020202020204" pitchFamily="34" charset="0"/>
               <a:buChar char="•"/>
               <a:defRPr sz="2000" kern="1200">
                 <a:solidFill>
@@ -23267,12 +22266,18 @@
               </a:rPr>
               <a:t>1.1</a:t>
             </a:r>
+            <a:endParaRPr lang="en-US" b="1" dirty="0">
+              <a:solidFill>
+                <a:srgbClr val="FF0000"/>
+              </a:solidFill>
+            </a:endParaRPr>
           </a:p>
           <a:p>
             <a:r>
               <a:rPr lang="en-US" dirty="0"/>
               <a:t>Planning</a:t>
             </a:r>
+            <a:endParaRPr lang="en-US" dirty="0"/>
           </a:p>
           <a:p>
             <a:pPr lvl="1"/>
@@ -23280,12 +22285,14 @@
               <a:rPr lang="en-US" dirty="0"/>
               <a:t>Estimate </a:t>
             </a:r>
+            <a:endParaRPr lang="en-US" dirty="0"/>
           </a:p>
           <a:p>
             <a:r>
               <a:rPr lang="en-US" dirty="0"/>
               <a:t>Development</a:t>
             </a:r>
+            <a:endParaRPr lang="en-US" dirty="0"/>
           </a:p>
           <a:p>
             <a:pPr lvl="1"/>
@@ -23293,6 +22300,7 @@
               <a:rPr lang="en-US" dirty="0"/>
               <a:t>Coding Standard</a:t>
             </a:r>
+            <a:endParaRPr lang="en-US" dirty="0"/>
           </a:p>
           <a:p>
             <a:pPr lvl="1"/>
@@ -23300,6 +22308,7 @@
               <a:rPr lang="en-US" dirty="0"/>
               <a:t>Design</a:t>
             </a:r>
+            <a:endParaRPr lang="en-US" dirty="0"/>
           </a:p>
           <a:p>
             <a:pPr lvl="1"/>
@@ -23307,6 +22316,7 @@
               <a:rPr lang="en-US" dirty="0"/>
               <a:t>Coding</a:t>
             </a:r>
+            <a:endParaRPr lang="en-US" dirty="0"/>
           </a:p>
           <a:p>
             <a:pPr lvl="1"/>
@@ -23314,6 +22324,7 @@
               <a:rPr lang="en-US" dirty="0"/>
               <a:t>Test</a:t>
             </a:r>
+            <a:endParaRPr lang="en-US" dirty="0"/>
           </a:p>
           <a:p>
             <a:r>
@@ -23324,39 +22335,46 @@
               </a:rPr>
               <a:t>Record Time Spent</a:t>
             </a:r>
+            <a:endParaRPr lang="en-US" b="1" dirty="0">
+              <a:solidFill>
+                <a:srgbClr val="FF0000"/>
+              </a:solidFill>
+            </a:endParaRPr>
           </a:p>
           <a:p>
             <a:r>
               <a:rPr lang="en-US" dirty="0"/>
               <a:t>Test Report</a:t>
             </a:r>
+            <a:endParaRPr lang="en-US" dirty="0"/>
           </a:p>
           <a:p>
             <a:r>
               <a:rPr lang="en-US" dirty="0"/>
               <a:t>Size Measurement</a:t>
             </a:r>
+            <a:endParaRPr lang="en-US" dirty="0"/>
           </a:p>
           <a:p>
             <a:r>
               <a:rPr lang="en-US" dirty="0"/>
               <a:t>Postmortem</a:t>
             </a:r>
+            <a:endParaRPr lang="en-US" dirty="0"/>
           </a:p>
           <a:p>
             <a:r>
               <a:rPr lang="en-US" dirty="0"/>
               <a:t>Process Improvement Plan</a:t>
             </a:r>
+            <a:endParaRPr lang="en-US" dirty="0"/>
           </a:p>
         </p:txBody>
       </p:sp>
       <p:sp>
         <p:nvSpPr>
           <p:cNvPr id="5" name="Content Placeholder 2"/>
-          <p:cNvSpPr txBox="1">
-            <a:spLocks/>
-          </p:cNvSpPr>
+          <p:cNvSpPr txBox="1"/>
           <p:nvPr/>
         </p:nvSpPr>
         <p:spPr>
@@ -23377,7 +22395,7 @@
               <a:spcBef>
                 <a:spcPct val="20000"/>
               </a:spcBef>
-              <a:buFont typeface="Arial" pitchFamily="34" charset="0"/>
+              <a:buFont typeface="Arial" panose="020B0604020202020204" pitchFamily="34" charset="0"/>
               <a:buChar char="•"/>
               <a:defRPr sz="3200" kern="1200">
                 <a:solidFill>
@@ -23392,7 +22410,7 @@
               <a:spcBef>
                 <a:spcPct val="20000"/>
               </a:spcBef>
-              <a:buFont typeface="Arial" pitchFamily="34" charset="0"/>
+              <a:buFont typeface="Arial" panose="020B0604020202020204" pitchFamily="34" charset="0"/>
               <a:buChar char="–"/>
               <a:defRPr sz="2800" kern="1200">
                 <a:solidFill>
@@ -23407,7 +22425,7 @@
               <a:spcBef>
                 <a:spcPct val="20000"/>
               </a:spcBef>
-              <a:buFont typeface="Arial" pitchFamily="34" charset="0"/>
+              <a:buFont typeface="Arial" panose="020B0604020202020204" pitchFamily="34" charset="0"/>
               <a:buChar char="•"/>
               <a:defRPr sz="2400" kern="1200">
                 <a:solidFill>
@@ -23422,7 +22440,7 @@
               <a:spcBef>
                 <a:spcPct val="20000"/>
               </a:spcBef>
-              <a:buFont typeface="Arial" pitchFamily="34" charset="0"/>
+              <a:buFont typeface="Arial" panose="020B0604020202020204" pitchFamily="34" charset="0"/>
               <a:buChar char="–"/>
               <a:defRPr sz="2000" kern="1200">
                 <a:solidFill>
@@ -23437,7 +22455,7 @@
               <a:spcBef>
                 <a:spcPct val="20000"/>
               </a:spcBef>
-              <a:buFont typeface="Arial" pitchFamily="34" charset="0"/>
+              <a:buFont typeface="Arial" panose="020B0604020202020204" pitchFamily="34" charset="0"/>
               <a:buChar char="»"/>
               <a:defRPr sz="2000" kern="1200">
                 <a:solidFill>
@@ -23452,7 +22470,7 @@
               <a:spcBef>
                 <a:spcPct val="20000"/>
               </a:spcBef>
-              <a:buFont typeface="Arial" pitchFamily="34" charset="0"/>
+              <a:buFont typeface="Arial" panose="020B0604020202020204" pitchFamily="34" charset="0"/>
               <a:buChar char="•"/>
               <a:defRPr sz="2000" kern="1200">
                 <a:solidFill>
@@ -23467,7 +22485,7 @@
               <a:spcBef>
                 <a:spcPct val="20000"/>
               </a:spcBef>
-              <a:buFont typeface="Arial" pitchFamily="34" charset="0"/>
+              <a:buFont typeface="Arial" panose="020B0604020202020204" pitchFamily="34" charset="0"/>
               <a:buChar char="•"/>
               <a:defRPr sz="2000" kern="1200">
                 <a:solidFill>
@@ -23482,7 +22500,7 @@
               <a:spcBef>
                 <a:spcPct val="20000"/>
               </a:spcBef>
-              <a:buFont typeface="Arial" pitchFamily="34" charset="0"/>
+              <a:buFont typeface="Arial" panose="020B0604020202020204" pitchFamily="34" charset="0"/>
               <a:buChar char="•"/>
               <a:defRPr sz="2000" kern="1200">
                 <a:solidFill>
@@ -23497,7 +22515,7 @@
               <a:spcBef>
                 <a:spcPct val="20000"/>
               </a:spcBef>
-              <a:buFont typeface="Arial" pitchFamily="34" charset="0"/>
+              <a:buFont typeface="Arial" panose="020B0604020202020204" pitchFamily="34" charset="0"/>
               <a:buChar char="•"/>
               <a:defRPr sz="2000" kern="1200">
                 <a:solidFill>
@@ -23517,9 +22535,7 @@
       <p:sp>
         <p:nvSpPr>
           <p:cNvPr id="10" name="Content Placeholder 2"/>
-          <p:cNvSpPr txBox="1">
-            <a:spLocks/>
-          </p:cNvSpPr>
+          <p:cNvSpPr txBox="1"/>
           <p:nvPr/>
         </p:nvSpPr>
         <p:spPr>
@@ -23549,7 +22565,7 @@
                 <a:schemeClr val="accent1"/>
               </a:buClr>
               <a:buSzPct val="85000"/>
-              <a:buFont typeface="Arial" pitchFamily="34" charset="0"/>
+              <a:buFont typeface="Arial" panose="020B0604020202020204" pitchFamily="34" charset="0"/>
               <a:buChar char="•"/>
               <a:defRPr sz="3200" kern="1200">
                 <a:solidFill>
@@ -23568,7 +22584,7 @@
                 <a:schemeClr val="accent1"/>
               </a:buClr>
               <a:buSzPct val="85000"/>
-              <a:buFont typeface="Arial" pitchFamily="34" charset="0"/>
+              <a:buFont typeface="Arial" panose="020B0604020202020204" pitchFamily="34" charset="0"/>
               <a:buChar char="–"/>
               <a:defRPr sz="2800" kern="1200">
                 <a:solidFill>
@@ -23587,7 +22603,7 @@
                 <a:schemeClr val="accent1"/>
               </a:buClr>
               <a:buSzPct val="90000"/>
-              <a:buFont typeface="Arial" pitchFamily="34" charset="0"/>
+              <a:buFont typeface="Arial" panose="020B0604020202020204" pitchFamily="34" charset="0"/>
               <a:buChar char="•"/>
               <a:defRPr sz="2400" kern="1200">
                 <a:solidFill>
@@ -23605,7 +22621,7 @@
               <a:buClr>
                 <a:schemeClr val="accent1"/>
               </a:buClr>
-              <a:buFont typeface="Arial" pitchFamily="34" charset="0"/>
+              <a:buFont typeface="Arial" panose="020B0604020202020204" pitchFamily="34" charset="0"/>
               <a:buChar char="–"/>
               <a:defRPr sz="2000" kern="1200">
                 <a:solidFill>
@@ -23624,7 +22640,7 @@
                 <a:schemeClr val="accent1"/>
               </a:buClr>
               <a:buSzPct val="100000"/>
-              <a:buFont typeface="Arial" pitchFamily="34" charset="0"/>
+              <a:buFont typeface="Arial" panose="020B0604020202020204" pitchFamily="34" charset="0"/>
               <a:buChar char="»"/>
               <a:defRPr sz="2000" kern="1200" baseline="0">
                 <a:solidFill>
@@ -23642,7 +22658,7 @@
               <a:buClr>
                 <a:schemeClr val="accent1"/>
               </a:buClr>
-              <a:buFont typeface="Arial" pitchFamily="34" charset="0"/>
+              <a:buFont typeface="Arial" panose="020B0604020202020204" pitchFamily="34" charset="0"/>
               <a:buChar char="•"/>
               <a:defRPr sz="2000" kern="1200">
                 <a:solidFill>
@@ -23660,7 +22676,7 @@
               <a:buClr>
                 <a:schemeClr val="accent1"/>
               </a:buClr>
-              <a:buFont typeface="Arial" pitchFamily="34" charset="0"/>
+              <a:buFont typeface="Arial" panose="020B0604020202020204" pitchFamily="34" charset="0"/>
               <a:buChar char="•"/>
               <a:defRPr sz="2000" kern="1200">
                 <a:solidFill>
@@ -23678,7 +22694,7 @@
               <a:buClr>
                 <a:schemeClr val="accent1"/>
               </a:buClr>
-              <a:buFont typeface="Arial" pitchFamily="34" charset="0"/>
+              <a:buFont typeface="Arial" panose="020B0604020202020204" pitchFamily="34" charset="0"/>
               <a:buChar char="•"/>
               <a:defRPr sz="2000" kern="1200">
                 <a:solidFill>
@@ -23696,7 +22712,7 @@
               <a:buClr>
                 <a:schemeClr val="accent1"/>
               </a:buClr>
-              <a:buFont typeface="Arial" pitchFamily="34" charset="0"/>
+              <a:buFont typeface="Arial" panose="020B0604020202020204" pitchFamily="34" charset="0"/>
               <a:buChar char="•"/>
               <a:defRPr sz="2000" kern="1200">
                 <a:solidFill>
@@ -23721,12 +22737,18 @@
               </a:rPr>
               <a:t>2</a:t>
             </a:r>
+            <a:endParaRPr lang="en-US" b="1" dirty="0">
+              <a:solidFill>
+                <a:srgbClr val="FF0000"/>
+              </a:solidFill>
+            </a:endParaRPr>
           </a:p>
           <a:p>
             <a:r>
               <a:rPr lang="en-US" dirty="0"/>
               <a:t>Planning</a:t>
             </a:r>
+            <a:endParaRPr lang="en-US" dirty="0"/>
           </a:p>
           <a:p>
             <a:pPr lvl="1"/>
@@ -23734,12 +22756,14 @@
               <a:rPr lang="en-US" dirty="0"/>
               <a:t>Estimate </a:t>
             </a:r>
+            <a:endParaRPr lang="en-US" dirty="0"/>
           </a:p>
           <a:p>
             <a:r>
               <a:rPr lang="en-US" dirty="0"/>
               <a:t>Development</a:t>
             </a:r>
+            <a:endParaRPr lang="en-US" dirty="0"/>
           </a:p>
           <a:p>
             <a:pPr lvl="1"/>
@@ -23751,6 +22775,11 @@
               </a:rPr>
               <a:t>Design Review</a:t>
             </a:r>
+            <a:endParaRPr lang="en-US" b="1" dirty="0">
+              <a:solidFill>
+                <a:srgbClr val="FF0000"/>
+              </a:solidFill>
+            </a:endParaRPr>
           </a:p>
           <a:p>
             <a:pPr lvl="1"/>
@@ -23758,6 +22787,7 @@
               <a:rPr lang="en-US" dirty="0"/>
               <a:t>Coding Standard</a:t>
             </a:r>
+            <a:endParaRPr lang="en-US" dirty="0"/>
           </a:p>
           <a:p>
             <a:pPr lvl="1"/>
@@ -23765,6 +22795,7 @@
               <a:rPr lang="en-US" dirty="0"/>
               <a:t>Design</a:t>
             </a:r>
+            <a:endParaRPr lang="en-US" dirty="0"/>
           </a:p>
           <a:p>
             <a:pPr lvl="1"/>
@@ -23772,6 +22803,7 @@
               <a:rPr lang="en-US" dirty="0"/>
               <a:t>Coding</a:t>
             </a:r>
+            <a:endParaRPr lang="en-US" dirty="0"/>
           </a:p>
           <a:p>
             <a:pPr lvl="1"/>
@@ -23783,6 +22815,11 @@
               </a:rPr>
               <a:t>Code Review</a:t>
             </a:r>
+            <a:endParaRPr lang="en-US" b="1" dirty="0">
+              <a:solidFill>
+                <a:srgbClr val="FF0000"/>
+              </a:solidFill>
+            </a:endParaRPr>
           </a:p>
           <a:p>
             <a:pPr lvl="1"/>
@@ -23790,45 +22827,49 @@
               <a:rPr lang="en-US" dirty="0"/>
               <a:t>Test</a:t>
             </a:r>
+            <a:endParaRPr lang="en-US" dirty="0"/>
           </a:p>
           <a:p>
             <a:r>
               <a:rPr lang="en-US" dirty="0"/>
               <a:t>Record Time Spent</a:t>
             </a:r>
+            <a:endParaRPr lang="en-US" dirty="0"/>
           </a:p>
           <a:p>
             <a:r>
               <a:rPr lang="en-US" dirty="0"/>
               <a:t>Test Report</a:t>
             </a:r>
+            <a:endParaRPr lang="en-US" dirty="0"/>
           </a:p>
           <a:p>
             <a:r>
               <a:rPr lang="en-US" dirty="0"/>
               <a:t>Size Measurement</a:t>
             </a:r>
+            <a:endParaRPr lang="en-US" dirty="0"/>
           </a:p>
           <a:p>
             <a:r>
               <a:rPr lang="en-US" dirty="0"/>
               <a:t>Postmortem</a:t>
             </a:r>
+            <a:endParaRPr lang="en-US" dirty="0"/>
           </a:p>
           <a:p>
             <a:r>
               <a:rPr lang="en-US" dirty="0"/>
               <a:t>Process Improvement Plan</a:t>
             </a:r>
+            <a:endParaRPr lang="en-US" dirty="0"/>
           </a:p>
         </p:txBody>
       </p:sp>
       <p:sp>
         <p:nvSpPr>
           <p:cNvPr id="11" name="Content Placeholder 2"/>
-          <p:cNvSpPr txBox="1">
-            <a:spLocks/>
-          </p:cNvSpPr>
+          <p:cNvSpPr txBox="1"/>
           <p:nvPr/>
         </p:nvSpPr>
         <p:spPr>
@@ -23858,7 +22899,7 @@
                 <a:schemeClr val="accent1"/>
               </a:buClr>
               <a:buSzPct val="85000"/>
-              <a:buFont typeface="Arial" pitchFamily="34" charset="0"/>
+              <a:buFont typeface="Arial" panose="020B0604020202020204" pitchFamily="34" charset="0"/>
               <a:buChar char="•"/>
               <a:defRPr sz="3200" kern="1200">
                 <a:solidFill>
@@ -23877,7 +22918,7 @@
                 <a:schemeClr val="accent1"/>
               </a:buClr>
               <a:buSzPct val="85000"/>
-              <a:buFont typeface="Arial" pitchFamily="34" charset="0"/>
+              <a:buFont typeface="Arial" panose="020B0604020202020204" pitchFamily="34" charset="0"/>
               <a:buChar char="–"/>
               <a:defRPr sz="2800" kern="1200">
                 <a:solidFill>
@@ -23896,7 +22937,7 @@
                 <a:schemeClr val="accent1"/>
               </a:buClr>
               <a:buSzPct val="90000"/>
-              <a:buFont typeface="Arial" pitchFamily="34" charset="0"/>
+              <a:buFont typeface="Arial" panose="020B0604020202020204" pitchFamily="34" charset="0"/>
               <a:buChar char="•"/>
               <a:defRPr sz="2400" kern="1200">
                 <a:solidFill>
@@ -23914,7 +22955,7 @@
               <a:buClr>
                 <a:schemeClr val="accent1"/>
               </a:buClr>
-              <a:buFont typeface="Arial" pitchFamily="34" charset="0"/>
+              <a:buFont typeface="Arial" panose="020B0604020202020204" pitchFamily="34" charset="0"/>
               <a:buChar char="–"/>
               <a:defRPr sz="2000" kern="1200">
                 <a:solidFill>
@@ -23933,7 +22974,7 @@
                 <a:schemeClr val="accent1"/>
               </a:buClr>
               <a:buSzPct val="100000"/>
-              <a:buFont typeface="Arial" pitchFamily="34" charset="0"/>
+              <a:buFont typeface="Arial" panose="020B0604020202020204" pitchFamily="34" charset="0"/>
               <a:buChar char="»"/>
               <a:defRPr sz="2000" kern="1200" baseline="0">
                 <a:solidFill>
@@ -23951,7 +22992,7 @@
               <a:buClr>
                 <a:schemeClr val="accent1"/>
               </a:buClr>
-              <a:buFont typeface="Arial" pitchFamily="34" charset="0"/>
+              <a:buFont typeface="Arial" panose="020B0604020202020204" pitchFamily="34" charset="0"/>
               <a:buChar char="•"/>
               <a:defRPr sz="2000" kern="1200">
                 <a:solidFill>
@@ -23969,7 +23010,7 @@
               <a:buClr>
                 <a:schemeClr val="accent1"/>
               </a:buClr>
-              <a:buFont typeface="Arial" pitchFamily="34" charset="0"/>
+              <a:buFont typeface="Arial" panose="020B0604020202020204" pitchFamily="34" charset="0"/>
               <a:buChar char="•"/>
               <a:defRPr sz="2000" kern="1200">
                 <a:solidFill>
@@ -23987,7 +23028,7 @@
               <a:buClr>
                 <a:schemeClr val="accent1"/>
               </a:buClr>
-              <a:buFont typeface="Arial" pitchFamily="34" charset="0"/>
+              <a:buFont typeface="Arial" panose="020B0604020202020204" pitchFamily="34" charset="0"/>
               <a:buChar char="•"/>
               <a:defRPr sz="2000" kern="1200">
                 <a:solidFill>
@@ -24005,7 +23046,7 @@
               <a:buClr>
                 <a:schemeClr val="accent1"/>
               </a:buClr>
-              <a:buFont typeface="Arial" pitchFamily="34" charset="0"/>
+              <a:buFont typeface="Arial" panose="020B0604020202020204" pitchFamily="34" charset="0"/>
               <a:buChar char="•"/>
               <a:defRPr sz="2000" kern="1200">
                 <a:solidFill>
@@ -24030,12 +23071,18 @@
               </a:rPr>
               <a:t>2.1</a:t>
             </a:r>
+            <a:endParaRPr lang="en-US" b="1" dirty="0">
+              <a:solidFill>
+                <a:srgbClr val="FF0000"/>
+              </a:solidFill>
+            </a:endParaRPr>
           </a:p>
           <a:p>
             <a:r>
               <a:rPr lang="en-US" dirty="0"/>
               <a:t>Planning</a:t>
             </a:r>
+            <a:endParaRPr lang="en-US" dirty="0"/>
           </a:p>
           <a:p>
             <a:pPr lvl="1"/>
@@ -24043,12 +23090,14 @@
               <a:rPr lang="en-US" dirty="0"/>
               <a:t>Estimate </a:t>
             </a:r>
+            <a:endParaRPr lang="en-US" dirty="0"/>
           </a:p>
           <a:p>
             <a:r>
               <a:rPr lang="en-US" dirty="0"/>
               <a:t>Development</a:t>
             </a:r>
+            <a:endParaRPr lang="en-US" dirty="0"/>
           </a:p>
           <a:p>
             <a:pPr lvl="1"/>
@@ -24060,6 +23109,11 @@
               </a:rPr>
               <a:t>Analysis </a:t>
             </a:r>
+            <a:endParaRPr lang="en-US" b="1" dirty="0">
+              <a:solidFill>
+                <a:srgbClr val="FF0000"/>
+              </a:solidFill>
+            </a:endParaRPr>
           </a:p>
           <a:p>
             <a:pPr lvl="1"/>
@@ -24071,6 +23125,11 @@
               </a:rPr>
               <a:t>Design Spec</a:t>
             </a:r>
+            <a:endParaRPr lang="en-US" b="1" dirty="0">
+              <a:solidFill>
+                <a:srgbClr val="FF0000"/>
+              </a:solidFill>
+            </a:endParaRPr>
           </a:p>
           <a:p>
             <a:pPr lvl="1"/>
@@ -24078,6 +23137,7 @@
               <a:rPr lang="en-US" dirty="0"/>
               <a:t>Design Review</a:t>
             </a:r>
+            <a:endParaRPr lang="en-US" dirty="0"/>
           </a:p>
           <a:p>
             <a:pPr lvl="1"/>
@@ -24085,6 +23145,7 @@
               <a:rPr lang="en-US" dirty="0"/>
               <a:t>Coding Standard</a:t>
             </a:r>
+            <a:endParaRPr lang="en-US" dirty="0"/>
           </a:p>
           <a:p>
             <a:pPr lvl="1"/>
@@ -24092,6 +23153,7 @@
               <a:rPr lang="en-US" dirty="0"/>
               <a:t>Design</a:t>
             </a:r>
+            <a:endParaRPr lang="en-US" dirty="0"/>
           </a:p>
           <a:p>
             <a:pPr lvl="1"/>
@@ -24099,6 +23161,7 @@
               <a:rPr lang="en-US" dirty="0"/>
               <a:t>Coding</a:t>
             </a:r>
+            <a:endParaRPr lang="en-US" dirty="0"/>
           </a:p>
           <a:p>
             <a:pPr lvl="1"/>
@@ -24106,6 +23169,7 @@
               <a:rPr lang="en-US" dirty="0"/>
               <a:t>Code Review</a:t>
             </a:r>
+            <a:endParaRPr lang="en-US" dirty="0"/>
           </a:p>
           <a:p>
             <a:pPr lvl="1"/>
@@ -24113,45 +23177,46 @@
               <a:rPr lang="en-US" dirty="0"/>
               <a:t>Test</a:t>
             </a:r>
+            <a:endParaRPr lang="en-US" dirty="0"/>
           </a:p>
           <a:p>
             <a:r>
               <a:rPr lang="en-US" dirty="0"/>
               <a:t>Record Time Spent</a:t>
             </a:r>
+            <a:endParaRPr lang="en-US" dirty="0"/>
           </a:p>
           <a:p>
             <a:r>
               <a:rPr lang="en-US" dirty="0"/>
               <a:t>Test Report</a:t>
             </a:r>
+            <a:endParaRPr lang="en-US" dirty="0"/>
           </a:p>
           <a:p>
             <a:r>
               <a:rPr lang="en-US" dirty="0"/>
               <a:t>Size Measurement</a:t>
             </a:r>
+            <a:endParaRPr lang="en-US" dirty="0"/>
           </a:p>
           <a:p>
             <a:r>
               <a:rPr lang="en-US" dirty="0"/>
               <a:t>Postmortem</a:t>
             </a:r>
+            <a:endParaRPr lang="en-US" dirty="0"/>
           </a:p>
           <a:p>
             <a:r>
               <a:rPr lang="en-US" dirty="0"/>
               <a:t>Process Improvement Plan</a:t>
             </a:r>
+            <a:endParaRPr lang="en-US" dirty="0"/>
           </a:p>
         </p:txBody>
       </p:sp>
     </p:spTree>
-    <p:extLst>
-      <p:ext uri="{BB962C8B-B14F-4D97-AF65-F5344CB8AC3E}">
-        <p14:creationId xmlns:p14="http://schemas.microsoft.com/office/powerpoint/2010/main" val="601280872"/>
-      </p:ext>
-    </p:extLst>
   </p:cSld>
   <p:clrMapOvr>
     <a:masterClrMapping/>
@@ -24373,6 +23438,7 @@
               <a:rPr lang="en-US" dirty="0"/>
               <a:t>:</a:t>
             </a:r>
+            <a:endParaRPr lang="en-US" dirty="0"/>
           </a:p>
         </p:txBody>
       </p:sp>
@@ -24408,6 +23474,7 @@
               <a:rPr lang="en-US" sz="2400" dirty="0"/>
               <a:t>:</a:t>
             </a:r>
+            <a:endParaRPr lang="en-US" sz="2400" dirty="0"/>
           </a:p>
           <a:p>
             <a:r>
@@ -24430,6 +23497,7 @@
               <a:rPr lang="en-US" sz="2400" dirty="0"/>
               <a:t>of code (LOC).</a:t>
             </a:r>
+            <a:endParaRPr lang="en-US" sz="2400" dirty="0"/>
           </a:p>
           <a:p>
             <a:endParaRPr lang="en-US" sz="2200" dirty="0"/>
@@ -24472,6 +23540,7 @@
               <a:rPr lang="en-US" sz="2400" dirty="0"/>
               <a:t>.</a:t>
             </a:r>
+            <a:endParaRPr lang="en-US" sz="2400" dirty="0"/>
           </a:p>
           <a:p>
             <a:pPr marL="457200" lvl="1" indent="0">
@@ -25039,11 +24108,9 @@
       </a:bgFillStyleLst>
     </a:fmtScheme>
   </a:themeElements>
-  <a:objectDefaults/>
-  <a:extraClrSchemeLst/>
   <a:extLst>
     <a:ext uri="{05A4C25C-085E-4340-85A3-A5531E510DB2}">
-      <thm15:themeFamily xmlns:thm15="http://schemas.microsoft.com/office/thememl/2012/main" name="Depth" id="{7BEAFC2A-325C-49C4-AC08-2B765DA903F9}" vid="{1735E755-43E6-43AA-ABA2-C989ECC79AF5}"/>
+      <thm15:themeFamily xmlns:thm15="http://schemas.microsoft.com/office/thememl/2012/main" name="Office Theme" id="{62F939B6-93AF-4DB8-9C6B-D6C7DFDC589F}" vid="{4A3C46E8-61CC-4603-A589-7422A47A8E4A}"/>
     </a:ext>
   </a:extLst>
 </a:theme>
@@ -25327,8 +24394,11 @@
       </a:bgFillStyleLst>
     </a:fmtScheme>
   </a:themeElements>
-  <a:objectDefaults/>
-  <a:extraClrSchemeLst/>
+  <a:extLst>
+    <a:ext uri="{05A4C25C-085E-4340-85A3-A5531E510DB2}">
+      <thm15:themeFamily xmlns:thm15="http://schemas.microsoft.com/office/thememl/2012/main" name="Office Theme" id="{62F939B6-93AF-4DB8-9C6B-D6C7DFDC589F}" vid="{4A3C46E8-61CC-4603-A589-7422A47A8E4A}"/>
+    </a:ext>
+  </a:extLst>
 </a:theme>
 </file>
 
@@ -25463,33 +24533,18 @@
 
 <file path=customXml/itemProps1.xml><?xml version="1.0" encoding="utf-8"?>
 <ds:datastoreItem xmlns:ds="http://schemas.openxmlformats.org/officeDocument/2006/customXml" ds:itemID="{B3B0C391-DDE3-4D99-8DB2-DCB9F2C70771}">
-  <ds:schemaRefs>
-    <ds:schemaRef ds:uri="http://schemas.microsoft.com/office/2006/metadata/contentType"/>
-    <ds:schemaRef ds:uri="http://schemas.microsoft.com/office/2006/metadata/properties/metaAttributes"/>
-    <ds:schemaRef ds:uri="http://www.w3.org/2001/XMLSchema"/>
-    <ds:schemaRef ds:uri="http://schemas.microsoft.com/office/2006/metadata/properties"/>
-    <ds:schemaRef ds:uri="http://schemas.openxmlformats.org/package/2006/metadata/core-properties"/>
-    <ds:schemaRef ds:uri="http://purl.org/dc/elements/1.1/"/>
-    <ds:schemaRef ds:uri="http://purl.org/dc/terms/"/>
-    <ds:schemaRef ds:uri="http://schemas.microsoft.com/internal/obd"/>
-    <ds:schemaRef ds:uri="http://schemas.microsoft.com/office/infopath/2007/PartnerControls"/>
-  </ds:schemaRefs>
+  <ds:schemaRefs/>
 </ds:datastoreItem>
 </file>
 
 <file path=customXml/itemProps2.xml><?xml version="1.0" encoding="utf-8"?>
 <ds:datastoreItem xmlns:ds="http://schemas.openxmlformats.org/officeDocument/2006/customXml" ds:itemID="{AC38B70B-68EE-413F-8243-C962F94ACA64}">
-  <ds:schemaRefs>
-    <ds:schemaRef ds:uri="http://schemas.microsoft.com/office/2006/metadata/properties"/>
-    <ds:schemaRef ds:uri="http://schemas.microsoft.com/office/infopath/2007/PartnerControls"/>
-  </ds:schemaRefs>
+  <ds:schemaRefs/>
 </ds:datastoreItem>
 </file>
 
 <file path=customXml/itemProps3.xml><?xml version="1.0" encoding="utf-8"?>
 <ds:datastoreItem xmlns:ds="http://schemas.openxmlformats.org/officeDocument/2006/customXml" ds:itemID="{8768B0E8-F7C4-4929-B0A1-8ECCA4ABBF95}">
-  <ds:schemaRefs>
-    <ds:schemaRef ds:uri="http://schemas.microsoft.com/sharepoint/v3/contenttype/forms"/>
-  </ds:schemaRefs>
+  <ds:schemaRefs/>
 </ds:datastoreItem>
 </file>